--- a/Bahraini_Food_Detector_Results.pptx
+++ b/Bahraini_Food_Detector_Results.pptx
@@ -5,17 +5,18 @@
     <p:sldMasterId id="2147483648" r:id="rId1"/>
   </p:sldMasterIdLst>
   <p:sldIdLst>
-    <p:sldId id="256" r:id="rId7"/>
-    <p:sldId id="257" r:id="rId8"/>
-    <p:sldId id="258" r:id="rId9"/>
-    <p:sldId id="259" r:id="rId10"/>
-    <p:sldId id="260" r:id="rId11"/>
-    <p:sldId id="261" r:id="rId12"/>
-    <p:sldId id="262" r:id="rId13"/>
-    <p:sldId id="263" r:id="rId14"/>
-    <p:sldId id="264" r:id="rId15"/>
+    <p:sldId id="256" r:id="rId2"/>
+    <p:sldId id="257" r:id="rId3"/>
+    <p:sldId id="258" r:id="rId4"/>
+    <p:sldId id="259" r:id="rId5"/>
+    <p:sldId id="260" r:id="rId6"/>
+    <p:sldId id="261" r:id="rId7"/>
+    <p:sldId id="262" r:id="rId8"/>
+    <p:sldId id="263" r:id="rId9"/>
+    <p:sldId id="264" r:id="rId10"/>
+    <p:sldId id="265" r:id="rId11"/>
   </p:sldIdLst>
-  <p:sldSz cx="12191695" cy="6858000" type="screen4x3"/>
+  <p:sldSz cx="12192000" cy="6858000"/>
   <p:notesSz cx="6858000" cy="9144000"/>
   <p:defaultTextStyle>
     <a:defPPr>
@@ -112,6 +113,22 @@
       </a:defRPr>
     </a:lvl9pPr>
   </p:defaultTextStyle>
+  <p:extLst>
+    <p:ext uri="{EFAFB233-063F-42B5-8137-9DF3F51BA10A}">
+      <p15:sldGuideLst xmlns:p15="http://schemas.microsoft.com/office/powerpoint/2012/main">
+        <p15:guide id="1" orient="horz" pos="2160">
+          <p15:clr>
+            <a:srgbClr val="A4A3A4"/>
+          </p15:clr>
+        </p15:guide>
+        <p15:guide id="2" pos="2880">
+          <p15:clr>
+            <a:srgbClr val="A4A3A4"/>
+          </p15:clr>
+        </p15:guide>
+      </p15:sldGuideLst>
+    </p:ext>
+  </p:extLst>
 </p:presentation>
 </file>
 
@@ -153,10 +170,9 @@
           <a:lstStyle/>
           <a:p>
             <a:r>
-              <a:rPr lang="en-US" smtClean="0"/>
+              <a:rPr lang="en-US"/>
               <a:t>Click to edit Master title style</a:t>
             </a:r>
-            <a:endParaRPr lang="en-US"/>
           </a:p>
         </p:txBody>
       </p:sp>
@@ -272,10 +288,9 @@
           </a:lstStyle>
           <a:p>
             <a:r>
-              <a:rPr lang="en-US" smtClean="0"/>
+              <a:rPr lang="en-US"/>
               <a:t>Click to edit Master subtitle style</a:t>
             </a:r>
-            <a:endParaRPr lang="en-US"/>
           </a:p>
         </p:txBody>
       </p:sp>
@@ -296,7 +311,7 @@
           <a:p>
             <a:fld id="{5BCAD085-E8A6-8845-BD4E-CB4CCA059FC4}" type="datetimeFigureOut">
               <a:rPr lang="en-US" smtClean="0"/>
-              <a:t>1/27/13</a:t>
+              <a:t>8/13/2026</a:t>
             </a:fld>
             <a:endParaRPr lang="en-US"/>
           </a:p>
@@ -390,10 +405,9 @@
           <a:lstStyle/>
           <a:p>
             <a:r>
-              <a:rPr lang="en-US" smtClean="0"/>
+              <a:rPr lang="en-US"/>
               <a:t>Click to edit Master title style</a:t>
             </a:r>
-            <a:endParaRPr lang="en-US"/>
           </a:p>
         </p:txBody>
       </p:sp>
@@ -414,38 +428,37 @@
           <a:p>
             <a:pPr lvl="0"/>
             <a:r>
-              <a:rPr lang="en-US" smtClean="0"/>
+              <a:rPr lang="en-US"/>
               <a:t>Click to edit Master text styles</a:t>
             </a:r>
           </a:p>
           <a:p>
             <a:pPr lvl="1"/>
             <a:r>
-              <a:rPr lang="en-US" smtClean="0"/>
+              <a:rPr lang="en-US"/>
               <a:t>Second level</a:t>
             </a:r>
           </a:p>
           <a:p>
             <a:pPr lvl="2"/>
             <a:r>
-              <a:rPr lang="en-US" smtClean="0"/>
+              <a:rPr lang="en-US"/>
               <a:t>Third level</a:t>
             </a:r>
           </a:p>
           <a:p>
             <a:pPr lvl="3"/>
             <a:r>
-              <a:rPr lang="en-US" smtClean="0"/>
+              <a:rPr lang="en-US"/>
               <a:t>Fourth level</a:t>
             </a:r>
           </a:p>
           <a:p>
             <a:pPr lvl="4"/>
             <a:r>
-              <a:rPr lang="en-US" smtClean="0"/>
+              <a:rPr lang="en-US"/>
               <a:t>Fifth level</a:t>
             </a:r>
-            <a:endParaRPr lang="en-US"/>
           </a:p>
         </p:txBody>
       </p:sp>
@@ -466,7 +479,7 @@
           <a:p>
             <a:fld id="{5BCAD085-E8A6-8845-BD4E-CB4CCA059FC4}" type="datetimeFigureOut">
               <a:rPr lang="en-US" smtClean="0"/>
-              <a:t>1/27/13</a:t>
+              <a:t>8/13/2026</a:t>
             </a:fld>
             <a:endParaRPr lang="en-US"/>
           </a:p>
@@ -565,10 +578,9 @@
           <a:lstStyle/>
           <a:p>
             <a:r>
-              <a:rPr lang="en-US" smtClean="0"/>
+              <a:rPr lang="en-US"/>
               <a:t>Click to edit Master title style</a:t>
             </a:r>
-            <a:endParaRPr lang="en-US"/>
           </a:p>
         </p:txBody>
       </p:sp>
@@ -594,38 +606,37 @@
           <a:p>
             <a:pPr lvl="0"/>
             <a:r>
-              <a:rPr lang="en-US" smtClean="0"/>
+              <a:rPr lang="en-US"/>
               <a:t>Click to edit Master text styles</a:t>
             </a:r>
           </a:p>
           <a:p>
             <a:pPr lvl="1"/>
             <a:r>
-              <a:rPr lang="en-US" smtClean="0"/>
+              <a:rPr lang="en-US"/>
               <a:t>Second level</a:t>
             </a:r>
           </a:p>
           <a:p>
             <a:pPr lvl="2"/>
             <a:r>
-              <a:rPr lang="en-US" smtClean="0"/>
+              <a:rPr lang="en-US"/>
               <a:t>Third level</a:t>
             </a:r>
           </a:p>
           <a:p>
             <a:pPr lvl="3"/>
             <a:r>
-              <a:rPr lang="en-US" smtClean="0"/>
+              <a:rPr lang="en-US"/>
               <a:t>Fourth level</a:t>
             </a:r>
           </a:p>
           <a:p>
             <a:pPr lvl="4"/>
             <a:r>
-              <a:rPr lang="en-US" smtClean="0"/>
+              <a:rPr lang="en-US"/>
               <a:t>Fifth level</a:t>
             </a:r>
-            <a:endParaRPr lang="en-US"/>
           </a:p>
         </p:txBody>
       </p:sp>
@@ -646,7 +657,7 @@
           <a:p>
             <a:fld id="{5BCAD085-E8A6-8845-BD4E-CB4CCA059FC4}" type="datetimeFigureOut">
               <a:rPr lang="en-US" smtClean="0"/>
-              <a:t>1/27/13</a:t>
+              <a:t>8/13/2026</a:t>
             </a:fld>
             <a:endParaRPr lang="en-US"/>
           </a:p>
@@ -740,10 +751,9 @@
           <a:lstStyle/>
           <a:p>
             <a:r>
-              <a:rPr lang="en-US" smtClean="0"/>
+              <a:rPr lang="en-US"/>
               <a:t>Click to edit Master title style</a:t>
             </a:r>
-            <a:endParaRPr lang="en-US"/>
           </a:p>
         </p:txBody>
       </p:sp>
@@ -764,38 +774,37 @@
           <a:p>
             <a:pPr lvl="0"/>
             <a:r>
-              <a:rPr lang="en-US" smtClean="0"/>
+              <a:rPr lang="en-US"/>
               <a:t>Click to edit Master text styles</a:t>
             </a:r>
           </a:p>
           <a:p>
             <a:pPr lvl="1"/>
             <a:r>
-              <a:rPr lang="en-US" smtClean="0"/>
+              <a:rPr lang="en-US"/>
               <a:t>Second level</a:t>
             </a:r>
           </a:p>
           <a:p>
             <a:pPr lvl="2"/>
             <a:r>
-              <a:rPr lang="en-US" smtClean="0"/>
+              <a:rPr lang="en-US"/>
               <a:t>Third level</a:t>
             </a:r>
           </a:p>
           <a:p>
             <a:pPr lvl="3"/>
             <a:r>
-              <a:rPr lang="en-US" smtClean="0"/>
+              <a:rPr lang="en-US"/>
               <a:t>Fourth level</a:t>
             </a:r>
           </a:p>
           <a:p>
             <a:pPr lvl="4"/>
             <a:r>
-              <a:rPr lang="en-US" smtClean="0"/>
+              <a:rPr lang="en-US"/>
               <a:t>Fifth level</a:t>
             </a:r>
-            <a:endParaRPr lang="en-US"/>
           </a:p>
         </p:txBody>
       </p:sp>
@@ -816,7 +825,7 @@
           <a:p>
             <a:fld id="{5BCAD085-E8A6-8845-BD4E-CB4CCA059FC4}" type="datetimeFigureOut">
               <a:rPr lang="en-US" smtClean="0"/>
-              <a:t>1/27/13</a:t>
+              <a:t>8/13/2026</a:t>
             </a:fld>
             <a:endParaRPr lang="en-US"/>
           </a:p>
@@ -919,10 +928,9 @@
           </a:lstStyle>
           <a:p>
             <a:r>
-              <a:rPr lang="en-US" smtClean="0"/>
+              <a:rPr lang="en-US"/>
               <a:t>Click to edit Master title style</a:t>
             </a:r>
-            <a:endParaRPr lang="en-US"/>
           </a:p>
         </p:txBody>
       </p:sp>
@@ -1039,7 +1047,7 @@
           <a:p>
             <a:pPr lvl="0"/>
             <a:r>
-              <a:rPr lang="en-US" smtClean="0"/>
+              <a:rPr lang="en-US"/>
               <a:t>Click to edit Master text styles</a:t>
             </a:r>
           </a:p>
@@ -1062,7 +1070,7 @@
           <a:p>
             <a:fld id="{5BCAD085-E8A6-8845-BD4E-CB4CCA059FC4}" type="datetimeFigureOut">
               <a:rPr lang="en-US" smtClean="0"/>
-              <a:t>1/27/13</a:t>
+              <a:t>8/13/2026</a:t>
             </a:fld>
             <a:endParaRPr lang="en-US"/>
           </a:p>
@@ -1156,10 +1164,9 @@
           <a:lstStyle/>
           <a:p>
             <a:r>
-              <a:rPr lang="en-US" smtClean="0"/>
+              <a:rPr lang="en-US"/>
               <a:t>Click to edit Master title style</a:t>
             </a:r>
-            <a:endParaRPr lang="en-US"/>
           </a:p>
         </p:txBody>
       </p:sp>
@@ -1213,38 +1220,37 @@
           <a:p>
             <a:pPr lvl="0"/>
             <a:r>
-              <a:rPr lang="en-US" smtClean="0"/>
+              <a:rPr lang="en-US"/>
               <a:t>Click to edit Master text styles</a:t>
             </a:r>
           </a:p>
           <a:p>
             <a:pPr lvl="1"/>
             <a:r>
-              <a:rPr lang="en-US" smtClean="0"/>
+              <a:rPr lang="en-US"/>
               <a:t>Second level</a:t>
             </a:r>
           </a:p>
           <a:p>
             <a:pPr lvl="2"/>
             <a:r>
-              <a:rPr lang="en-US" smtClean="0"/>
+              <a:rPr lang="en-US"/>
               <a:t>Third level</a:t>
             </a:r>
           </a:p>
           <a:p>
             <a:pPr lvl="3"/>
             <a:r>
-              <a:rPr lang="en-US" smtClean="0"/>
+              <a:rPr lang="en-US"/>
               <a:t>Fourth level</a:t>
             </a:r>
           </a:p>
           <a:p>
             <a:pPr lvl="4"/>
             <a:r>
-              <a:rPr lang="en-US" smtClean="0"/>
+              <a:rPr lang="en-US"/>
               <a:t>Fifth level</a:t>
             </a:r>
-            <a:endParaRPr lang="en-US"/>
           </a:p>
         </p:txBody>
       </p:sp>
@@ -1298,38 +1304,37 @@
           <a:p>
             <a:pPr lvl="0"/>
             <a:r>
-              <a:rPr lang="en-US" smtClean="0"/>
+              <a:rPr lang="en-US"/>
               <a:t>Click to edit Master text styles</a:t>
             </a:r>
           </a:p>
           <a:p>
             <a:pPr lvl="1"/>
             <a:r>
-              <a:rPr lang="en-US" smtClean="0"/>
+              <a:rPr lang="en-US"/>
               <a:t>Second level</a:t>
             </a:r>
           </a:p>
           <a:p>
             <a:pPr lvl="2"/>
             <a:r>
-              <a:rPr lang="en-US" smtClean="0"/>
+              <a:rPr lang="en-US"/>
               <a:t>Third level</a:t>
             </a:r>
           </a:p>
           <a:p>
             <a:pPr lvl="3"/>
             <a:r>
-              <a:rPr lang="en-US" smtClean="0"/>
+              <a:rPr lang="en-US"/>
               <a:t>Fourth level</a:t>
             </a:r>
           </a:p>
           <a:p>
             <a:pPr lvl="4"/>
             <a:r>
-              <a:rPr lang="en-US" smtClean="0"/>
+              <a:rPr lang="en-US"/>
               <a:t>Fifth level</a:t>
             </a:r>
-            <a:endParaRPr lang="en-US"/>
           </a:p>
         </p:txBody>
       </p:sp>
@@ -1350,7 +1355,7 @@
           <a:p>
             <a:fld id="{5BCAD085-E8A6-8845-BD4E-CB4CCA059FC4}" type="datetimeFigureOut">
               <a:rPr lang="en-US" smtClean="0"/>
-              <a:t>1/27/13</a:t>
+              <a:t>8/13/2026</a:t>
             </a:fld>
             <a:endParaRPr lang="en-US"/>
           </a:p>
@@ -1448,10 +1453,9 @@
           </a:lstStyle>
           <a:p>
             <a:r>
-              <a:rPr lang="en-US" smtClean="0"/>
+              <a:rPr lang="en-US"/>
               <a:t>Click to edit Master title style</a:t>
             </a:r>
-            <a:endParaRPr lang="en-US"/>
           </a:p>
         </p:txBody>
       </p:sp>
@@ -1514,7 +1518,7 @@
           <a:p>
             <a:pPr lvl="0"/>
             <a:r>
-              <a:rPr lang="en-US" smtClean="0"/>
+              <a:rPr lang="en-US"/>
               <a:t>Click to edit Master text styles</a:t>
             </a:r>
           </a:p>
@@ -1570,38 +1574,37 @@
           <a:p>
             <a:pPr lvl="0"/>
             <a:r>
-              <a:rPr lang="en-US" smtClean="0"/>
+              <a:rPr lang="en-US"/>
               <a:t>Click to edit Master text styles</a:t>
             </a:r>
           </a:p>
           <a:p>
             <a:pPr lvl="1"/>
             <a:r>
-              <a:rPr lang="en-US" smtClean="0"/>
+              <a:rPr lang="en-US"/>
               <a:t>Second level</a:t>
             </a:r>
           </a:p>
           <a:p>
             <a:pPr lvl="2"/>
             <a:r>
-              <a:rPr lang="en-US" smtClean="0"/>
+              <a:rPr lang="en-US"/>
               <a:t>Third level</a:t>
             </a:r>
           </a:p>
           <a:p>
             <a:pPr lvl="3"/>
             <a:r>
-              <a:rPr lang="en-US" smtClean="0"/>
+              <a:rPr lang="en-US"/>
               <a:t>Fourth level</a:t>
             </a:r>
           </a:p>
           <a:p>
             <a:pPr lvl="4"/>
             <a:r>
-              <a:rPr lang="en-US" smtClean="0"/>
+              <a:rPr lang="en-US"/>
               <a:t>Fifth level</a:t>
             </a:r>
-            <a:endParaRPr lang="en-US"/>
           </a:p>
         </p:txBody>
       </p:sp>
@@ -1664,7 +1667,7 @@
           <a:p>
             <a:pPr lvl="0"/>
             <a:r>
-              <a:rPr lang="en-US" smtClean="0"/>
+              <a:rPr lang="en-US"/>
               <a:t>Click to edit Master text styles</a:t>
             </a:r>
           </a:p>
@@ -1720,38 +1723,37 @@
           <a:p>
             <a:pPr lvl="0"/>
             <a:r>
-              <a:rPr lang="en-US" smtClean="0"/>
+              <a:rPr lang="en-US"/>
               <a:t>Click to edit Master text styles</a:t>
             </a:r>
           </a:p>
           <a:p>
             <a:pPr lvl="1"/>
             <a:r>
-              <a:rPr lang="en-US" smtClean="0"/>
+              <a:rPr lang="en-US"/>
               <a:t>Second level</a:t>
             </a:r>
           </a:p>
           <a:p>
             <a:pPr lvl="2"/>
             <a:r>
-              <a:rPr lang="en-US" smtClean="0"/>
+              <a:rPr lang="en-US"/>
               <a:t>Third level</a:t>
             </a:r>
           </a:p>
           <a:p>
             <a:pPr lvl="3"/>
             <a:r>
-              <a:rPr lang="en-US" smtClean="0"/>
+              <a:rPr lang="en-US"/>
               <a:t>Fourth level</a:t>
             </a:r>
           </a:p>
           <a:p>
             <a:pPr lvl="4"/>
             <a:r>
-              <a:rPr lang="en-US" smtClean="0"/>
+              <a:rPr lang="en-US"/>
               <a:t>Fifth level</a:t>
             </a:r>
-            <a:endParaRPr lang="en-US"/>
           </a:p>
         </p:txBody>
       </p:sp>
@@ -1772,7 +1774,7 @@
           <a:p>
             <a:fld id="{5BCAD085-E8A6-8845-BD4E-CB4CCA059FC4}" type="datetimeFigureOut">
               <a:rPr lang="en-US" smtClean="0"/>
-              <a:t>1/27/13</a:t>
+              <a:t>8/13/2026</a:t>
             </a:fld>
             <a:endParaRPr lang="en-US"/>
           </a:p>
@@ -1866,10 +1868,9 @@
           <a:lstStyle/>
           <a:p>
             <a:r>
-              <a:rPr lang="en-US" smtClean="0"/>
+              <a:rPr lang="en-US"/>
               <a:t>Click to edit Master title style</a:t>
             </a:r>
-            <a:endParaRPr lang="en-US"/>
           </a:p>
         </p:txBody>
       </p:sp>
@@ -1890,7 +1891,7 @@
           <a:p>
             <a:fld id="{5BCAD085-E8A6-8845-BD4E-CB4CCA059FC4}" type="datetimeFigureOut">
               <a:rPr lang="en-US" smtClean="0"/>
-              <a:t>1/27/13</a:t>
+              <a:t>8/13/2026</a:t>
             </a:fld>
             <a:endParaRPr lang="en-US"/>
           </a:p>
@@ -1985,7 +1986,7 @@
           <a:p>
             <a:fld id="{5BCAD085-E8A6-8845-BD4E-CB4CCA059FC4}" type="datetimeFigureOut">
               <a:rPr lang="en-US" smtClean="0"/>
-              <a:t>1/27/13</a:t>
+              <a:t>8/13/2026</a:t>
             </a:fld>
             <a:endParaRPr lang="en-US"/>
           </a:p>
@@ -2088,10 +2089,9 @@
           </a:lstStyle>
           <a:p>
             <a:r>
-              <a:rPr lang="en-US" smtClean="0"/>
+              <a:rPr lang="en-US"/>
               <a:t>Click to edit Master title style</a:t>
             </a:r>
-            <a:endParaRPr lang="en-US"/>
           </a:p>
         </p:txBody>
       </p:sp>
@@ -2145,38 +2145,37 @@
           <a:p>
             <a:pPr lvl="0"/>
             <a:r>
-              <a:rPr lang="en-US" smtClean="0"/>
+              <a:rPr lang="en-US"/>
               <a:t>Click to edit Master text styles</a:t>
             </a:r>
           </a:p>
           <a:p>
             <a:pPr lvl="1"/>
             <a:r>
-              <a:rPr lang="en-US" smtClean="0"/>
+              <a:rPr lang="en-US"/>
               <a:t>Second level</a:t>
             </a:r>
           </a:p>
           <a:p>
             <a:pPr lvl="2"/>
             <a:r>
-              <a:rPr lang="en-US" smtClean="0"/>
+              <a:rPr lang="en-US"/>
               <a:t>Third level</a:t>
             </a:r>
           </a:p>
           <a:p>
             <a:pPr lvl="3"/>
             <a:r>
-              <a:rPr lang="en-US" smtClean="0"/>
+              <a:rPr lang="en-US"/>
               <a:t>Fourth level</a:t>
             </a:r>
           </a:p>
           <a:p>
             <a:pPr lvl="4"/>
             <a:r>
-              <a:rPr lang="en-US" smtClean="0"/>
+              <a:rPr lang="en-US"/>
               <a:t>Fifth level</a:t>
             </a:r>
-            <a:endParaRPr lang="en-US"/>
           </a:p>
         </p:txBody>
       </p:sp>
@@ -2239,7 +2238,7 @@
           <a:p>
             <a:pPr lvl="0"/>
             <a:r>
-              <a:rPr lang="en-US" smtClean="0"/>
+              <a:rPr lang="en-US"/>
               <a:t>Click to edit Master text styles</a:t>
             </a:r>
           </a:p>
@@ -2262,7 +2261,7 @@
           <a:p>
             <a:fld id="{5BCAD085-E8A6-8845-BD4E-CB4CCA059FC4}" type="datetimeFigureOut">
               <a:rPr lang="en-US" smtClean="0"/>
-              <a:t>1/27/13</a:t>
+              <a:t>8/13/2026</a:t>
             </a:fld>
             <a:endParaRPr lang="en-US"/>
           </a:p>
@@ -2365,10 +2364,9 @@
           </a:lstStyle>
           <a:p>
             <a:r>
-              <a:rPr lang="en-US" smtClean="0"/>
+              <a:rPr lang="en-US"/>
               <a:t>Click to edit Master title style</a:t>
             </a:r>
-            <a:endParaRPr lang="en-US"/>
           </a:p>
         </p:txBody>
       </p:sp>
@@ -2492,7 +2490,7 @@
           <a:p>
             <a:pPr lvl="0"/>
             <a:r>
-              <a:rPr lang="en-US" smtClean="0"/>
+              <a:rPr lang="en-US"/>
               <a:t>Click to edit Master text styles</a:t>
             </a:r>
           </a:p>
@@ -2515,7 +2513,7 @@
           <a:p>
             <a:fld id="{5BCAD085-E8A6-8845-BD4E-CB4CCA059FC4}" type="datetimeFigureOut">
               <a:rPr lang="en-US" smtClean="0"/>
-              <a:t>1/27/13</a:t>
+              <a:t>8/13/2026</a:t>
             </a:fld>
             <a:endParaRPr lang="en-US"/>
           </a:p>
@@ -2624,10 +2622,9 @@
           <a:lstStyle/>
           <a:p>
             <a:r>
-              <a:rPr lang="en-US" smtClean="0"/>
+              <a:rPr lang="en-US"/>
               <a:t>Click to edit Master title style</a:t>
             </a:r>
-            <a:endParaRPr lang="en-US"/>
           </a:p>
         </p:txBody>
       </p:sp>
@@ -2658,38 +2655,37 @@
           <a:p>
             <a:pPr lvl="0"/>
             <a:r>
-              <a:rPr lang="en-US" smtClean="0"/>
+              <a:rPr lang="en-US"/>
               <a:t>Click to edit Master text styles</a:t>
             </a:r>
           </a:p>
           <a:p>
             <a:pPr lvl="1"/>
             <a:r>
-              <a:rPr lang="en-US" smtClean="0"/>
+              <a:rPr lang="en-US"/>
               <a:t>Second level</a:t>
             </a:r>
           </a:p>
           <a:p>
             <a:pPr lvl="2"/>
             <a:r>
-              <a:rPr lang="en-US" smtClean="0"/>
+              <a:rPr lang="en-US"/>
               <a:t>Third level</a:t>
             </a:r>
           </a:p>
           <a:p>
             <a:pPr lvl="3"/>
             <a:r>
-              <a:rPr lang="en-US" smtClean="0"/>
+              <a:rPr lang="en-US"/>
               <a:t>Fourth level</a:t>
             </a:r>
           </a:p>
           <a:p>
             <a:pPr lvl="4"/>
             <a:r>
-              <a:rPr lang="en-US" smtClean="0"/>
+              <a:rPr lang="en-US"/>
               <a:t>Fifth level</a:t>
             </a:r>
-            <a:endParaRPr lang="en-US"/>
           </a:p>
         </p:txBody>
       </p:sp>
@@ -2728,7 +2724,7 @@
           <a:p>
             <a:fld id="{5BCAD085-E8A6-8845-BD4E-CB4CCA059FC4}" type="datetimeFigureOut">
               <a:rPr lang="en-US" smtClean="0"/>
-              <a:t>1/27/13</a:t>
+              <a:t>8/13/2026</a:t>
             </a:fld>
             <a:endParaRPr lang="en-US"/>
           </a:p>
@@ -3087,7 +3083,7 @@
 </file>
 
 <file path=ppt/slides/slide1.xml><?xml version="1.0" encoding="utf-8"?>
-<p:sld xmlns:a="http://schemas.openxmlformats.org/drawingml/2006/main" xmlns:p="http://schemas.openxmlformats.org/presentationml/2006/main" xmlns:r="http://schemas.openxmlformats.org/officeDocument/2006/relationships">
+<p:sld xmlns:a="http://schemas.openxmlformats.org/drawingml/2006/main" xmlns:r="http://schemas.openxmlformats.org/officeDocument/2006/relationships" xmlns:p="http://schemas.openxmlformats.org/presentationml/2006/main">
   <p:cSld>
     <p:spTree>
       <p:nvGrpSpPr>
@@ -3095,7 +3091,14 @@
         <p:cNvGrpSpPr/>
         <p:nvPr/>
       </p:nvGrpSpPr>
-      <p:grpSpPr/>
+      <p:grpSpPr>
+        <a:xfrm>
+          <a:off x="0" y="0"/>
+          <a:ext cx="0" cy="0"/>
+          <a:chOff x="0" y="0"/>
+          <a:chExt cx="0" cy="0"/>
+        </a:xfrm>
+      </p:grpSpPr>
       <p:sp>
         <p:nvSpPr>
           <p:cNvPr id="2" name="Rectangle 1"/>
@@ -3137,6 +3140,7 @@
           <a:lstStyle/>
           <a:p>
             <a:pPr algn="ctr"/>
+            <a:endParaRPr/>
           </a:p>
         </p:txBody>
       </p:sp>
@@ -3267,6 +3271,7 @@
           <a:lstStyle/>
           <a:p>
             <a:pPr algn="ctr"/>
+            <a:endParaRPr/>
           </a:p>
         </p:txBody>
       </p:sp>
@@ -3307,7 +3312,7 @@
                 </a:solidFill>
                 <a:latin typeface="Calibri"/>
               </a:rPr>
-              <a:t>10 Bahraini dishes   ·   397 labelled images   ·   fine-tuned YOLO26</a:t>
+              <a:t>10 Bahraini dishes   ·   527 labelled images   ·   fine-tuned YOLO26</a:t>
             </a:r>
           </a:p>
         </p:txBody>
@@ -3350,6 +3355,661 @@
                 <a:latin typeface="Calibri"/>
               </a:rPr>
               <a:t>Object Detection Lab  —  results summary</a:t>
+            </a:r>
+          </a:p>
+        </p:txBody>
+      </p:sp>
+    </p:spTree>
+  </p:cSld>
+  <p:clrMapOvr>
+    <a:masterClrMapping/>
+  </p:clrMapOvr>
+</p:sld>
+</file>
+
+<file path=ppt/slides/slide10.xml><?xml version="1.0" encoding="utf-8"?>
+<p:sld xmlns:a="http://schemas.openxmlformats.org/drawingml/2006/main" xmlns:r="http://schemas.openxmlformats.org/officeDocument/2006/relationships" xmlns:p="http://schemas.openxmlformats.org/presentationml/2006/main">
+  <p:cSld>
+    <p:spTree>
+      <p:nvGrpSpPr>
+        <p:cNvPr id="1" name=""/>
+        <p:cNvGrpSpPr/>
+        <p:nvPr/>
+      </p:nvGrpSpPr>
+      <p:grpSpPr>
+        <a:xfrm>
+          <a:off x="0" y="0"/>
+          <a:ext cx="0" cy="0"/>
+          <a:chOff x="0" y="0"/>
+          <a:chExt cx="0" cy="0"/>
+        </a:xfrm>
+      </p:grpSpPr>
+      <p:sp>
+        <p:nvSpPr>
+          <p:cNvPr id="2" name="Rectangle 1"/>
+          <p:cNvSpPr/>
+          <p:nvPr/>
+        </p:nvSpPr>
+        <p:spPr>
+          <a:xfrm>
+            <a:off x="0" y="0"/>
+            <a:ext cx="12191695" cy="6858000"/>
+          </a:xfrm>
+          <a:prstGeom prst="rect">
+            <a:avLst/>
+          </a:prstGeom>
+          <a:solidFill>
+            <a:srgbClr val="5A1E1B"/>
+          </a:solidFill>
+          <a:ln>
+            <a:noFill/>
+          </a:ln>
+          <a:effectLst/>
+        </p:spPr>
+        <p:style>
+          <a:lnRef idx="1">
+            <a:schemeClr val="accent1"/>
+          </a:lnRef>
+          <a:fillRef idx="3">
+            <a:schemeClr val="accent1"/>
+          </a:fillRef>
+          <a:effectRef idx="2">
+            <a:schemeClr val="accent1"/>
+          </a:effectRef>
+          <a:fontRef idx="minor">
+            <a:schemeClr val="lt1"/>
+          </a:fontRef>
+        </p:style>
+        <p:txBody>
+          <a:bodyPr rtlCol="0" anchor="ctr"/>
+          <a:lstStyle/>
+          <a:p>
+            <a:pPr algn="ctr"/>
+            <a:endParaRPr/>
+          </a:p>
+        </p:txBody>
+      </p:sp>
+      <p:sp>
+        <p:nvSpPr>
+          <p:cNvPr id="3" name="TextBox 2"/>
+          <p:cNvSpPr txBox="1"/>
+          <p:nvPr/>
+        </p:nvSpPr>
+        <p:spPr>
+          <a:xfrm>
+            <a:off x="822960" y="640080"/>
+            <a:ext cx="10515600" cy="822960"/>
+          </a:xfrm>
+          <a:prstGeom prst="rect">
+            <a:avLst/>
+          </a:prstGeom>
+          <a:noFill/>
+        </p:spPr>
+        <p:txBody>
+          <a:bodyPr wrap="square" anchor="t">
+            <a:spAutoFit/>
+          </a:bodyPr>
+          <a:lstStyle/>
+          <a:p>
+            <a:pPr algn="l">
+              <a:lnSpc>
+                <a:spcPct val="100000"/>
+              </a:lnSpc>
+              <a:spcAft>
+                <a:spcPts val="600"/>
+              </a:spcAft>
+            </a:pPr>
+            <a:r>
+              <a:rPr sz="3800" b="1" i="0">
+                <a:solidFill>
+                  <a:srgbClr val="FBF6EF"/>
+                </a:solidFill>
+                <a:latin typeface="Cambria"/>
+              </a:rPr>
+              <a:t>Demo &amp; takeaways</a:t>
+            </a:r>
+          </a:p>
+        </p:txBody>
+      </p:sp>
+      <p:sp>
+        <p:nvSpPr>
+          <p:cNvPr id="4" name="Rounded Rectangle 3"/>
+          <p:cNvSpPr/>
+          <p:nvPr/>
+        </p:nvSpPr>
+        <p:spPr>
+          <a:xfrm>
+            <a:off x="868680" y="1554480"/>
+            <a:ext cx="3291840" cy="27432"/>
+          </a:xfrm>
+          <a:prstGeom prst="roundRect">
+            <a:avLst>
+              <a:gd name="adj" fmla="val 10000"/>
+            </a:avLst>
+          </a:prstGeom>
+          <a:solidFill>
+            <a:srgbClr val="D2922B"/>
+          </a:solidFill>
+          <a:ln>
+            <a:noFill/>
+          </a:ln>
+          <a:effectLst/>
+        </p:spPr>
+        <p:style>
+          <a:lnRef idx="1">
+            <a:schemeClr val="accent1"/>
+          </a:lnRef>
+          <a:fillRef idx="3">
+            <a:schemeClr val="accent1"/>
+          </a:fillRef>
+          <a:effectRef idx="2">
+            <a:schemeClr val="accent1"/>
+          </a:effectRef>
+          <a:fontRef idx="minor">
+            <a:schemeClr val="lt1"/>
+          </a:fontRef>
+        </p:style>
+        <p:txBody>
+          <a:bodyPr rtlCol="0" anchor="ctr"/>
+          <a:lstStyle/>
+          <a:p>
+            <a:pPr algn="ctr"/>
+            <a:endParaRPr/>
+          </a:p>
+        </p:txBody>
+      </p:sp>
+      <p:sp>
+        <p:nvSpPr>
+          <p:cNvPr id="5" name="TextBox 4"/>
+          <p:cNvSpPr txBox="1"/>
+          <p:nvPr/>
+        </p:nvSpPr>
+        <p:spPr>
+          <a:xfrm>
+            <a:off x="822960" y="1920240"/>
+            <a:ext cx="10515600" cy="1097280"/>
+          </a:xfrm>
+          <a:prstGeom prst="rect">
+            <a:avLst/>
+          </a:prstGeom>
+          <a:noFill/>
+        </p:spPr>
+        <p:txBody>
+          <a:bodyPr wrap="square" anchor="t">
+            <a:spAutoFit/>
+          </a:bodyPr>
+          <a:lstStyle/>
+          <a:p>
+            <a:pPr algn="l">
+              <a:lnSpc>
+                <a:spcPct val="115000"/>
+              </a:lnSpc>
+              <a:spcAft>
+                <a:spcPts val="600"/>
+              </a:spcAft>
+            </a:pPr>
+            <a:r>
+              <a:rPr sz="1800" b="0" i="0">
+                <a:solidFill>
+                  <a:srgbClr val="E7D9C7"/>
+                </a:solidFill>
+                <a:latin typeface="Calibri"/>
+              </a:rPr>
+              <a:t>Live demo:  a Streamlit web app (upload a photo) and a webcam notebook that boxes</a:t>
+            </a:r>
+          </a:p>
+          <a:p>
+            <a:pPr algn="l">
+              <a:lnSpc>
+                <a:spcPct val="115000"/>
+              </a:lnSpc>
+              <a:spcAft>
+                <a:spcPts val="600"/>
+              </a:spcAft>
+            </a:pPr>
+            <a:r>
+              <a:rPr sz="1800" b="0" i="0">
+                <a:solidFill>
+                  <a:srgbClr val="E7D9C7"/>
+                </a:solidFill>
+                <a:latin typeface="Calibri"/>
+              </a:rPr>
+              <a:t>Bahraini dishes in real time.</a:t>
+            </a:r>
+          </a:p>
+        </p:txBody>
+      </p:sp>
+      <p:sp>
+        <p:nvSpPr>
+          <p:cNvPr id="6" name="Rounded Rectangle 5"/>
+          <p:cNvSpPr/>
+          <p:nvPr/>
+        </p:nvSpPr>
+        <p:spPr>
+          <a:xfrm>
+            <a:off x="868680" y="3383280"/>
+            <a:ext cx="329184" cy="329184"/>
+          </a:xfrm>
+          <a:prstGeom prst="roundRect">
+            <a:avLst>
+              <a:gd name="adj" fmla="val 50000"/>
+            </a:avLst>
+          </a:prstGeom>
+          <a:solidFill>
+            <a:srgbClr val="D2922B"/>
+          </a:solidFill>
+          <a:ln>
+            <a:noFill/>
+          </a:ln>
+          <a:effectLst/>
+        </p:spPr>
+        <p:style>
+          <a:lnRef idx="1">
+            <a:schemeClr val="accent1"/>
+          </a:lnRef>
+          <a:fillRef idx="3">
+            <a:schemeClr val="accent1"/>
+          </a:fillRef>
+          <a:effectRef idx="2">
+            <a:schemeClr val="accent1"/>
+          </a:effectRef>
+          <a:fontRef idx="minor">
+            <a:schemeClr val="lt1"/>
+          </a:fontRef>
+        </p:style>
+        <p:txBody>
+          <a:bodyPr rtlCol="0" anchor="ctr"/>
+          <a:lstStyle/>
+          <a:p>
+            <a:pPr algn="ctr"/>
+            <a:endParaRPr/>
+          </a:p>
+        </p:txBody>
+      </p:sp>
+      <p:sp>
+        <p:nvSpPr>
+          <p:cNvPr id="7" name="TextBox 6"/>
+          <p:cNvSpPr txBox="1"/>
+          <p:nvPr/>
+        </p:nvSpPr>
+        <p:spPr>
+          <a:xfrm>
+            <a:off x="1417320" y="3255264"/>
+            <a:ext cx="10058400" cy="457200"/>
+          </a:xfrm>
+          <a:prstGeom prst="rect">
+            <a:avLst/>
+          </a:prstGeom>
+          <a:noFill/>
+        </p:spPr>
+        <p:txBody>
+          <a:bodyPr wrap="square" anchor="t">
+            <a:spAutoFit/>
+          </a:bodyPr>
+          <a:lstStyle/>
+          <a:p>
+            <a:pPr algn="l">
+              <a:lnSpc>
+                <a:spcPct val="100000"/>
+              </a:lnSpc>
+              <a:spcAft>
+                <a:spcPts val="600"/>
+              </a:spcAft>
+            </a:pPr>
+            <a:r>
+              <a:rPr sz="1800" b="1" i="0">
+                <a:solidFill>
+                  <a:srgbClr val="FBF6EF"/>
+                </a:solidFill>
+                <a:latin typeface="Cambria"/>
+              </a:rPr>
+              <a:t>Built the full CV pipeline</a:t>
+            </a:r>
+          </a:p>
+        </p:txBody>
+      </p:sp>
+      <p:sp>
+        <p:nvSpPr>
+          <p:cNvPr id="8" name="TextBox 7"/>
+          <p:cNvSpPr txBox="1"/>
+          <p:nvPr/>
+        </p:nvSpPr>
+        <p:spPr>
+          <a:xfrm>
+            <a:off x="1417320" y="3657600"/>
+            <a:ext cx="10058400" cy="411480"/>
+          </a:xfrm>
+          <a:prstGeom prst="rect">
+            <a:avLst/>
+          </a:prstGeom>
+          <a:noFill/>
+        </p:spPr>
+        <p:txBody>
+          <a:bodyPr wrap="square" anchor="t">
+            <a:spAutoFit/>
+          </a:bodyPr>
+          <a:lstStyle/>
+          <a:p>
+            <a:pPr algn="l">
+              <a:lnSpc>
+                <a:spcPct val="100000"/>
+              </a:lnSpc>
+              <a:spcAft>
+                <a:spcPts val="600"/>
+              </a:spcAft>
+            </a:pPr>
+            <a:r>
+              <a:rPr sz="1450" b="0" i="0">
+                <a:solidFill>
+                  <a:srgbClr val="C9A99A"/>
+                </a:solidFill>
+                <a:latin typeface="Calibri"/>
+              </a:rPr>
+              <a:t>collect → label → fine-tune → evaluate → improve</a:t>
+            </a:r>
+          </a:p>
+        </p:txBody>
+      </p:sp>
+      <p:sp>
+        <p:nvSpPr>
+          <p:cNvPr id="9" name="Rounded Rectangle 8"/>
+          <p:cNvSpPr/>
+          <p:nvPr/>
+        </p:nvSpPr>
+        <p:spPr>
+          <a:xfrm>
+            <a:off x="868680" y="4297680"/>
+            <a:ext cx="329184" cy="329184"/>
+          </a:xfrm>
+          <a:prstGeom prst="roundRect">
+            <a:avLst>
+              <a:gd name="adj" fmla="val 50000"/>
+            </a:avLst>
+          </a:prstGeom>
+          <a:solidFill>
+            <a:srgbClr val="D2922B"/>
+          </a:solidFill>
+          <a:ln>
+            <a:noFill/>
+          </a:ln>
+          <a:effectLst/>
+        </p:spPr>
+        <p:style>
+          <a:lnRef idx="1">
+            <a:schemeClr val="accent1"/>
+          </a:lnRef>
+          <a:fillRef idx="3">
+            <a:schemeClr val="accent1"/>
+          </a:fillRef>
+          <a:effectRef idx="2">
+            <a:schemeClr val="accent1"/>
+          </a:effectRef>
+          <a:fontRef idx="minor">
+            <a:schemeClr val="lt1"/>
+          </a:fontRef>
+        </p:style>
+        <p:txBody>
+          <a:bodyPr rtlCol="0" anchor="ctr"/>
+          <a:lstStyle/>
+          <a:p>
+            <a:pPr algn="ctr"/>
+            <a:endParaRPr/>
+          </a:p>
+        </p:txBody>
+      </p:sp>
+      <p:sp>
+        <p:nvSpPr>
+          <p:cNvPr id="10" name="TextBox 9"/>
+          <p:cNvSpPr txBox="1"/>
+          <p:nvPr/>
+        </p:nvSpPr>
+        <p:spPr>
+          <a:xfrm>
+            <a:off x="1417320" y="4169664"/>
+            <a:ext cx="10058400" cy="457200"/>
+          </a:xfrm>
+          <a:prstGeom prst="rect">
+            <a:avLst/>
+          </a:prstGeom>
+          <a:noFill/>
+        </p:spPr>
+        <p:txBody>
+          <a:bodyPr wrap="square" anchor="t">
+            <a:spAutoFit/>
+          </a:bodyPr>
+          <a:lstStyle/>
+          <a:p>
+            <a:pPr algn="l">
+              <a:lnSpc>
+                <a:spcPct val="100000"/>
+              </a:lnSpc>
+              <a:spcAft>
+                <a:spcPts val="600"/>
+              </a:spcAft>
+            </a:pPr>
+            <a:r>
+              <a:rPr sz="1800" b="1" i="0">
+                <a:solidFill>
+                  <a:srgbClr val="FBF6EF"/>
+                </a:solidFill>
+                <a:latin typeface="Cambria"/>
+              </a:rPr>
+              <a:t>Strong v1 model</a:t>
+            </a:r>
+          </a:p>
+        </p:txBody>
+      </p:sp>
+      <p:sp>
+        <p:nvSpPr>
+          <p:cNvPr id="11" name="TextBox 10"/>
+          <p:cNvSpPr txBox="1"/>
+          <p:nvPr/>
+        </p:nvSpPr>
+        <p:spPr>
+          <a:xfrm>
+            <a:off x="1417320" y="4572000"/>
+            <a:ext cx="10058400" cy="411480"/>
+          </a:xfrm>
+          <a:prstGeom prst="rect">
+            <a:avLst/>
+          </a:prstGeom>
+          <a:noFill/>
+        </p:spPr>
+        <p:txBody>
+          <a:bodyPr wrap="square" anchor="t">
+            <a:spAutoFit/>
+          </a:bodyPr>
+          <a:lstStyle/>
+          <a:p>
+            <a:pPr algn="l">
+              <a:lnSpc>
+                <a:spcPct val="100000"/>
+              </a:lnSpc>
+              <a:spcAft>
+                <a:spcPts val="600"/>
+              </a:spcAft>
+            </a:pPr>
+            <a:r>
+              <a:rPr sz="1450" b="0" i="0">
+                <a:solidFill>
+                  <a:srgbClr val="C9A99A"/>
+                </a:solidFill>
+                <a:latin typeface="Calibri"/>
+              </a:rPr>
+              <a:t>mAP@50 0.93, recall 0.91 on unseen Bahraini food</a:t>
+            </a:r>
+          </a:p>
+        </p:txBody>
+      </p:sp>
+      <p:sp>
+        <p:nvSpPr>
+          <p:cNvPr id="12" name="Rounded Rectangle 11"/>
+          <p:cNvSpPr/>
+          <p:nvPr/>
+        </p:nvSpPr>
+        <p:spPr>
+          <a:xfrm>
+            <a:off x="868680" y="5212080"/>
+            <a:ext cx="329184" cy="329184"/>
+          </a:xfrm>
+          <a:prstGeom prst="roundRect">
+            <a:avLst>
+              <a:gd name="adj" fmla="val 50000"/>
+            </a:avLst>
+          </a:prstGeom>
+          <a:solidFill>
+            <a:srgbClr val="D2922B"/>
+          </a:solidFill>
+          <a:ln>
+            <a:noFill/>
+          </a:ln>
+          <a:effectLst/>
+        </p:spPr>
+        <p:style>
+          <a:lnRef idx="1">
+            <a:schemeClr val="accent1"/>
+          </a:lnRef>
+          <a:fillRef idx="3">
+            <a:schemeClr val="accent1"/>
+          </a:fillRef>
+          <a:effectRef idx="2">
+            <a:schemeClr val="accent1"/>
+          </a:effectRef>
+          <a:fontRef idx="minor">
+            <a:schemeClr val="lt1"/>
+          </a:fontRef>
+        </p:style>
+        <p:txBody>
+          <a:bodyPr rtlCol="0" anchor="ctr"/>
+          <a:lstStyle/>
+          <a:p>
+            <a:pPr algn="ctr"/>
+            <a:endParaRPr/>
+          </a:p>
+        </p:txBody>
+      </p:sp>
+      <p:sp>
+        <p:nvSpPr>
+          <p:cNvPr id="13" name="TextBox 12"/>
+          <p:cNvSpPr txBox="1"/>
+          <p:nvPr/>
+        </p:nvSpPr>
+        <p:spPr>
+          <a:xfrm>
+            <a:off x="1417320" y="5084064"/>
+            <a:ext cx="10058400" cy="457200"/>
+          </a:xfrm>
+          <a:prstGeom prst="rect">
+            <a:avLst/>
+          </a:prstGeom>
+          <a:noFill/>
+        </p:spPr>
+        <p:txBody>
+          <a:bodyPr wrap="square" anchor="t">
+            <a:spAutoFit/>
+          </a:bodyPr>
+          <a:lstStyle/>
+          <a:p>
+            <a:pPr algn="l">
+              <a:lnSpc>
+                <a:spcPct val="100000"/>
+              </a:lnSpc>
+              <a:spcAft>
+                <a:spcPts val="600"/>
+              </a:spcAft>
+            </a:pPr>
+            <a:r>
+              <a:rPr sz="1800" b="1" i="0">
+                <a:solidFill>
+                  <a:srgbClr val="FBF6EF"/>
+                </a:solidFill>
+                <a:latin typeface="Cambria"/>
+              </a:rPr>
+              <a:t>Failures point the way</a:t>
+            </a:r>
+          </a:p>
+        </p:txBody>
+      </p:sp>
+      <p:sp>
+        <p:nvSpPr>
+          <p:cNvPr id="14" name="TextBox 13"/>
+          <p:cNvSpPr txBox="1"/>
+          <p:nvPr/>
+        </p:nvSpPr>
+        <p:spPr>
+          <a:xfrm>
+            <a:off x="1417320" y="5486400"/>
+            <a:ext cx="10058400" cy="411480"/>
+          </a:xfrm>
+          <a:prstGeom prst="rect">
+            <a:avLst/>
+          </a:prstGeom>
+          <a:noFill/>
+        </p:spPr>
+        <p:txBody>
+          <a:bodyPr wrap="square" anchor="t">
+            <a:spAutoFit/>
+          </a:bodyPr>
+          <a:lstStyle/>
+          <a:p>
+            <a:pPr algn="l">
+              <a:lnSpc>
+                <a:spcPct val="100000"/>
+              </a:lnSpc>
+              <a:spcAft>
+                <a:spcPts val="600"/>
+              </a:spcAft>
+            </a:pPr>
+            <a:r>
+              <a:rPr sz="1450" b="0" i="0">
+                <a:solidFill>
+                  <a:srgbClr val="C9A99A"/>
+                </a:solidFill>
+                <a:latin typeface="Calibri"/>
+              </a:rPr>
+              <a:t>misses on crowded plates → clear plan for v2</a:t>
+            </a:r>
+          </a:p>
+        </p:txBody>
+      </p:sp>
+      <p:sp>
+        <p:nvSpPr>
+          <p:cNvPr id="15" name="TextBox 14"/>
+          <p:cNvSpPr txBox="1"/>
+          <p:nvPr/>
+        </p:nvSpPr>
+        <p:spPr>
+          <a:xfrm>
+            <a:off x="822960" y="6355080"/>
+            <a:ext cx="10515600" cy="365760"/>
+          </a:xfrm>
+          <a:prstGeom prst="rect">
+            <a:avLst/>
+          </a:prstGeom>
+          <a:noFill/>
+        </p:spPr>
+        <p:txBody>
+          <a:bodyPr wrap="square" anchor="t">
+            <a:spAutoFit/>
+          </a:bodyPr>
+          <a:lstStyle/>
+          <a:p>
+            <a:pPr algn="l">
+              <a:lnSpc>
+                <a:spcPct val="100000"/>
+              </a:lnSpc>
+              <a:spcAft>
+                <a:spcPts val="600"/>
+              </a:spcAft>
+            </a:pPr>
+            <a:r>
+              <a:rPr sz="1250" b="0" i="1">
+                <a:solidFill>
+                  <a:srgbClr val="C9A99A"/>
+                </a:solidFill>
+                <a:latin typeface="Calibri"/>
+              </a:rPr>
+              <a:t>github.com/hymoo2002/Bahrain-Food-Detector</a:t>
             </a:r>
           </a:p>
         </p:txBody>
@@ -3363,7 +4023,7 @@
 </file>
 
 <file path=ppt/slides/slide2.xml><?xml version="1.0" encoding="utf-8"?>
-<p:sld xmlns:a="http://schemas.openxmlformats.org/drawingml/2006/main" xmlns:p="http://schemas.openxmlformats.org/presentationml/2006/main" xmlns:r="http://schemas.openxmlformats.org/officeDocument/2006/relationships">
+<p:sld xmlns:a="http://schemas.openxmlformats.org/drawingml/2006/main" xmlns:r="http://schemas.openxmlformats.org/officeDocument/2006/relationships" xmlns:p="http://schemas.openxmlformats.org/presentationml/2006/main">
   <p:cSld>
     <p:spTree>
       <p:nvGrpSpPr>
@@ -3371,7 +4031,14 @@
         <p:cNvGrpSpPr/>
         <p:nvPr/>
       </p:nvGrpSpPr>
-      <p:grpSpPr/>
+      <p:grpSpPr>
+        <a:xfrm>
+          <a:off x="0" y="0"/>
+          <a:ext cx="0" cy="0"/>
+          <a:chOff x="0" y="0"/>
+          <a:chExt cx="0" cy="0"/>
+        </a:xfrm>
+      </p:grpSpPr>
       <p:sp>
         <p:nvSpPr>
           <p:cNvPr id="2" name="Rectangle 1"/>
@@ -3413,6 +4080,7 @@
           <a:lstStyle/>
           <a:p>
             <a:pPr algn="ctr"/>
+            <a:endParaRPr/>
           </a:p>
         </p:txBody>
       </p:sp>
@@ -3549,15 +4217,12 @@
                 <a:spcPts val="600"/>
               </a:spcAft>
             </a:pPr>
-            <a:r>
-              <a:rPr sz="800" b="0" i="0">
-                <a:solidFill>
-                  <a:srgbClr val="2B2320"/>
-                </a:solidFill>
-                <a:latin typeface="Calibri"/>
-              </a:rPr>
-              <a:t/>
-            </a:r>
+            <a:endParaRPr sz="1800" b="0" i="0">
+              <a:solidFill>
+                <a:srgbClr val="2B2320"/>
+              </a:solidFill>
+              <a:latin typeface="Calibri"/>
+            </a:endParaRPr>
           </a:p>
           <a:p>
             <a:pPr algn="l">
@@ -3709,6 +4374,7 @@
           <a:lstStyle/>
           <a:p>
             <a:pPr algn="ctr"/>
+            <a:endParaRPr/>
           </a:p>
         </p:txBody>
       </p:sp>
@@ -3799,6 +4465,7 @@
           <a:lstStyle/>
           <a:p>
             <a:pPr algn="ctr"/>
+            <a:endParaRPr/>
           </a:p>
         </p:txBody>
       </p:sp>
@@ -3889,6 +4556,7 @@
           <a:lstStyle/>
           <a:p>
             <a:pPr algn="ctr"/>
+            <a:endParaRPr/>
           </a:p>
         </p:txBody>
       </p:sp>
@@ -3979,6 +4647,7 @@
           <a:lstStyle/>
           <a:p>
             <a:pPr algn="ctr"/>
+            <a:endParaRPr/>
           </a:p>
         </p:txBody>
       </p:sp>
@@ -4069,6 +4738,7 @@
           <a:lstStyle/>
           <a:p>
             <a:pPr algn="ctr"/>
+            <a:endParaRPr/>
           </a:p>
         </p:txBody>
       </p:sp>
@@ -4159,6 +4829,7 @@
           <a:lstStyle/>
           <a:p>
             <a:pPr algn="ctr"/>
+            <a:endParaRPr/>
           </a:p>
         </p:txBody>
       </p:sp>
@@ -4249,6 +4920,7 @@
           <a:lstStyle/>
           <a:p>
             <a:pPr algn="ctr"/>
+            <a:endParaRPr/>
           </a:p>
         </p:txBody>
       </p:sp>
@@ -4339,6 +5011,7 @@
           <a:lstStyle/>
           <a:p>
             <a:pPr algn="ctr"/>
+            <a:endParaRPr/>
           </a:p>
         </p:txBody>
       </p:sp>
@@ -4429,6 +5102,7 @@
           <a:lstStyle/>
           <a:p>
             <a:pPr algn="ctr"/>
+            <a:endParaRPr/>
           </a:p>
         </p:txBody>
       </p:sp>
@@ -4519,6 +5193,7 @@
           <a:lstStyle/>
           <a:p>
             <a:pPr algn="ctr"/>
+            <a:endParaRPr/>
           </a:p>
         </p:txBody>
       </p:sp>
@@ -4573,7 +5248,7 @@
 </file>
 
 <file path=ppt/slides/slide3.xml><?xml version="1.0" encoding="utf-8"?>
-<p:sld xmlns:a="http://schemas.openxmlformats.org/drawingml/2006/main" xmlns:p="http://schemas.openxmlformats.org/presentationml/2006/main" xmlns:r="http://schemas.openxmlformats.org/officeDocument/2006/relationships">
+<p:sld xmlns:a="http://schemas.openxmlformats.org/drawingml/2006/main" xmlns:r="http://schemas.openxmlformats.org/officeDocument/2006/relationships" xmlns:p="http://schemas.openxmlformats.org/presentationml/2006/main">
   <p:cSld>
     <p:spTree>
       <p:nvGrpSpPr>
@@ -4581,7 +5256,14 @@
         <p:cNvGrpSpPr/>
         <p:nvPr/>
       </p:nvGrpSpPr>
-      <p:grpSpPr/>
+      <p:grpSpPr>
+        <a:xfrm>
+          <a:off x="0" y="0"/>
+          <a:ext cx="0" cy="0"/>
+          <a:chOff x="0" y="0"/>
+          <a:chExt cx="0" cy="0"/>
+        </a:xfrm>
+      </p:grpSpPr>
       <p:sp>
         <p:nvSpPr>
           <p:cNvPr id="2" name="Rectangle 1"/>
@@ -4623,6 +5305,7 @@
           <a:lstStyle/>
           <a:p>
             <a:pPr algn="ctr"/>
+            <a:endParaRPr/>
           </a:p>
         </p:txBody>
       </p:sp>
@@ -4753,6 +5436,7 @@
           <a:lstStyle/>
           <a:p>
             <a:pPr algn="ctr"/>
+            <a:endParaRPr/>
           </a:p>
         </p:txBody>
       </p:sp>
@@ -4793,7 +5477,7 @@
                 </a:solidFill>
                 <a:latin typeface="Cambria"/>
               </a:rPr>
-              <a:t>397</a:t>
+              <a:t>527</a:t>
             </a:r>
           </a:p>
         </p:txBody>
@@ -4883,6 +5567,7 @@
           <a:lstStyle/>
           <a:p>
             <a:pPr algn="ctr"/>
+            <a:endParaRPr/>
           </a:p>
         </p:txBody>
       </p:sp>
@@ -5013,6 +5698,7 @@
           <a:lstStyle/>
           <a:p>
             <a:pPr algn="ctr"/>
+            <a:endParaRPr/>
           </a:p>
         </p:txBody>
       </p:sp>
@@ -5168,52 +5854,49 @@
                 <a:spcPts val="400"/>
               </a:spcAft>
             </a:pPr>
-            <a:r>
-              <a:rPr sz="700" b="0" i="0">
+            <a:endParaRPr sz="1550" b="0" i="0">
+              <a:solidFill>
+                <a:srgbClr val="2B2320"/>
+              </a:solidFill>
+              <a:latin typeface="Calibri"/>
+            </a:endParaRPr>
+          </a:p>
+          <a:p>
+            <a:pPr algn="l">
+              <a:lnSpc>
+                <a:spcPct val="112000"/>
+              </a:lnSpc>
+              <a:spcAft>
+                <a:spcPts val="400"/>
+              </a:spcAft>
+            </a:pPr>
+            <a:r>
+              <a:rPr sz="1800" b="1" i="0">
+                <a:solidFill>
+                  <a:srgbClr val="5A1E1B"/>
+                </a:solidFill>
+                <a:latin typeface="Cambria"/>
+              </a:rPr>
+              <a:t>Training</a:t>
+            </a:r>
+          </a:p>
+          <a:p>
+            <a:pPr algn="l">
+              <a:lnSpc>
+                <a:spcPct val="112000"/>
+              </a:lnSpc>
+              <a:spcAft>
+                <a:spcPts val="400"/>
+              </a:spcAft>
+            </a:pPr>
+            <a:r>
+              <a:rPr sz="1550" b="0" i="0">
                 <a:solidFill>
                   <a:srgbClr val="2B2320"/>
                 </a:solidFill>
                 <a:latin typeface="Calibri"/>
               </a:rPr>
-              <a:t/>
-            </a:r>
-          </a:p>
-          <a:p>
-            <a:pPr algn="l">
-              <a:lnSpc>
-                <a:spcPct val="112000"/>
-              </a:lnSpc>
-              <a:spcAft>
-                <a:spcPts val="400"/>
-              </a:spcAft>
-            </a:pPr>
-            <a:r>
-              <a:rPr sz="1800" b="1" i="0">
-                <a:solidFill>
-                  <a:srgbClr val="5A1E1B"/>
-                </a:solidFill>
-                <a:latin typeface="Cambria"/>
-              </a:rPr>
-              <a:t>Training</a:t>
-            </a:r>
-          </a:p>
-          <a:p>
-            <a:pPr algn="l">
-              <a:lnSpc>
-                <a:spcPct val="112000"/>
-              </a:lnSpc>
-              <a:spcAft>
-                <a:spcPts val="400"/>
-              </a:spcAft>
-            </a:pPr>
-            <a:r>
-              <a:rPr sz="1550" b="0" i="0">
-                <a:solidFill>
-                  <a:srgbClr val="2B2320"/>
-                </a:solidFill>
-                <a:latin typeface="Calibri"/>
-              </a:rPr>
-              <a:t>YOLO26 fine-tuned from COCO-pretrained weights — augmentation on the training set only,</a:t>
+              <a:t>YOLO26 fine-tuned on our own labelled dataset — augmentation on the training set only,</a:t>
             </a:r>
           </a:p>
           <a:p>
@@ -5246,7 +5929,7 @@
 </file>
 
 <file path=ppt/slides/slide4.xml><?xml version="1.0" encoding="utf-8"?>
-<p:sld xmlns:a="http://schemas.openxmlformats.org/drawingml/2006/main" xmlns:p="http://schemas.openxmlformats.org/presentationml/2006/main" xmlns:r="http://schemas.openxmlformats.org/officeDocument/2006/relationships">
+<p:sld xmlns:a="http://schemas.openxmlformats.org/drawingml/2006/main" xmlns:r="http://schemas.openxmlformats.org/officeDocument/2006/relationships" xmlns:p="http://schemas.openxmlformats.org/presentationml/2006/main">
   <p:cSld>
     <p:spTree>
       <p:nvGrpSpPr>
@@ -5254,7 +5937,14 @@
         <p:cNvGrpSpPr/>
         <p:nvPr/>
       </p:nvGrpSpPr>
-      <p:grpSpPr/>
+      <p:grpSpPr>
+        <a:xfrm>
+          <a:off x="0" y="0"/>
+          <a:ext cx="0" cy="0"/>
+          <a:chOff x="0" y="0"/>
+          <a:chExt cx="0" cy="0"/>
+        </a:xfrm>
+      </p:grpSpPr>
       <p:sp>
         <p:nvSpPr>
           <p:cNvPr id="2" name="Rectangle 1"/>
@@ -5296,6 +5986,7 @@
           <a:lstStyle/>
           <a:p>
             <a:pPr algn="ctr"/>
+            <a:endParaRPr/>
           </a:p>
         </p:txBody>
       </p:sp>
@@ -5426,6 +6117,7 @@
           <a:lstStyle/>
           <a:p>
             <a:pPr algn="ctr"/>
+            <a:endParaRPr/>
           </a:p>
         </p:txBody>
       </p:sp>
@@ -5556,6 +6248,7 @@
           <a:lstStyle/>
           <a:p>
             <a:pPr algn="ctr"/>
+            <a:endParaRPr/>
           </a:p>
         </p:txBody>
       </p:sp>
@@ -5686,6 +6379,7 @@
           <a:lstStyle/>
           <a:p>
             <a:pPr algn="ctr"/>
+            <a:endParaRPr/>
           </a:p>
         </p:txBody>
       </p:sp>
@@ -5816,6 +6510,7 @@
           <a:lstStyle/>
           <a:p>
             <a:pPr algn="ctr"/>
+            <a:endParaRPr/>
           </a:p>
         </p:txBody>
       </p:sp>
@@ -5946,6 +6641,7 @@
           <a:lstStyle/>
           <a:p>
             <a:pPr algn="ctr"/>
+            <a:endParaRPr/>
           </a:p>
         </p:txBody>
       </p:sp>
@@ -6225,7 +6921,7 @@
 </file>
 
 <file path=ppt/slides/slide5.xml><?xml version="1.0" encoding="utf-8"?>
-<p:sld xmlns:a="http://schemas.openxmlformats.org/drawingml/2006/main" xmlns:p="http://schemas.openxmlformats.org/presentationml/2006/main" xmlns:r="http://schemas.openxmlformats.org/officeDocument/2006/relationships">
+<p:sld xmlns:a="http://schemas.openxmlformats.org/drawingml/2006/main" xmlns:r="http://schemas.openxmlformats.org/officeDocument/2006/relationships" xmlns:p="http://schemas.openxmlformats.org/presentationml/2006/main">
   <p:cSld>
     <p:spTree>
       <p:nvGrpSpPr>
@@ -6233,7 +6929,14 @@
         <p:cNvGrpSpPr/>
         <p:nvPr/>
       </p:nvGrpSpPr>
-      <p:grpSpPr/>
+      <p:grpSpPr>
+        <a:xfrm>
+          <a:off x="0" y="0"/>
+          <a:ext cx="0" cy="0"/>
+          <a:chOff x="0" y="0"/>
+          <a:chExt cx="0" cy="0"/>
+        </a:xfrm>
+      </p:grpSpPr>
       <p:sp>
         <p:nvSpPr>
           <p:cNvPr id="2" name="Rectangle 1"/>
@@ -6275,6 +6978,7 @@
           <a:lstStyle/>
           <a:p>
             <a:pPr algn="ctr"/>
+            <a:endParaRPr/>
           </a:p>
         </p:txBody>
       </p:sp>
@@ -6429,6 +7133,7 @@
           <a:lstStyle/>
           <a:p>
             <a:pPr algn="ctr"/>
+            <a:endParaRPr/>
           </a:p>
         </p:txBody>
       </p:sp>
@@ -6542,14 +7247,49 @@
                 <a:spcPts val="400"/>
               </a:spcAft>
             </a:pPr>
-            <a:r>
-              <a:rPr sz="800" b="0" i="0">
+            <a:endParaRPr sz="1400" b="0" i="0">
+              <a:solidFill>
+                <a:srgbClr val="2B2320"/>
+              </a:solidFill>
+              <a:latin typeface="Calibri"/>
+            </a:endParaRPr>
+          </a:p>
+          <a:p>
+            <a:pPr algn="l">
+              <a:lnSpc>
+                <a:spcPct val="112000"/>
+              </a:lnSpc>
+              <a:spcAft>
+                <a:spcPts val="400"/>
+              </a:spcAft>
+            </a:pPr>
+            <a:r>
+              <a:rPr sz="1550" b="1" i="0">
+                <a:solidFill>
+                  <a:srgbClr val="5A1E1B"/>
+                </a:solidFill>
+                <a:latin typeface="Calibri"/>
+              </a:rPr>
+              <a:t>Hardest – Kebab</a:t>
+            </a:r>
+          </a:p>
+          <a:p>
+            <a:pPr algn="l">
+              <a:lnSpc>
+                <a:spcPct val="112000"/>
+              </a:lnSpc>
+              <a:spcAft>
+                <a:spcPts val="400"/>
+              </a:spcAft>
+            </a:pPr>
+            <a:r>
+              <a:rPr sz="1400" b="0" i="0">
                 <a:solidFill>
                   <a:srgbClr val="2B2320"/>
                 </a:solidFill>
                 <a:latin typeface="Calibri"/>
               </a:rPr>
-              <a:t/>
+              <a:t>varied shapes and often several pieces, so boxes are looser (lowest mAP@50, 0.70).</a:t>
             </a:r>
           </a:p>
           <a:p>
@@ -6561,53 +7301,12 @@
                 <a:spcPts val="400"/>
               </a:spcAft>
             </a:pPr>
-            <a:r>
-              <a:rPr sz="1550" b="1" i="0">
-                <a:solidFill>
-                  <a:srgbClr val="5A1E1B"/>
-                </a:solidFill>
-                <a:latin typeface="Calibri"/>
-              </a:rPr>
-              <a:t>Hardest – Kebab</a:t>
-            </a:r>
-          </a:p>
-          <a:p>
-            <a:pPr algn="l">
-              <a:lnSpc>
-                <a:spcPct val="112000"/>
-              </a:lnSpc>
-              <a:spcAft>
-                <a:spcPts val="400"/>
-              </a:spcAft>
-            </a:pPr>
-            <a:r>
-              <a:rPr sz="1400" b="0" i="0">
-                <a:solidFill>
-                  <a:srgbClr val="2B2320"/>
-                </a:solidFill>
-                <a:latin typeface="Calibri"/>
-              </a:rPr>
-              <a:t>varied shapes and often several pieces, so boxes are looser (lowest mAP@50, 0.70).</a:t>
-            </a:r>
-          </a:p>
-          <a:p>
-            <a:pPr algn="l">
-              <a:lnSpc>
-                <a:spcPct val="112000"/>
-              </a:lnSpc>
-              <a:spcAft>
-                <a:spcPts val="400"/>
-              </a:spcAft>
-            </a:pPr>
-            <a:r>
-              <a:rPr sz="800" b="0" i="0">
-                <a:solidFill>
-                  <a:srgbClr val="2B2320"/>
-                </a:solidFill>
-                <a:latin typeface="Calibri"/>
-              </a:rPr>
-              <a:t/>
-            </a:r>
+            <a:endParaRPr sz="1400" b="0" i="0">
+              <a:solidFill>
+                <a:srgbClr val="2B2320"/>
+              </a:solidFill>
+              <a:latin typeface="Calibri"/>
+            </a:endParaRPr>
           </a:p>
           <a:p>
             <a:pPr algn="l">
@@ -6639,7 +7338,7 @@
 </file>
 
 <file path=ppt/slides/slide6.xml><?xml version="1.0" encoding="utf-8"?>
-<p:sld xmlns:a="http://schemas.openxmlformats.org/drawingml/2006/main" xmlns:p="http://schemas.openxmlformats.org/presentationml/2006/main" xmlns:r="http://schemas.openxmlformats.org/officeDocument/2006/relationships">
+<p:sld xmlns:a="http://schemas.openxmlformats.org/drawingml/2006/main" xmlns:r="http://schemas.openxmlformats.org/officeDocument/2006/relationships" xmlns:p="http://schemas.openxmlformats.org/presentationml/2006/main">
   <p:cSld>
     <p:spTree>
       <p:nvGrpSpPr>
@@ -6647,7 +7346,14 @@
         <p:cNvGrpSpPr/>
         <p:nvPr/>
       </p:nvGrpSpPr>
-      <p:grpSpPr/>
+      <p:grpSpPr>
+        <a:xfrm>
+          <a:off x="0" y="0"/>
+          <a:ext cx="0" cy="0"/>
+          <a:chOff x="0" y="0"/>
+          <a:chExt cx="0" cy="0"/>
+        </a:xfrm>
+      </p:grpSpPr>
       <p:sp>
         <p:nvSpPr>
           <p:cNvPr id="2" name="Rectangle 1"/>
@@ -6689,6 +7395,7 @@
           <a:lstStyle/>
           <a:p>
             <a:pPr algn="ctr"/>
+            <a:endParaRPr/>
           </a:p>
         </p:txBody>
       </p:sp>
@@ -6729,7 +7436,7 @@
                 </a:solidFill>
                 <a:latin typeface="Calibri"/>
               </a:rPr>
-              <a:t>WHERE IT FAILS</a:t>
+              <a:t>CONFUSION MATRIX</a:t>
             </a:r>
           </a:p>
         </p:txBody>
@@ -6771,656 +7478,14 @@
                 </a:solidFill>
                 <a:latin typeface="Cambria"/>
               </a:rPr>
-              <a:t>12 documented failure cases</a:t>
-            </a:r>
-          </a:p>
-        </p:txBody>
-      </p:sp>
-      <p:sp>
-        <p:nvSpPr>
-          <p:cNvPr id="5" name="TextBox 4"/>
-          <p:cNvSpPr txBox="1"/>
-          <p:nvPr/>
-        </p:nvSpPr>
-        <p:spPr>
-          <a:xfrm>
-            <a:off x="640080" y="1828800"/>
-            <a:ext cx="5486400" cy="457200"/>
-          </a:xfrm>
-          <a:prstGeom prst="rect">
-            <a:avLst/>
-          </a:prstGeom>
-          <a:noFill/>
-        </p:spPr>
-        <p:txBody>
-          <a:bodyPr wrap="square" anchor="t">
-            <a:spAutoFit/>
-          </a:bodyPr>
-          <a:lstStyle/>
-          <a:p>
-            <a:pPr algn="l">
-              <a:lnSpc>
-                <a:spcPct val="100000"/>
-              </a:lnSpc>
-              <a:spcAft>
-                <a:spcPts val="600"/>
-              </a:spcAft>
-            </a:pPr>
-            <a:r>
-              <a:rPr sz="1300" b="1" i="0">
-                <a:solidFill>
-                  <a:srgbClr val="B4472E"/>
-                </a:solidFill>
-                <a:latin typeface="Calibri"/>
-              </a:rPr>
-              <a:t>FAILURE BREAKDOWN</a:t>
-            </a:r>
-          </a:p>
-        </p:txBody>
-      </p:sp>
-      <p:sp>
-        <p:nvSpPr>
-          <p:cNvPr id="6" name="Rounded Rectangle 5"/>
-          <p:cNvSpPr/>
-          <p:nvPr/>
-        </p:nvSpPr>
-        <p:spPr>
-          <a:xfrm>
-            <a:off x="640080" y="2286000"/>
-            <a:ext cx="548640" cy="457200"/>
-          </a:xfrm>
-          <a:prstGeom prst="roundRect">
-            <a:avLst>
-              <a:gd name="adj" fmla="val 25000"/>
-            </a:avLst>
-          </a:prstGeom>
-          <a:solidFill>
-            <a:srgbClr val="5A1E1B"/>
-          </a:solidFill>
-          <a:ln>
-            <a:noFill/>
-          </a:ln>
-          <a:effectLst/>
-        </p:spPr>
-        <p:style>
-          <a:lnRef idx="1">
-            <a:schemeClr val="accent1"/>
-          </a:lnRef>
-          <a:fillRef idx="3">
-            <a:schemeClr val="accent1"/>
-          </a:fillRef>
-          <a:effectRef idx="2">
-            <a:schemeClr val="accent1"/>
-          </a:effectRef>
-          <a:fontRef idx="minor">
-            <a:schemeClr val="lt1"/>
-          </a:fontRef>
-        </p:style>
-        <p:txBody>
-          <a:bodyPr rtlCol="0" anchor="ctr"/>
-          <a:lstStyle/>
-          <a:p>
-            <a:pPr algn="ctr"/>
-          </a:p>
-        </p:txBody>
-      </p:sp>
-      <p:sp>
-        <p:nvSpPr>
-          <p:cNvPr id="7" name="TextBox 6"/>
-          <p:cNvSpPr txBox="1"/>
-          <p:nvPr/>
-        </p:nvSpPr>
-        <p:spPr>
-          <a:xfrm>
-            <a:off x="640080" y="2304288"/>
-            <a:ext cx="548640" cy="420624"/>
-          </a:xfrm>
-          <a:prstGeom prst="rect">
-            <a:avLst/>
-          </a:prstGeom>
-          <a:noFill/>
-        </p:spPr>
-        <p:txBody>
-          <a:bodyPr wrap="square" anchor="ctr">
-            <a:spAutoFit/>
-          </a:bodyPr>
-          <a:lstStyle/>
-          <a:p>
-            <a:pPr algn="ctr">
-              <a:lnSpc>
-                <a:spcPct val="100000"/>
-              </a:lnSpc>
-              <a:spcAft>
-                <a:spcPts val="600"/>
-              </a:spcAft>
-            </a:pPr>
-            <a:r>
-              <a:rPr sz="1700" b="1" i="0">
-                <a:solidFill>
-                  <a:srgbClr val="FBF6EF"/>
-                </a:solidFill>
-                <a:latin typeface="Calibri"/>
-              </a:rPr>
-              <a:t>12</a:t>
-            </a:r>
-          </a:p>
-        </p:txBody>
-      </p:sp>
-      <p:sp>
-        <p:nvSpPr>
-          <p:cNvPr id="8" name="TextBox 7"/>
-          <p:cNvSpPr txBox="1"/>
-          <p:nvPr/>
-        </p:nvSpPr>
-        <p:spPr>
-          <a:xfrm>
-            <a:off x="1325880" y="2304288"/>
-            <a:ext cx="4754880" cy="420624"/>
-          </a:xfrm>
-          <a:prstGeom prst="rect">
-            <a:avLst/>
-          </a:prstGeom>
-          <a:noFill/>
-        </p:spPr>
-        <p:txBody>
-          <a:bodyPr wrap="square" anchor="ctr">
-            <a:spAutoFit/>
-          </a:bodyPr>
-          <a:lstStyle/>
-          <a:p>
-            <a:pPr algn="l">
-              <a:lnSpc>
-                <a:spcPct val="100000"/>
-              </a:lnSpc>
-              <a:spcAft>
-                <a:spcPts val="600"/>
-              </a:spcAft>
-            </a:pPr>
-            <a:r>
-              <a:rPr sz="1500" b="0" i="0">
-                <a:solidFill>
-                  <a:srgbClr val="2B2320"/>
-                </a:solidFill>
-                <a:latin typeface="Calibri"/>
-              </a:rPr>
-              <a:t>Missed items (false negative)</a:t>
-            </a:r>
-          </a:p>
-        </p:txBody>
-      </p:sp>
-      <p:sp>
-        <p:nvSpPr>
-          <p:cNvPr id="9" name="Rounded Rectangle 8"/>
-          <p:cNvSpPr/>
-          <p:nvPr/>
-        </p:nvSpPr>
-        <p:spPr>
-          <a:xfrm>
-            <a:off x="640080" y="2889504"/>
-            <a:ext cx="548640" cy="457200"/>
-          </a:xfrm>
-          <a:prstGeom prst="roundRect">
-            <a:avLst>
-              <a:gd name="adj" fmla="val 25000"/>
-            </a:avLst>
-          </a:prstGeom>
-          <a:solidFill>
-            <a:srgbClr val="5A1E1B"/>
-          </a:solidFill>
-          <a:ln>
-            <a:noFill/>
-          </a:ln>
-          <a:effectLst/>
-        </p:spPr>
-        <p:style>
-          <a:lnRef idx="1">
-            <a:schemeClr val="accent1"/>
-          </a:lnRef>
-          <a:fillRef idx="3">
-            <a:schemeClr val="accent1"/>
-          </a:fillRef>
-          <a:effectRef idx="2">
-            <a:schemeClr val="accent1"/>
-          </a:effectRef>
-          <a:fontRef idx="minor">
-            <a:schemeClr val="lt1"/>
-          </a:fontRef>
-        </p:style>
-        <p:txBody>
-          <a:bodyPr rtlCol="0" anchor="ctr"/>
-          <a:lstStyle/>
-          <a:p>
-            <a:pPr algn="ctr"/>
-          </a:p>
-        </p:txBody>
-      </p:sp>
-      <p:sp>
-        <p:nvSpPr>
-          <p:cNvPr id="10" name="TextBox 9"/>
-          <p:cNvSpPr txBox="1"/>
-          <p:nvPr/>
-        </p:nvSpPr>
-        <p:spPr>
-          <a:xfrm>
-            <a:off x="640080" y="2907792"/>
-            <a:ext cx="548640" cy="420624"/>
-          </a:xfrm>
-          <a:prstGeom prst="rect">
-            <a:avLst/>
-          </a:prstGeom>
-          <a:noFill/>
-        </p:spPr>
-        <p:txBody>
-          <a:bodyPr wrap="square" anchor="ctr">
-            <a:spAutoFit/>
-          </a:bodyPr>
-          <a:lstStyle/>
-          <a:p>
-            <a:pPr algn="ctr">
-              <a:lnSpc>
-                <a:spcPct val="100000"/>
-              </a:lnSpc>
-              <a:spcAft>
-                <a:spcPts val="600"/>
-              </a:spcAft>
-            </a:pPr>
-            <a:r>
-              <a:rPr sz="1700" b="1" i="0">
-                <a:solidFill>
-                  <a:srgbClr val="FBF6EF"/>
-                </a:solidFill>
-                <a:latin typeface="Calibri"/>
-              </a:rPr>
-              <a:t>1</a:t>
-            </a:r>
-          </a:p>
-        </p:txBody>
-      </p:sp>
-      <p:sp>
-        <p:nvSpPr>
-          <p:cNvPr id="11" name="TextBox 10"/>
-          <p:cNvSpPr txBox="1"/>
-          <p:nvPr/>
-        </p:nvSpPr>
-        <p:spPr>
-          <a:xfrm>
-            <a:off x="1325880" y="2907792"/>
-            <a:ext cx="4754880" cy="420624"/>
-          </a:xfrm>
-          <a:prstGeom prst="rect">
-            <a:avLst/>
-          </a:prstGeom>
-          <a:noFill/>
-        </p:spPr>
-        <p:txBody>
-          <a:bodyPr wrap="square" anchor="ctr">
-            <a:spAutoFit/>
-          </a:bodyPr>
-          <a:lstStyle/>
-          <a:p>
-            <a:pPr algn="l">
-              <a:lnSpc>
-                <a:spcPct val="100000"/>
-              </a:lnSpc>
-              <a:spcAft>
-                <a:spcPts val="600"/>
-              </a:spcAft>
-            </a:pPr>
-            <a:r>
-              <a:rPr sz="1500" b="0" i="0">
-                <a:solidFill>
-                  <a:srgbClr val="2B2320"/>
-                </a:solidFill>
-                <a:latin typeface="Calibri"/>
-              </a:rPr>
-              <a:t>Wrong class</a:t>
-            </a:r>
-          </a:p>
-        </p:txBody>
-      </p:sp>
-      <p:sp>
-        <p:nvSpPr>
-          <p:cNvPr id="12" name="Rounded Rectangle 11"/>
-          <p:cNvSpPr/>
-          <p:nvPr/>
-        </p:nvSpPr>
-        <p:spPr>
-          <a:xfrm>
-            <a:off x="640080" y="3493008"/>
-            <a:ext cx="548640" cy="457200"/>
-          </a:xfrm>
-          <a:prstGeom prst="roundRect">
-            <a:avLst>
-              <a:gd name="adj" fmla="val 25000"/>
-            </a:avLst>
-          </a:prstGeom>
-          <a:solidFill>
-            <a:srgbClr val="5A1E1B"/>
-          </a:solidFill>
-          <a:ln>
-            <a:noFill/>
-          </a:ln>
-          <a:effectLst/>
-        </p:spPr>
-        <p:style>
-          <a:lnRef idx="1">
-            <a:schemeClr val="accent1"/>
-          </a:lnRef>
-          <a:fillRef idx="3">
-            <a:schemeClr val="accent1"/>
-          </a:fillRef>
-          <a:effectRef idx="2">
-            <a:schemeClr val="accent1"/>
-          </a:effectRef>
-          <a:fontRef idx="minor">
-            <a:schemeClr val="lt1"/>
-          </a:fontRef>
-        </p:style>
-        <p:txBody>
-          <a:bodyPr rtlCol="0" anchor="ctr"/>
-          <a:lstStyle/>
-          <a:p>
-            <a:pPr algn="ctr"/>
-          </a:p>
-        </p:txBody>
-      </p:sp>
-      <p:sp>
-        <p:nvSpPr>
-          <p:cNvPr id="13" name="TextBox 12"/>
-          <p:cNvSpPr txBox="1"/>
-          <p:nvPr/>
-        </p:nvSpPr>
-        <p:spPr>
-          <a:xfrm>
-            <a:off x="640080" y="3511296"/>
-            <a:ext cx="548640" cy="420624"/>
-          </a:xfrm>
-          <a:prstGeom prst="rect">
-            <a:avLst/>
-          </a:prstGeom>
-          <a:noFill/>
-        </p:spPr>
-        <p:txBody>
-          <a:bodyPr wrap="square" anchor="ctr">
-            <a:spAutoFit/>
-          </a:bodyPr>
-          <a:lstStyle/>
-          <a:p>
-            <a:pPr algn="ctr">
-              <a:lnSpc>
-                <a:spcPct val="100000"/>
-              </a:lnSpc>
-              <a:spcAft>
-                <a:spcPts val="600"/>
-              </a:spcAft>
-            </a:pPr>
-            <a:r>
-              <a:rPr sz="1700" b="1" i="0">
-                <a:solidFill>
-                  <a:srgbClr val="FBF6EF"/>
-                </a:solidFill>
-                <a:latin typeface="Calibri"/>
-              </a:rPr>
-              <a:t>2</a:t>
-            </a:r>
-          </a:p>
-        </p:txBody>
-      </p:sp>
-      <p:sp>
-        <p:nvSpPr>
-          <p:cNvPr id="14" name="TextBox 13"/>
-          <p:cNvSpPr txBox="1"/>
-          <p:nvPr/>
-        </p:nvSpPr>
-        <p:spPr>
-          <a:xfrm>
-            <a:off x="1325880" y="3511296"/>
-            <a:ext cx="4754880" cy="420624"/>
-          </a:xfrm>
-          <a:prstGeom prst="rect">
-            <a:avLst/>
-          </a:prstGeom>
-          <a:noFill/>
-        </p:spPr>
-        <p:txBody>
-          <a:bodyPr wrap="square" anchor="ctr">
-            <a:spAutoFit/>
-          </a:bodyPr>
-          <a:lstStyle/>
-          <a:p>
-            <a:pPr algn="l">
-              <a:lnSpc>
-                <a:spcPct val="100000"/>
-              </a:lnSpc>
-              <a:spcAft>
-                <a:spcPts val="600"/>
-              </a:spcAft>
-            </a:pPr>
-            <a:r>
-              <a:rPr sz="1500" b="0" i="0">
-                <a:solidFill>
-                  <a:srgbClr val="2B2320"/>
-                </a:solidFill>
-                <a:latin typeface="Calibri"/>
-              </a:rPr>
-              <a:t>Loose box (poor localization)</a:t>
-            </a:r>
-          </a:p>
-        </p:txBody>
-      </p:sp>
-      <p:sp>
-        <p:nvSpPr>
-          <p:cNvPr id="15" name="Rounded Rectangle 14"/>
-          <p:cNvSpPr/>
-          <p:nvPr/>
-        </p:nvSpPr>
-        <p:spPr>
-          <a:xfrm>
-            <a:off x="640080" y="4096512"/>
-            <a:ext cx="548640" cy="457200"/>
-          </a:xfrm>
-          <a:prstGeom prst="roundRect">
-            <a:avLst>
-              <a:gd name="adj" fmla="val 25000"/>
-            </a:avLst>
-          </a:prstGeom>
-          <a:solidFill>
-            <a:srgbClr val="5A1E1B"/>
-          </a:solidFill>
-          <a:ln>
-            <a:noFill/>
-          </a:ln>
-          <a:effectLst/>
-        </p:spPr>
-        <p:style>
-          <a:lnRef idx="1">
-            <a:schemeClr val="accent1"/>
-          </a:lnRef>
-          <a:fillRef idx="3">
-            <a:schemeClr val="accent1"/>
-          </a:fillRef>
-          <a:effectRef idx="2">
-            <a:schemeClr val="accent1"/>
-          </a:effectRef>
-          <a:fontRef idx="minor">
-            <a:schemeClr val="lt1"/>
-          </a:fontRef>
-        </p:style>
-        <p:txBody>
-          <a:bodyPr rtlCol="0" anchor="ctr"/>
-          <a:lstStyle/>
-          <a:p>
-            <a:pPr algn="ctr"/>
-          </a:p>
-        </p:txBody>
-      </p:sp>
-      <p:sp>
-        <p:nvSpPr>
-          <p:cNvPr id="16" name="TextBox 15"/>
-          <p:cNvSpPr txBox="1"/>
-          <p:nvPr/>
-        </p:nvSpPr>
-        <p:spPr>
-          <a:xfrm>
-            <a:off x="640080" y="4114800"/>
-            <a:ext cx="548640" cy="420624"/>
-          </a:xfrm>
-          <a:prstGeom prst="rect">
-            <a:avLst/>
-          </a:prstGeom>
-          <a:noFill/>
-        </p:spPr>
-        <p:txBody>
-          <a:bodyPr wrap="square" anchor="ctr">
-            <a:spAutoFit/>
-          </a:bodyPr>
-          <a:lstStyle/>
-          <a:p>
-            <a:pPr algn="ctr">
-              <a:lnSpc>
-                <a:spcPct val="100000"/>
-              </a:lnSpc>
-              <a:spcAft>
-                <a:spcPts val="600"/>
-              </a:spcAft>
-            </a:pPr>
-            <a:r>
-              <a:rPr sz="1700" b="1" i="0">
-                <a:solidFill>
-                  <a:srgbClr val="FBF6EF"/>
-                </a:solidFill>
-                <a:latin typeface="Calibri"/>
-              </a:rPr>
-              <a:t>2</a:t>
-            </a:r>
-          </a:p>
-        </p:txBody>
-      </p:sp>
-      <p:sp>
-        <p:nvSpPr>
-          <p:cNvPr id="17" name="TextBox 16"/>
-          <p:cNvSpPr txBox="1"/>
-          <p:nvPr/>
-        </p:nvSpPr>
-        <p:spPr>
-          <a:xfrm>
-            <a:off x="1325880" y="4114800"/>
-            <a:ext cx="4754880" cy="420624"/>
-          </a:xfrm>
-          <a:prstGeom prst="rect">
-            <a:avLst/>
-          </a:prstGeom>
-          <a:noFill/>
-        </p:spPr>
-        <p:txBody>
-          <a:bodyPr wrap="square" anchor="ctr">
-            <a:spAutoFit/>
-          </a:bodyPr>
-          <a:lstStyle/>
-          <a:p>
-            <a:pPr algn="l">
-              <a:lnSpc>
-                <a:spcPct val="100000"/>
-              </a:lnSpc>
-              <a:spcAft>
-                <a:spcPts val="600"/>
-              </a:spcAft>
-            </a:pPr>
-            <a:r>
-              <a:rPr sz="1500" b="0" i="0">
-                <a:solidFill>
-                  <a:srgbClr val="2B2320"/>
-                </a:solidFill>
-                <a:latin typeface="Calibri"/>
-              </a:rPr>
-              <a:t>False alarm (false positive)</a:t>
-            </a:r>
-          </a:p>
-        </p:txBody>
-      </p:sp>
-      <p:sp>
-        <p:nvSpPr>
-          <p:cNvPr id="18" name="TextBox 17"/>
-          <p:cNvSpPr txBox="1"/>
-          <p:nvPr/>
-        </p:nvSpPr>
-        <p:spPr>
-          <a:xfrm>
-            <a:off x="640080" y="4892040"/>
-            <a:ext cx="5577840" cy="1554480"/>
-          </a:xfrm>
-          <a:prstGeom prst="rect">
-            <a:avLst/>
-          </a:prstGeom>
-          <a:noFill/>
-        </p:spPr>
-        <p:txBody>
-          <a:bodyPr wrap="square" anchor="t">
-            <a:spAutoFit/>
-          </a:bodyPr>
-          <a:lstStyle/>
-          <a:p>
-            <a:pPr algn="l">
-              <a:lnSpc>
-                <a:spcPct val="112000"/>
-              </a:lnSpc>
-              <a:spcAft>
-                <a:spcPts val="300"/>
-              </a:spcAft>
-            </a:pPr>
-            <a:r>
-              <a:rPr sz="1550" b="1" i="0">
-                <a:solidFill>
-                  <a:srgbClr val="B4472E"/>
-                </a:solidFill>
-                <a:latin typeface="Calibri"/>
-              </a:rPr>
-              <a:t>The pattern:</a:t>
-            </a:r>
-          </a:p>
-          <a:p>
-            <a:pPr algn="l">
-              <a:lnSpc>
-                <a:spcPct val="112000"/>
-              </a:lnSpc>
-              <a:spcAft>
-                <a:spcPts val="300"/>
-              </a:spcAft>
-            </a:pPr>
-            <a:r>
-              <a:rPr sz="1500" b="0" i="0">
-                <a:solidFill>
-                  <a:srgbClr val="2B2320"/>
-                </a:solidFill>
-                <a:latin typeface="Calibri"/>
-              </a:rPr>
-              <a:t>most misses are extra pieces on a crowded plate, plus the occasional</a:t>
-            </a:r>
-          </a:p>
-          <a:p>
-            <a:pPr algn="l">
-              <a:lnSpc>
-                <a:spcPct val="112000"/>
-              </a:lnSpc>
-              <a:spcAft>
-                <a:spcPts val="300"/>
-              </a:spcAft>
-            </a:pPr>
-            <a:r>
-              <a:rPr sz="1500" b="0" i="0">
-                <a:solidFill>
-                  <a:srgbClr val="2B2320"/>
-                </a:solidFill>
-                <a:latin typeface="Calibri"/>
-              </a:rPr>
-              <a:t>Nakhi ↔ Luqaimat mix-up — two visually similar dishes.</a:t>
+              <a:t>Where the predictions land</a:t>
             </a:r>
           </a:p>
         </p:txBody>
       </p:sp>
       <p:pic>
         <p:nvPicPr>
-          <p:cNvPr id="19" name="Picture 18" descr="Screenshot-2026-08-12-170104_jpg.rf.0367997814689e4fb68f135f91e27c9e__false_negative.png"/>
+          <p:cNvPr id="5" name="Picture 4" descr="confusion_matrix_normalized.png"/>
           <p:cNvPicPr>
             <a:picLocks noChangeAspect="1"/>
           </p:cNvPicPr>
@@ -7434,8 +7499,8 @@
         </p:blipFill>
         <p:spPr>
           <a:xfrm>
-            <a:off x="6400800" y="2468880"/>
-            <a:ext cx="5486400" cy="2286000"/>
+            <a:off x="502920" y="1691640"/>
+            <a:ext cx="6096000" cy="4572000"/>
           </a:xfrm>
           <a:prstGeom prst="rect">
             <a:avLst/>
@@ -7444,14 +7509,61 @@
       </p:pic>
       <p:sp>
         <p:nvSpPr>
-          <p:cNvPr id="20" name="TextBox 19"/>
+          <p:cNvPr id="6" name="Rounded Rectangle 5"/>
+          <p:cNvSpPr/>
+          <p:nvPr/>
+        </p:nvSpPr>
+        <p:spPr>
+          <a:xfrm>
+            <a:off x="6858000" y="1828800"/>
+            <a:ext cx="4754880" cy="4251960"/>
+          </a:xfrm>
+          <a:prstGeom prst="roundRect">
+            <a:avLst>
+              <a:gd name="adj" fmla="val 6000"/>
+            </a:avLst>
+          </a:prstGeom>
+          <a:solidFill>
+            <a:srgbClr val="F1E4D6"/>
+          </a:solidFill>
+          <a:ln>
+            <a:noFill/>
+          </a:ln>
+          <a:effectLst/>
+        </p:spPr>
+        <p:style>
+          <a:lnRef idx="1">
+            <a:schemeClr val="accent1"/>
+          </a:lnRef>
+          <a:fillRef idx="3">
+            <a:schemeClr val="accent1"/>
+          </a:fillRef>
+          <a:effectRef idx="2">
+            <a:schemeClr val="accent1"/>
+          </a:effectRef>
+          <a:fontRef idx="minor">
+            <a:schemeClr val="lt1"/>
+          </a:fontRef>
+        </p:style>
+        <p:txBody>
+          <a:bodyPr rtlCol="0" anchor="ctr"/>
+          <a:lstStyle/>
+          <a:p>
+            <a:pPr algn="ctr"/>
+            <a:endParaRPr/>
+          </a:p>
+        </p:txBody>
+      </p:sp>
+      <p:sp>
+        <p:nvSpPr>
+          <p:cNvPr id="7" name="TextBox 6"/>
           <p:cNvSpPr txBox="1"/>
           <p:nvPr/>
         </p:nvSpPr>
         <p:spPr>
           <a:xfrm>
-            <a:off x="6400800" y="4892040"/>
-            <a:ext cx="5486400" cy="365760"/>
+            <a:off x="7132320" y="2011680"/>
+            <a:ext cx="4297680" cy="457200"/>
           </a:xfrm>
           <a:prstGeom prst="rect">
             <a:avLst/>
@@ -7464,7 +7576,7 @@
           </a:bodyPr>
           <a:lstStyle/>
           <a:p>
-            <a:pPr algn="ctr">
+            <a:pPr algn="l">
               <a:lnSpc>
                 <a:spcPct val="100000"/>
               </a:lnSpc>
@@ -7473,13 +7585,163 @@
               </a:spcAft>
             </a:pPr>
             <a:r>
-              <a:rPr sz="1150" b="0" i="1">
-                <a:solidFill>
-                  <a:srgbClr val="8A7E76"/>
+              <a:rPr sz="1300" b="1" i="0">
+                <a:solidFill>
+                  <a:srgbClr val="B4472E"/>
                 </a:solidFill>
                 <a:latin typeface="Calibri"/>
               </a:rPr>
-              <a:t>Ground truth (left) vs prediction (right): missed pieces on a crowded plate.</a:t>
+              <a:t>HOW TO READ IT</a:t>
+            </a:r>
+          </a:p>
+        </p:txBody>
+      </p:sp>
+      <p:sp>
+        <p:nvSpPr>
+          <p:cNvPr id="8" name="TextBox 7"/>
+          <p:cNvSpPr txBox="1"/>
+          <p:nvPr/>
+        </p:nvSpPr>
+        <p:spPr>
+          <a:xfrm>
+            <a:off x="7132320" y="2487168"/>
+            <a:ext cx="4297680" cy="3474720"/>
+          </a:xfrm>
+          <a:prstGeom prst="rect">
+            <a:avLst/>
+          </a:prstGeom>
+          <a:noFill/>
+        </p:spPr>
+        <p:txBody>
+          <a:bodyPr wrap="square" anchor="t">
+            <a:spAutoFit/>
+          </a:bodyPr>
+          <a:lstStyle/>
+          <a:p>
+            <a:pPr algn="l">
+              <a:lnSpc>
+                <a:spcPct val="113000"/>
+              </a:lnSpc>
+              <a:spcAft>
+                <a:spcPts val="300"/>
+              </a:spcAft>
+            </a:pPr>
+            <a:r>
+              <a:rPr sz="1350" b="0" i="0">
+                <a:solidFill>
+                  <a:srgbClr val="2B2320"/>
+                </a:solidFill>
+                <a:latin typeface="Calibri"/>
+              </a:rPr>
+              <a:t>Columns = the true dish  ·  rows = what the model predicted.</a:t>
+            </a:r>
+          </a:p>
+          <a:p>
+            <a:pPr algn="l">
+              <a:lnSpc>
+                <a:spcPct val="113000"/>
+              </a:lnSpc>
+              <a:spcAft>
+                <a:spcPts val="300"/>
+              </a:spcAft>
+            </a:pPr>
+            <a:endParaRPr sz="1350" b="0" i="0">
+              <a:solidFill>
+                <a:srgbClr val="2B2320"/>
+              </a:solidFill>
+              <a:latin typeface="Calibri"/>
+            </a:endParaRPr>
+          </a:p>
+          <a:p>
+            <a:pPr algn="l">
+              <a:lnSpc>
+                <a:spcPct val="113000"/>
+              </a:lnSpc>
+              <a:spcAft>
+                <a:spcPts val="300"/>
+              </a:spcAft>
+            </a:pPr>
+            <a:r>
+              <a:rPr sz="1350" b="0" i="0">
+                <a:solidFill>
+                  <a:srgbClr val="2B2320"/>
+                </a:solidFill>
+                <a:latin typeface="Calibri"/>
+              </a:rPr>
+              <a:t>A bright diagonal = correct calls. Ours is strongly diagonal — most dishes are named right.</a:t>
+            </a:r>
+          </a:p>
+          <a:p>
+            <a:pPr algn="l">
+              <a:lnSpc>
+                <a:spcPct val="113000"/>
+              </a:lnSpc>
+              <a:spcAft>
+                <a:spcPts val="300"/>
+              </a:spcAft>
+            </a:pPr>
+            <a:endParaRPr sz="1350" b="0" i="0">
+              <a:solidFill>
+                <a:srgbClr val="2B2320"/>
+              </a:solidFill>
+              <a:latin typeface="Calibri"/>
+            </a:endParaRPr>
+          </a:p>
+          <a:p>
+            <a:pPr algn="l">
+              <a:lnSpc>
+                <a:spcPct val="113000"/>
+              </a:lnSpc>
+              <a:spcAft>
+                <a:spcPts val="300"/>
+              </a:spcAft>
+            </a:pPr>
+            <a:r>
+              <a:rPr sz="1350" b="1" i="0">
+                <a:solidFill>
+                  <a:srgbClr val="5A1E1B"/>
+                </a:solidFill>
+                <a:latin typeface="Calibri"/>
+              </a:rPr>
+              <a:t>The “background” row &amp; column just mean “no object”:</a:t>
+            </a:r>
+          </a:p>
+          <a:p>
+            <a:pPr algn="l">
+              <a:lnSpc>
+                <a:spcPct val="113000"/>
+              </a:lnSpc>
+              <a:spcAft>
+                <a:spcPts val="300"/>
+              </a:spcAft>
+            </a:pPr>
+            <a:r>
+              <a:rPr sz="1300" b="0" i="0">
+                <a:solidFill>
+                  <a:srgbClr val="2B2320"/>
+                </a:solidFill>
+                <a:latin typeface="Calibri"/>
+              </a:rPr>
+              <a:t>•  background column — the model saw a dish that wasn’t there (false positive)</a:t>
+            </a:r>
+          </a:p>
+          <a:p>
+            <a:pPr algn="l">
+              <a:lnSpc>
+                <a:spcPct val="113000"/>
+              </a:lnSpc>
+              <a:spcAft>
+                <a:spcPts val="300"/>
+              </a:spcAft>
+            </a:pPr>
+            <a:r>
+              <a:rPr sz="1300" b="0" i="0">
+                <a:solidFill>
+                  <a:srgbClr val="2B2320"/>
+                </a:solidFill>
+                <a:latin typeface="Calibri"/>
+              </a:rPr>
+              <a:t>•  background row — the model missed a real dish (false negative)</a:t>
             </a:r>
           </a:p>
         </p:txBody>
@@ -7493,7 +7755,7 @@
 </file>
 
 <file path=ppt/slides/slide7.xml><?xml version="1.0" encoding="utf-8"?>
-<p:sld xmlns:a="http://schemas.openxmlformats.org/drawingml/2006/main" xmlns:p="http://schemas.openxmlformats.org/presentationml/2006/main" xmlns:r="http://schemas.openxmlformats.org/officeDocument/2006/relationships">
+<p:sld xmlns:a="http://schemas.openxmlformats.org/drawingml/2006/main" xmlns:r="http://schemas.openxmlformats.org/officeDocument/2006/relationships" xmlns:p="http://schemas.openxmlformats.org/presentationml/2006/main">
   <p:cSld>
     <p:spTree>
       <p:nvGrpSpPr>
@@ -7501,7 +7763,14 @@
         <p:cNvGrpSpPr/>
         <p:nvPr/>
       </p:nvGrpSpPr>
-      <p:grpSpPr/>
+      <p:grpSpPr>
+        <a:xfrm>
+          <a:off x="0" y="0"/>
+          <a:ext cx="0" cy="0"/>
+          <a:chOff x="0" y="0"/>
+          <a:chExt cx="0" cy="0"/>
+        </a:xfrm>
+      </p:grpSpPr>
       <p:sp>
         <p:nvSpPr>
           <p:cNvPr id="2" name="Rectangle 1"/>
@@ -7543,6 +7812,7 @@
           <a:lstStyle/>
           <a:p>
             <a:pPr algn="ctr"/>
+            <a:endParaRPr/>
           </a:p>
         </p:txBody>
       </p:sp>
@@ -7583,7 +7853,7 @@
                 </a:solidFill>
                 <a:latin typeface="Calibri"/>
               </a:rPr>
-              <a:t>NEXT ROUND (V2)</a:t>
+              <a:t>WHERE IT FAILS</a:t>
             </a:r>
           </a:p>
         </p:txBody>
@@ -7625,29 +7895,71 @@
                 </a:solidFill>
                 <a:latin typeface="Cambria"/>
               </a:rPr>
-              <a:t>Let the failures decide the data</a:t>
-            </a:r>
-          </a:p>
-        </p:txBody>
-      </p:sp>
-      <p:sp>
-        <p:nvSpPr>
-          <p:cNvPr id="5" name="Rounded Rectangle 4"/>
+              <a:t>12 documented failure cases</a:t>
+            </a:r>
+          </a:p>
+        </p:txBody>
+      </p:sp>
+      <p:sp>
+        <p:nvSpPr>
+          <p:cNvPr id="5" name="TextBox 4"/>
+          <p:cNvSpPr txBox="1"/>
+          <p:nvPr/>
+        </p:nvSpPr>
+        <p:spPr>
+          <a:xfrm>
+            <a:off x="640080" y="1828800"/>
+            <a:ext cx="5486400" cy="457200"/>
+          </a:xfrm>
+          <a:prstGeom prst="rect">
+            <a:avLst/>
+          </a:prstGeom>
+          <a:noFill/>
+        </p:spPr>
+        <p:txBody>
+          <a:bodyPr wrap="square" anchor="t">
+            <a:spAutoFit/>
+          </a:bodyPr>
+          <a:lstStyle/>
+          <a:p>
+            <a:pPr algn="l">
+              <a:lnSpc>
+                <a:spcPct val="100000"/>
+              </a:lnSpc>
+              <a:spcAft>
+                <a:spcPts val="600"/>
+              </a:spcAft>
+            </a:pPr>
+            <a:r>
+              <a:rPr sz="1300" b="1" i="0">
+                <a:solidFill>
+                  <a:srgbClr val="B4472E"/>
+                </a:solidFill>
+                <a:latin typeface="Calibri"/>
+              </a:rPr>
+              <a:t>FAILURE BREAKDOWN</a:t>
+            </a:r>
+          </a:p>
+        </p:txBody>
+      </p:sp>
+      <p:sp>
+        <p:nvSpPr>
+          <p:cNvPr id="6" name="Rounded Rectangle 5"/>
           <p:cNvSpPr/>
           <p:nvPr/>
         </p:nvSpPr>
         <p:spPr>
           <a:xfrm>
-            <a:off x="640080" y="1965960"/>
-            <a:ext cx="10881360" cy="1005840"/>
+            <a:off x="640080" y="2286000"/>
+            <a:ext cx="548640" cy="457200"/>
           </a:xfrm>
           <a:prstGeom prst="roundRect">
             <a:avLst>
-              <a:gd name="adj" fmla="val 10000"/>
+              <a:gd name="adj" fmla="val 25000"/>
             </a:avLst>
           </a:prstGeom>
           <a:solidFill>
-            <a:srgbClr val="F1E4D6"/>
+            <a:srgbClr val="5A1E1B"/>
           </a:solidFill>
           <a:ln>
             <a:noFill/>
@@ -7673,27 +7985,112 @@
           <a:lstStyle/>
           <a:p>
             <a:pPr algn="ctr"/>
-          </a:p>
-        </p:txBody>
-      </p:sp>
-      <p:sp>
-        <p:nvSpPr>
-          <p:cNvPr id="6" name="Rounded Rectangle 5"/>
+            <a:endParaRPr/>
+          </a:p>
+        </p:txBody>
+      </p:sp>
+      <p:sp>
+        <p:nvSpPr>
+          <p:cNvPr id="7" name="TextBox 6"/>
+          <p:cNvSpPr txBox="1"/>
+          <p:nvPr/>
+        </p:nvSpPr>
+        <p:spPr>
+          <a:xfrm>
+            <a:off x="640080" y="2304288"/>
+            <a:ext cx="548640" cy="420624"/>
+          </a:xfrm>
+          <a:prstGeom prst="rect">
+            <a:avLst/>
+          </a:prstGeom>
+          <a:noFill/>
+        </p:spPr>
+        <p:txBody>
+          <a:bodyPr wrap="square" anchor="ctr">
+            <a:spAutoFit/>
+          </a:bodyPr>
+          <a:lstStyle/>
+          <a:p>
+            <a:pPr algn="ctr">
+              <a:lnSpc>
+                <a:spcPct val="100000"/>
+              </a:lnSpc>
+              <a:spcAft>
+                <a:spcPts val="600"/>
+              </a:spcAft>
+            </a:pPr>
+            <a:r>
+              <a:rPr sz="1700" b="1" i="0">
+                <a:solidFill>
+                  <a:srgbClr val="FBF6EF"/>
+                </a:solidFill>
+                <a:latin typeface="Calibri"/>
+              </a:rPr>
+              <a:t>12</a:t>
+            </a:r>
+          </a:p>
+        </p:txBody>
+      </p:sp>
+      <p:sp>
+        <p:nvSpPr>
+          <p:cNvPr id="8" name="TextBox 7"/>
+          <p:cNvSpPr txBox="1"/>
+          <p:nvPr/>
+        </p:nvSpPr>
+        <p:spPr>
+          <a:xfrm>
+            <a:off x="1325880" y="2304288"/>
+            <a:ext cx="4754880" cy="420624"/>
+          </a:xfrm>
+          <a:prstGeom prst="rect">
+            <a:avLst/>
+          </a:prstGeom>
+          <a:noFill/>
+        </p:spPr>
+        <p:txBody>
+          <a:bodyPr wrap="square" anchor="ctr">
+            <a:spAutoFit/>
+          </a:bodyPr>
+          <a:lstStyle/>
+          <a:p>
+            <a:pPr algn="l">
+              <a:lnSpc>
+                <a:spcPct val="100000"/>
+              </a:lnSpc>
+              <a:spcAft>
+                <a:spcPts val="600"/>
+              </a:spcAft>
+            </a:pPr>
+            <a:r>
+              <a:rPr sz="1500" b="0" i="0">
+                <a:solidFill>
+                  <a:srgbClr val="2B2320"/>
+                </a:solidFill>
+                <a:latin typeface="Calibri"/>
+              </a:rPr>
+              <a:t>Missed items (false negative)</a:t>
+            </a:r>
+          </a:p>
+        </p:txBody>
+      </p:sp>
+      <p:sp>
+        <p:nvSpPr>
+          <p:cNvPr id="9" name="Rounded Rectangle 8"/>
           <p:cNvSpPr/>
           <p:nvPr/>
         </p:nvSpPr>
         <p:spPr>
           <a:xfrm>
-            <a:off x="822960" y="2167128"/>
-            <a:ext cx="603504" cy="603504"/>
+            <a:off x="640080" y="2889504"/>
+            <a:ext cx="548640" cy="457200"/>
           </a:xfrm>
           <a:prstGeom prst="roundRect">
             <a:avLst>
-              <a:gd name="adj" fmla="val 50000"/>
+              <a:gd name="adj" fmla="val 25000"/>
             </a:avLst>
           </a:prstGeom>
           <a:solidFill>
-            <a:srgbClr val="D2922B"/>
+            <a:srgbClr val="5A1E1B"/>
           </a:solidFill>
           <a:ln>
             <a:noFill/>
@@ -7719,19 +8116,20 @@
           <a:lstStyle/>
           <a:p>
             <a:pPr algn="ctr"/>
-          </a:p>
-        </p:txBody>
-      </p:sp>
-      <p:sp>
-        <p:nvSpPr>
-          <p:cNvPr id="7" name="TextBox 6"/>
+            <a:endParaRPr/>
+          </a:p>
+        </p:txBody>
+      </p:sp>
+      <p:sp>
+        <p:nvSpPr>
+          <p:cNvPr id="10" name="TextBox 9"/>
           <p:cNvSpPr txBox="1"/>
           <p:nvPr/>
         </p:nvSpPr>
         <p:spPr>
           <a:xfrm>
-            <a:off x="822960" y="2185415"/>
-            <a:ext cx="603504" cy="566928"/>
+            <a:off x="640080" y="2907792"/>
+            <a:ext cx="548640" cy="420624"/>
           </a:xfrm>
           <a:prstGeom prst="rect">
             <a:avLst/>
@@ -7753,11 +8151,11 @@
               </a:spcAft>
             </a:pPr>
             <a:r>
-              <a:rPr sz="2200" b="1" i="0">
-                <a:solidFill>
-                  <a:srgbClr val="FFFFFF"/>
-                </a:solidFill>
-                <a:latin typeface="Cambria"/>
+              <a:rPr sz="1700" b="1" i="0">
+                <a:solidFill>
+                  <a:srgbClr val="FBF6EF"/>
+                </a:solidFill>
+                <a:latin typeface="Calibri"/>
               </a:rPr>
               <a:t>1</a:t>
             </a:r>
@@ -7766,14 +8164,14 @@
       </p:sp>
       <p:sp>
         <p:nvSpPr>
-          <p:cNvPr id="8" name="TextBox 7"/>
+          <p:cNvPr id="11" name="TextBox 10"/>
           <p:cNvSpPr txBox="1"/>
           <p:nvPr/>
         </p:nvSpPr>
         <p:spPr>
           <a:xfrm>
-            <a:off x="1645920" y="2084831"/>
-            <a:ext cx="9601200" cy="457200"/>
+            <a:off x="1325880" y="2907792"/>
+            <a:ext cx="4754880" cy="420624"/>
           </a:xfrm>
           <a:prstGeom prst="rect">
             <a:avLst/>
@@ -7781,7 +8179,7 @@
           <a:noFill/>
         </p:spPr>
         <p:txBody>
-          <a:bodyPr wrap="square" anchor="t">
+          <a:bodyPr wrap="square" anchor="ctr">
             <a:spAutoFit/>
           </a:bodyPr>
           <a:lstStyle/>
@@ -7795,77 +8193,35 @@
               </a:spcAft>
             </a:pPr>
             <a:r>
-              <a:rPr sz="1800" b="1" i="0">
-                <a:solidFill>
-                  <a:srgbClr val="5A1E1B"/>
-                </a:solidFill>
-                <a:latin typeface="Cambria"/>
-              </a:rPr>
-              <a:t>Crowded / multi-item plates</a:t>
-            </a:r>
-          </a:p>
-        </p:txBody>
-      </p:sp>
-      <p:sp>
-        <p:nvSpPr>
-          <p:cNvPr id="9" name="TextBox 8"/>
-          <p:cNvSpPr txBox="1"/>
-          <p:nvPr/>
-        </p:nvSpPr>
-        <p:spPr>
-          <a:xfrm>
-            <a:off x="1645920" y="2496312"/>
-            <a:ext cx="9601200" cy="411480"/>
-          </a:xfrm>
-          <a:prstGeom prst="rect">
-            <a:avLst/>
-          </a:prstGeom>
-          <a:noFill/>
-        </p:spPr>
-        <p:txBody>
-          <a:bodyPr wrap="square" anchor="t">
-            <a:spAutoFit/>
-          </a:bodyPr>
-          <a:lstStyle/>
-          <a:p>
-            <a:pPr algn="l">
-              <a:lnSpc>
-                <a:spcPct val="100000"/>
-              </a:lnSpc>
-              <a:spcAft>
-                <a:spcPts val="600"/>
-              </a:spcAft>
-            </a:pPr>
-            <a:r>
-              <a:rPr sz="1450" b="0" i="0">
+              <a:rPr sz="1500" b="0" i="0">
                 <a:solidFill>
                   <a:srgbClr val="2B2320"/>
                 </a:solidFill>
                 <a:latin typeface="Calibri"/>
               </a:rPr>
-              <a:t>fixes the missed pieces (the #1 failure)</a:t>
-            </a:r>
-          </a:p>
-        </p:txBody>
-      </p:sp>
-      <p:sp>
-        <p:nvSpPr>
-          <p:cNvPr id="10" name="Rounded Rectangle 9"/>
+              <a:t>Wrong class</a:t>
+            </a:r>
+          </a:p>
+        </p:txBody>
+      </p:sp>
+      <p:sp>
+        <p:nvSpPr>
+          <p:cNvPr id="12" name="Rounded Rectangle 11"/>
           <p:cNvSpPr/>
           <p:nvPr/>
         </p:nvSpPr>
         <p:spPr>
           <a:xfrm>
-            <a:off x="640080" y="3136391"/>
-            <a:ext cx="10881360" cy="1005840"/>
+            <a:off x="640080" y="3493008"/>
+            <a:ext cx="548640" cy="457200"/>
           </a:xfrm>
           <a:prstGeom prst="roundRect">
             <a:avLst>
-              <a:gd name="adj" fmla="val 10000"/>
+              <a:gd name="adj" fmla="val 25000"/>
             </a:avLst>
           </a:prstGeom>
           <a:solidFill>
-            <a:srgbClr val="F1E4D6"/>
+            <a:srgbClr val="5A1E1B"/>
           </a:solidFill>
           <a:ln>
             <a:noFill/>
@@ -7891,27 +8247,112 @@
           <a:lstStyle/>
           <a:p>
             <a:pPr algn="ctr"/>
-          </a:p>
-        </p:txBody>
-      </p:sp>
-      <p:sp>
-        <p:nvSpPr>
-          <p:cNvPr id="11" name="Rounded Rectangle 10"/>
+            <a:endParaRPr/>
+          </a:p>
+        </p:txBody>
+      </p:sp>
+      <p:sp>
+        <p:nvSpPr>
+          <p:cNvPr id="13" name="TextBox 12"/>
+          <p:cNvSpPr txBox="1"/>
+          <p:nvPr/>
+        </p:nvSpPr>
+        <p:spPr>
+          <a:xfrm>
+            <a:off x="640080" y="3511296"/>
+            <a:ext cx="548640" cy="420624"/>
+          </a:xfrm>
+          <a:prstGeom prst="rect">
+            <a:avLst/>
+          </a:prstGeom>
+          <a:noFill/>
+        </p:spPr>
+        <p:txBody>
+          <a:bodyPr wrap="square" anchor="ctr">
+            <a:spAutoFit/>
+          </a:bodyPr>
+          <a:lstStyle/>
+          <a:p>
+            <a:pPr algn="ctr">
+              <a:lnSpc>
+                <a:spcPct val="100000"/>
+              </a:lnSpc>
+              <a:spcAft>
+                <a:spcPts val="600"/>
+              </a:spcAft>
+            </a:pPr>
+            <a:r>
+              <a:rPr sz="1700" b="1" i="0">
+                <a:solidFill>
+                  <a:srgbClr val="FBF6EF"/>
+                </a:solidFill>
+                <a:latin typeface="Calibri"/>
+              </a:rPr>
+              <a:t>2</a:t>
+            </a:r>
+          </a:p>
+        </p:txBody>
+      </p:sp>
+      <p:sp>
+        <p:nvSpPr>
+          <p:cNvPr id="14" name="TextBox 13"/>
+          <p:cNvSpPr txBox="1"/>
+          <p:nvPr/>
+        </p:nvSpPr>
+        <p:spPr>
+          <a:xfrm>
+            <a:off x="1325880" y="3511296"/>
+            <a:ext cx="4754880" cy="420624"/>
+          </a:xfrm>
+          <a:prstGeom prst="rect">
+            <a:avLst/>
+          </a:prstGeom>
+          <a:noFill/>
+        </p:spPr>
+        <p:txBody>
+          <a:bodyPr wrap="square" anchor="ctr">
+            <a:spAutoFit/>
+          </a:bodyPr>
+          <a:lstStyle/>
+          <a:p>
+            <a:pPr algn="l">
+              <a:lnSpc>
+                <a:spcPct val="100000"/>
+              </a:lnSpc>
+              <a:spcAft>
+                <a:spcPts val="600"/>
+              </a:spcAft>
+            </a:pPr>
+            <a:r>
+              <a:rPr sz="1500" b="0" i="0">
+                <a:solidFill>
+                  <a:srgbClr val="2B2320"/>
+                </a:solidFill>
+                <a:latin typeface="Calibri"/>
+              </a:rPr>
+              <a:t>Loose box (poor localization)</a:t>
+            </a:r>
+          </a:p>
+        </p:txBody>
+      </p:sp>
+      <p:sp>
+        <p:nvSpPr>
+          <p:cNvPr id="15" name="Rounded Rectangle 14"/>
           <p:cNvSpPr/>
           <p:nvPr/>
         </p:nvSpPr>
         <p:spPr>
           <a:xfrm>
-            <a:off x="822960" y="3337560"/>
-            <a:ext cx="603504" cy="603504"/>
+            <a:off x="640080" y="4096512"/>
+            <a:ext cx="548640" cy="457200"/>
           </a:xfrm>
           <a:prstGeom prst="roundRect">
             <a:avLst>
-              <a:gd name="adj" fmla="val 50000"/>
+              <a:gd name="adj" fmla="val 25000"/>
             </a:avLst>
           </a:prstGeom>
           <a:solidFill>
-            <a:srgbClr val="D2922B"/>
+            <a:srgbClr val="5A1E1B"/>
           </a:solidFill>
           <a:ln>
             <a:noFill/>
@@ -7937,19 +8378,20 @@
           <a:lstStyle/>
           <a:p>
             <a:pPr algn="ctr"/>
-          </a:p>
-        </p:txBody>
-      </p:sp>
-      <p:sp>
-        <p:nvSpPr>
-          <p:cNvPr id="12" name="TextBox 11"/>
+            <a:endParaRPr/>
+          </a:p>
+        </p:txBody>
+      </p:sp>
+      <p:sp>
+        <p:nvSpPr>
+          <p:cNvPr id="16" name="TextBox 15"/>
           <p:cNvSpPr txBox="1"/>
           <p:nvPr/>
         </p:nvSpPr>
         <p:spPr>
           <a:xfrm>
-            <a:off x="822960" y="3355848"/>
-            <a:ext cx="603504" cy="566928"/>
+            <a:off x="640080" y="4114800"/>
+            <a:ext cx="548640" cy="420624"/>
           </a:xfrm>
           <a:prstGeom prst="rect">
             <a:avLst/>
@@ -7971,11 +8413,11 @@
               </a:spcAft>
             </a:pPr>
             <a:r>
-              <a:rPr sz="2200" b="1" i="0">
-                <a:solidFill>
-                  <a:srgbClr val="FFFFFF"/>
-                </a:solidFill>
-                <a:latin typeface="Cambria"/>
+              <a:rPr sz="1700" b="1" i="0">
+                <a:solidFill>
+                  <a:srgbClr val="FBF6EF"/>
+                </a:solidFill>
+                <a:latin typeface="Calibri"/>
               </a:rPr>
               <a:t>2</a:t>
             </a:r>
@@ -7984,14 +8426,56 @@
       </p:sp>
       <p:sp>
         <p:nvSpPr>
-          <p:cNvPr id="13" name="TextBox 12"/>
+          <p:cNvPr id="17" name="TextBox 16"/>
           <p:cNvSpPr txBox="1"/>
           <p:nvPr/>
         </p:nvSpPr>
         <p:spPr>
           <a:xfrm>
-            <a:off x="1645920" y="3255263"/>
-            <a:ext cx="9601200" cy="457200"/>
+            <a:off x="1325880" y="4114800"/>
+            <a:ext cx="4754880" cy="420624"/>
+          </a:xfrm>
+          <a:prstGeom prst="rect">
+            <a:avLst/>
+          </a:prstGeom>
+          <a:noFill/>
+        </p:spPr>
+        <p:txBody>
+          <a:bodyPr wrap="square" anchor="ctr">
+            <a:spAutoFit/>
+          </a:bodyPr>
+          <a:lstStyle/>
+          <a:p>
+            <a:pPr algn="l">
+              <a:lnSpc>
+                <a:spcPct val="100000"/>
+              </a:lnSpc>
+              <a:spcAft>
+                <a:spcPts val="600"/>
+              </a:spcAft>
+            </a:pPr>
+            <a:r>
+              <a:rPr sz="1500" b="0" i="0">
+                <a:solidFill>
+                  <a:srgbClr val="2B2320"/>
+                </a:solidFill>
+                <a:latin typeface="Calibri"/>
+              </a:rPr>
+              <a:t>False alarm (false positive)</a:t>
+            </a:r>
+          </a:p>
+        </p:txBody>
+      </p:sp>
+      <p:sp>
+        <p:nvSpPr>
+          <p:cNvPr id="18" name="TextBox 17"/>
+          <p:cNvSpPr txBox="1"/>
+          <p:nvPr/>
+        </p:nvSpPr>
+        <p:spPr>
+          <a:xfrm>
+            <a:off x="640080" y="4892040"/>
+            <a:ext cx="5577840" cy="1554480"/>
           </a:xfrm>
           <a:prstGeom prst="rect">
             <a:avLst/>
@@ -8006,34 +8490,96 @@
           <a:p>
             <a:pPr algn="l">
               <a:lnSpc>
-                <a:spcPct val="100000"/>
-              </a:lnSpc>
-              <a:spcAft>
-                <a:spcPts val="600"/>
-              </a:spcAft>
-            </a:pPr>
-            <a:r>
-              <a:rPr sz="1800" b="1" i="0">
-                <a:solidFill>
-                  <a:srgbClr val="5A1E1B"/>
-                </a:solidFill>
-                <a:latin typeface="Cambria"/>
-              </a:rPr>
-              <a:t>More Nakhi &amp; Luqaimat</a:t>
-            </a:r>
-          </a:p>
-        </p:txBody>
-      </p:sp>
-      <p:sp>
-        <p:nvSpPr>
-          <p:cNvPr id="14" name="TextBox 13"/>
+                <a:spcPct val="112000"/>
+              </a:lnSpc>
+              <a:spcAft>
+                <a:spcPts val="300"/>
+              </a:spcAft>
+            </a:pPr>
+            <a:r>
+              <a:rPr sz="1550" b="1" i="0">
+                <a:solidFill>
+                  <a:srgbClr val="B4472E"/>
+                </a:solidFill>
+                <a:latin typeface="Calibri"/>
+              </a:rPr>
+              <a:t>The pattern:</a:t>
+            </a:r>
+          </a:p>
+          <a:p>
+            <a:pPr algn="l">
+              <a:lnSpc>
+                <a:spcPct val="112000"/>
+              </a:lnSpc>
+              <a:spcAft>
+                <a:spcPts val="300"/>
+              </a:spcAft>
+            </a:pPr>
+            <a:r>
+              <a:rPr sz="1500" b="0" i="0">
+                <a:solidFill>
+                  <a:srgbClr val="2B2320"/>
+                </a:solidFill>
+                <a:latin typeface="Calibri"/>
+              </a:rPr>
+              <a:t>most misses are extra pieces on a crowded plate, plus the occasional</a:t>
+            </a:r>
+          </a:p>
+          <a:p>
+            <a:pPr algn="l">
+              <a:lnSpc>
+                <a:spcPct val="112000"/>
+              </a:lnSpc>
+              <a:spcAft>
+                <a:spcPts val="300"/>
+              </a:spcAft>
+            </a:pPr>
+            <a:r>
+              <a:rPr sz="1500" b="0" i="0">
+                <a:solidFill>
+                  <a:srgbClr val="2B2320"/>
+                </a:solidFill>
+                <a:latin typeface="Calibri"/>
+              </a:rPr>
+              <a:t>Nakhi ↔ Luqaimat mix-up — two visually similar dishes.</a:t>
+            </a:r>
+          </a:p>
+        </p:txBody>
+      </p:sp>
+      <p:pic>
+        <p:nvPicPr>
+          <p:cNvPr id="19" name="Picture 18" descr="Screenshot-2026-08-12-170104_jpg.rf.0367997814689e4fb68f135f91e27c9e__false_negative.png"/>
+          <p:cNvPicPr>
+            <a:picLocks noChangeAspect="1"/>
+          </p:cNvPicPr>
+          <p:nvPr/>
+        </p:nvPicPr>
+        <p:blipFill>
+          <a:blip r:embed="rId2"/>
+          <a:stretch>
+            <a:fillRect/>
+          </a:stretch>
+        </p:blipFill>
+        <p:spPr>
+          <a:xfrm>
+            <a:off x="6400800" y="2468880"/>
+            <a:ext cx="5486400" cy="2286000"/>
+          </a:xfrm>
+          <a:prstGeom prst="rect">
+            <a:avLst/>
+          </a:prstGeom>
+        </p:spPr>
+      </p:pic>
+      <p:sp>
+        <p:nvSpPr>
+          <p:cNvPr id="20" name="TextBox 19"/>
           <p:cNvSpPr txBox="1"/>
           <p:nvPr/>
         </p:nvSpPr>
         <p:spPr>
           <a:xfrm>
-            <a:off x="1645920" y="3666744"/>
-            <a:ext cx="9601200" cy="411480"/>
+            <a:off x="6400800" y="4892040"/>
+            <a:ext cx="5486400" cy="365760"/>
           </a:xfrm>
           <a:prstGeom prst="rect">
             <a:avLst/>
@@ -8046,7 +8592,7 @@
           </a:bodyPr>
           <a:lstStyle/>
           <a:p>
-            <a:pPr algn="l">
+            <a:pPr algn="ctr">
               <a:lnSpc>
                 <a:spcPct val="100000"/>
               </a:lnSpc>
@@ -8055,315 +8601,13 @@
               </a:spcAft>
             </a:pPr>
             <a:r>
-              <a:rPr sz="1450" b="0" i="0">
-                <a:solidFill>
-                  <a:srgbClr val="2B2320"/>
+              <a:rPr sz="1150" b="0" i="1">
+                <a:solidFill>
+                  <a:srgbClr val="8A7E76"/>
                 </a:solidFill>
                 <a:latin typeface="Calibri"/>
               </a:rPr>
-              <a:t>clearer, balanced examples to end the mix-ups</a:t>
-            </a:r>
-          </a:p>
-        </p:txBody>
-      </p:sp>
-      <p:sp>
-        <p:nvSpPr>
-          <p:cNvPr id="15" name="Rounded Rectangle 14"/>
-          <p:cNvSpPr/>
-          <p:nvPr/>
-        </p:nvSpPr>
-        <p:spPr>
-          <a:xfrm>
-            <a:off x="640080" y="4306824"/>
-            <a:ext cx="10881360" cy="1005840"/>
-          </a:xfrm>
-          <a:prstGeom prst="roundRect">
-            <a:avLst>
-              <a:gd name="adj" fmla="val 10000"/>
-            </a:avLst>
-          </a:prstGeom>
-          <a:solidFill>
-            <a:srgbClr val="F1E4D6"/>
-          </a:solidFill>
-          <a:ln>
-            <a:noFill/>
-          </a:ln>
-          <a:effectLst/>
-        </p:spPr>
-        <p:style>
-          <a:lnRef idx="1">
-            <a:schemeClr val="accent1"/>
-          </a:lnRef>
-          <a:fillRef idx="3">
-            <a:schemeClr val="accent1"/>
-          </a:fillRef>
-          <a:effectRef idx="2">
-            <a:schemeClr val="accent1"/>
-          </a:effectRef>
-          <a:fontRef idx="minor">
-            <a:schemeClr val="lt1"/>
-          </a:fontRef>
-        </p:style>
-        <p:txBody>
-          <a:bodyPr rtlCol="0" anchor="ctr"/>
-          <a:lstStyle/>
-          <a:p>
-            <a:pPr algn="ctr"/>
-          </a:p>
-        </p:txBody>
-      </p:sp>
-      <p:sp>
-        <p:nvSpPr>
-          <p:cNvPr id="16" name="Rounded Rectangle 15"/>
-          <p:cNvSpPr/>
-          <p:nvPr/>
-        </p:nvSpPr>
-        <p:spPr>
-          <a:xfrm>
-            <a:off x="822960" y="4507992"/>
-            <a:ext cx="603504" cy="603504"/>
-          </a:xfrm>
-          <a:prstGeom prst="roundRect">
-            <a:avLst>
-              <a:gd name="adj" fmla="val 50000"/>
-            </a:avLst>
-          </a:prstGeom>
-          <a:solidFill>
-            <a:srgbClr val="D2922B"/>
-          </a:solidFill>
-          <a:ln>
-            <a:noFill/>
-          </a:ln>
-          <a:effectLst/>
-        </p:spPr>
-        <p:style>
-          <a:lnRef idx="1">
-            <a:schemeClr val="accent1"/>
-          </a:lnRef>
-          <a:fillRef idx="3">
-            <a:schemeClr val="accent1"/>
-          </a:fillRef>
-          <a:effectRef idx="2">
-            <a:schemeClr val="accent1"/>
-          </a:effectRef>
-          <a:fontRef idx="minor">
-            <a:schemeClr val="lt1"/>
-          </a:fontRef>
-        </p:style>
-        <p:txBody>
-          <a:bodyPr rtlCol="0" anchor="ctr"/>
-          <a:lstStyle/>
-          <a:p>
-            <a:pPr algn="ctr"/>
-          </a:p>
-        </p:txBody>
-      </p:sp>
-      <p:sp>
-        <p:nvSpPr>
-          <p:cNvPr id="17" name="TextBox 16"/>
-          <p:cNvSpPr txBox="1"/>
-          <p:nvPr/>
-        </p:nvSpPr>
-        <p:spPr>
-          <a:xfrm>
-            <a:off x="822960" y="4526280"/>
-            <a:ext cx="603504" cy="566928"/>
-          </a:xfrm>
-          <a:prstGeom prst="rect">
-            <a:avLst/>
-          </a:prstGeom>
-          <a:noFill/>
-        </p:spPr>
-        <p:txBody>
-          <a:bodyPr wrap="square" anchor="ctr">
-            <a:spAutoFit/>
-          </a:bodyPr>
-          <a:lstStyle/>
-          <a:p>
-            <a:pPr algn="ctr">
-              <a:lnSpc>
-                <a:spcPct val="100000"/>
-              </a:lnSpc>
-              <a:spcAft>
-                <a:spcPts val="600"/>
-              </a:spcAft>
-            </a:pPr>
-            <a:r>
-              <a:rPr sz="2200" b="1" i="0">
-                <a:solidFill>
-                  <a:srgbClr val="FFFFFF"/>
-                </a:solidFill>
-                <a:latin typeface="Cambria"/>
-              </a:rPr>
-              <a:t>3</a:t>
-            </a:r>
-          </a:p>
-        </p:txBody>
-      </p:sp>
-      <p:sp>
-        <p:nvSpPr>
-          <p:cNvPr id="18" name="TextBox 17"/>
-          <p:cNvSpPr txBox="1"/>
-          <p:nvPr/>
-        </p:nvSpPr>
-        <p:spPr>
-          <a:xfrm>
-            <a:off x="1645920" y="4425696"/>
-            <a:ext cx="9601200" cy="457200"/>
-          </a:xfrm>
-          <a:prstGeom prst="rect">
-            <a:avLst/>
-          </a:prstGeom>
-          <a:noFill/>
-        </p:spPr>
-        <p:txBody>
-          <a:bodyPr wrap="square" anchor="t">
-            <a:spAutoFit/>
-          </a:bodyPr>
-          <a:lstStyle/>
-          <a:p>
-            <a:pPr algn="l">
-              <a:lnSpc>
-                <a:spcPct val="100000"/>
-              </a:lnSpc>
-              <a:spcAft>
-                <a:spcPts val="600"/>
-              </a:spcAft>
-            </a:pPr>
-            <a:r>
-              <a:rPr sz="1800" b="1" i="0">
-                <a:solidFill>
-                  <a:srgbClr val="5A1E1B"/>
-                </a:solidFill>
-                <a:latin typeface="Cambria"/>
-              </a:rPr>
-              <a:t>More Kebab variety</a:t>
-            </a:r>
-          </a:p>
-        </p:txBody>
-      </p:sp>
-      <p:sp>
-        <p:nvSpPr>
-          <p:cNvPr id="19" name="TextBox 18"/>
-          <p:cNvSpPr txBox="1"/>
-          <p:nvPr/>
-        </p:nvSpPr>
-        <p:spPr>
-          <a:xfrm>
-            <a:off x="1645920" y="4837176"/>
-            <a:ext cx="9601200" cy="411480"/>
-          </a:xfrm>
-          <a:prstGeom prst="rect">
-            <a:avLst/>
-          </a:prstGeom>
-          <a:noFill/>
-        </p:spPr>
-        <p:txBody>
-          <a:bodyPr wrap="square" anchor="t">
-            <a:spAutoFit/>
-          </a:bodyPr>
-          <a:lstStyle/>
-          <a:p>
-            <a:pPr algn="l">
-              <a:lnSpc>
-                <a:spcPct val="100000"/>
-              </a:lnSpc>
-              <a:spcAft>
-                <a:spcPts val="600"/>
-              </a:spcAft>
-            </a:pPr>
-            <a:r>
-              <a:rPr sz="1450" b="0" i="0">
-                <a:solidFill>
-                  <a:srgbClr val="2B2320"/>
-                </a:solidFill>
-                <a:latin typeface="Calibri"/>
-              </a:rPr>
-              <a:t>different shapes &amp; servings to tighten its boxes</a:t>
-            </a:r>
-          </a:p>
-        </p:txBody>
-      </p:sp>
-      <p:sp>
-        <p:nvSpPr>
-          <p:cNvPr id="20" name="TextBox 19"/>
-          <p:cNvSpPr txBox="1"/>
-          <p:nvPr/>
-        </p:nvSpPr>
-        <p:spPr>
-          <a:xfrm>
-            <a:off x="640080" y="5806440"/>
-            <a:ext cx="10972800" cy="457200"/>
-          </a:xfrm>
-          <a:prstGeom prst="rect">
-            <a:avLst/>
-          </a:prstGeom>
-          <a:noFill/>
-        </p:spPr>
-        <p:txBody>
-          <a:bodyPr wrap="square" anchor="t">
-            <a:spAutoFit/>
-          </a:bodyPr>
-          <a:lstStyle/>
-          <a:p>
-            <a:pPr algn="l">
-              <a:lnSpc>
-                <a:spcPct val="100000"/>
-              </a:lnSpc>
-              <a:spcAft>
-                <a:spcPts val="600"/>
-              </a:spcAft>
-            </a:pPr>
-            <a:r>
-              <a:rPr sz="1500" b="1" i="0">
-                <a:solidFill>
-                  <a:srgbClr val="2B2320"/>
-                </a:solidFill>
-                <a:latin typeface="Calibri"/>
-              </a:rPr>
-              <a:t>Then: re-label as Roboflow v2  →  retrain  →  compare v1 vs v2.</a:t>
-            </a:r>
-          </a:p>
-        </p:txBody>
-      </p:sp>
-      <p:sp>
-        <p:nvSpPr>
-          <p:cNvPr id="21" name="TextBox 20"/>
-          <p:cNvSpPr txBox="1"/>
-          <p:nvPr/>
-        </p:nvSpPr>
-        <p:spPr>
-          <a:xfrm>
-            <a:off x="640080" y="6199632"/>
-            <a:ext cx="10972800" cy="365760"/>
-          </a:xfrm>
-          <a:prstGeom prst="rect">
-            <a:avLst/>
-          </a:prstGeom>
-          <a:noFill/>
-        </p:spPr>
-        <p:txBody>
-          <a:bodyPr wrap="square" anchor="t">
-            <a:spAutoFit/>
-          </a:bodyPr>
-          <a:lstStyle/>
-          <a:p>
-            <a:pPr algn="l">
-              <a:lnSpc>
-                <a:spcPct val="100000"/>
-              </a:lnSpc>
-              <a:spcAft>
-                <a:spcPts val="600"/>
-              </a:spcAft>
-            </a:pPr>
-            <a:r>
-              <a:rPr sz="1200" b="0" i="1">
-                <a:solidFill>
-                  <a:srgbClr val="8A7E76"/>
-                </a:solidFill>
-                <a:latin typeface="Calibri"/>
-              </a:rPr>
-              <a:t>v1 is complete; this targeted second collection is the next step.</a:t>
+              <a:t>Ground truth (left) vs prediction (right): missed pieces on a crowded plate.</a:t>
             </a:r>
           </a:p>
         </p:txBody>
@@ -8377,7 +8621,7 @@
 </file>
 
 <file path=ppt/slides/slide8.xml><?xml version="1.0" encoding="utf-8"?>
-<p:sld xmlns:a="http://schemas.openxmlformats.org/drawingml/2006/main" xmlns:p="http://schemas.openxmlformats.org/presentationml/2006/main" xmlns:r="http://schemas.openxmlformats.org/officeDocument/2006/relationships">
+<p:sld xmlns:a="http://schemas.openxmlformats.org/drawingml/2006/main" xmlns:r="http://schemas.openxmlformats.org/officeDocument/2006/relationships" xmlns:p="http://schemas.openxmlformats.org/presentationml/2006/main">
   <p:cSld>
     <p:spTree>
       <p:nvGrpSpPr>
@@ -8385,7 +8629,14 @@
         <p:cNvGrpSpPr/>
         <p:nvPr/>
       </p:nvGrpSpPr>
-      <p:grpSpPr/>
+      <p:grpSpPr>
+        <a:xfrm>
+          <a:off x="0" y="0"/>
+          <a:ext cx="0" cy="0"/>
+          <a:chOff x="0" y="0"/>
+          <a:chExt cx="0" cy="0"/>
+        </a:xfrm>
+      </p:grpSpPr>
       <p:sp>
         <p:nvSpPr>
           <p:cNvPr id="2" name="Rectangle 1"/>
@@ -8427,6 +8678,7 @@
           <a:lstStyle/>
           <a:p>
             <a:pPr algn="ctr"/>
+            <a:endParaRPr/>
           </a:p>
         </p:txBody>
       </p:sp>
@@ -8467,7 +8719,7 @@
                 </a:solidFill>
                 <a:latin typeface="Calibri"/>
               </a:rPr>
-              <a:t>REFLECTION</a:t>
+              <a:t>NEXT ROUND (V2)</a:t>
             </a:r>
           </a:p>
         </p:txBody>
@@ -8509,21 +8761,157 @@
                 </a:solidFill>
                 <a:latin typeface="Cambria"/>
               </a:rPr>
-              <a:t>What we learned</a:t>
-            </a:r>
-          </a:p>
-        </p:txBody>
-      </p:sp>
-      <p:sp>
-        <p:nvSpPr>
-          <p:cNvPr id="5" name="TextBox 4"/>
+              <a:t>Let the failures decide the data</a:t>
+            </a:r>
+          </a:p>
+        </p:txBody>
+      </p:sp>
+      <p:sp>
+        <p:nvSpPr>
+          <p:cNvPr id="5" name="Rounded Rectangle 4"/>
+          <p:cNvSpPr/>
+          <p:nvPr/>
+        </p:nvSpPr>
+        <p:spPr>
+          <a:xfrm>
+            <a:off x="640080" y="1965960"/>
+            <a:ext cx="10881360" cy="1005840"/>
+          </a:xfrm>
+          <a:prstGeom prst="roundRect">
+            <a:avLst>
+              <a:gd name="adj" fmla="val 10000"/>
+            </a:avLst>
+          </a:prstGeom>
+          <a:solidFill>
+            <a:srgbClr val="F1E4D6"/>
+          </a:solidFill>
+          <a:ln>
+            <a:noFill/>
+          </a:ln>
+          <a:effectLst/>
+        </p:spPr>
+        <p:style>
+          <a:lnRef idx="1">
+            <a:schemeClr val="accent1"/>
+          </a:lnRef>
+          <a:fillRef idx="3">
+            <a:schemeClr val="accent1"/>
+          </a:fillRef>
+          <a:effectRef idx="2">
+            <a:schemeClr val="accent1"/>
+          </a:effectRef>
+          <a:fontRef idx="minor">
+            <a:schemeClr val="lt1"/>
+          </a:fontRef>
+        </p:style>
+        <p:txBody>
+          <a:bodyPr rtlCol="0" anchor="ctr"/>
+          <a:lstStyle/>
+          <a:p>
+            <a:pPr algn="ctr"/>
+            <a:endParaRPr/>
+          </a:p>
+        </p:txBody>
+      </p:sp>
+      <p:sp>
+        <p:nvSpPr>
+          <p:cNvPr id="6" name="Rounded Rectangle 5"/>
+          <p:cNvSpPr/>
+          <p:nvPr/>
+        </p:nvSpPr>
+        <p:spPr>
+          <a:xfrm>
+            <a:off x="822960" y="2167128"/>
+            <a:ext cx="603504" cy="603504"/>
+          </a:xfrm>
+          <a:prstGeom prst="roundRect">
+            <a:avLst>
+              <a:gd name="adj" fmla="val 50000"/>
+            </a:avLst>
+          </a:prstGeom>
+          <a:solidFill>
+            <a:srgbClr val="D2922B"/>
+          </a:solidFill>
+          <a:ln>
+            <a:noFill/>
+          </a:ln>
+          <a:effectLst/>
+        </p:spPr>
+        <p:style>
+          <a:lnRef idx="1">
+            <a:schemeClr val="accent1"/>
+          </a:lnRef>
+          <a:fillRef idx="3">
+            <a:schemeClr val="accent1"/>
+          </a:fillRef>
+          <a:effectRef idx="2">
+            <a:schemeClr val="accent1"/>
+          </a:effectRef>
+          <a:fontRef idx="minor">
+            <a:schemeClr val="lt1"/>
+          </a:fontRef>
+        </p:style>
+        <p:txBody>
+          <a:bodyPr rtlCol="0" anchor="ctr"/>
+          <a:lstStyle/>
+          <a:p>
+            <a:pPr algn="ctr"/>
+            <a:endParaRPr/>
+          </a:p>
+        </p:txBody>
+      </p:sp>
+      <p:sp>
+        <p:nvSpPr>
+          <p:cNvPr id="7" name="TextBox 6"/>
           <p:cNvSpPr txBox="1"/>
           <p:nvPr/>
         </p:nvSpPr>
         <p:spPr>
           <a:xfrm>
-            <a:off x="640080" y="1783080"/>
-            <a:ext cx="5440680" cy="1078992"/>
+            <a:off x="822960" y="2185415"/>
+            <a:ext cx="603504" cy="566928"/>
+          </a:xfrm>
+          <a:prstGeom prst="rect">
+            <a:avLst/>
+          </a:prstGeom>
+          <a:noFill/>
+        </p:spPr>
+        <p:txBody>
+          <a:bodyPr wrap="square" anchor="ctr">
+            <a:spAutoFit/>
+          </a:bodyPr>
+          <a:lstStyle/>
+          <a:p>
+            <a:pPr algn="ctr">
+              <a:lnSpc>
+                <a:spcPct val="100000"/>
+              </a:lnSpc>
+              <a:spcAft>
+                <a:spcPts val="600"/>
+              </a:spcAft>
+            </a:pPr>
+            <a:r>
+              <a:rPr sz="2200" b="1" i="0">
+                <a:solidFill>
+                  <a:srgbClr val="FFFFFF"/>
+                </a:solidFill>
+                <a:latin typeface="Cambria"/>
+              </a:rPr>
+              <a:t>1</a:t>
+            </a:r>
+          </a:p>
+        </p:txBody>
+      </p:sp>
+      <p:sp>
+        <p:nvSpPr>
+          <p:cNvPr id="8" name="TextBox 7"/>
+          <p:cNvSpPr txBox="1"/>
+          <p:nvPr/>
+        </p:nvSpPr>
+        <p:spPr>
+          <a:xfrm>
+            <a:off x="1645920" y="2084831"/>
+            <a:ext cx="9601200" cy="457200"/>
           </a:xfrm>
           <a:prstGeom prst="rect">
             <a:avLst/>
@@ -8538,53 +8926,34 @@
           <a:p>
             <a:pPr algn="l">
               <a:lnSpc>
-                <a:spcPct val="108000"/>
-              </a:lnSpc>
-              <a:spcAft>
-                <a:spcPts val="300"/>
-              </a:spcAft>
-            </a:pPr>
-            <a:r>
-              <a:rPr sz="1350" b="1" i="0">
+                <a:spcPct val="100000"/>
+              </a:lnSpc>
+              <a:spcAft>
+                <a:spcPts val="600"/>
+              </a:spcAft>
+            </a:pPr>
+            <a:r>
+              <a:rPr sz="1800" b="1" i="0">
                 <a:solidFill>
                   <a:srgbClr val="5A1E1B"/>
                 </a:solidFill>
                 <a:latin typeface="Cambria"/>
               </a:rPr>
-              <a:t>Easiest class?</a:t>
-            </a:r>
-          </a:p>
-          <a:p>
-            <a:pPr algn="l">
-              <a:lnSpc>
-                <a:spcPct val="108000"/>
-              </a:lnSpc>
-              <a:spcAft>
-                <a:spcPts val="300"/>
-              </a:spcAft>
-            </a:pPr>
-            <a:r>
-              <a:rPr sz="1200" b="0" i="0">
-                <a:solidFill>
-                  <a:srgbClr val="2B2320"/>
-                </a:solidFill>
-                <a:latin typeface="Calibri"/>
-              </a:rPr>
-              <a:t>Harees / Halwa / Machboos — bold colour, single clear portion (mAP@50-95 ≈ 0.99).</a:t>
-            </a:r>
-          </a:p>
-        </p:txBody>
-      </p:sp>
-      <p:sp>
-        <p:nvSpPr>
-          <p:cNvPr id="6" name="TextBox 5"/>
+              <a:t>Crowded / multi-item plates</a:t>
+            </a:r>
+          </a:p>
+        </p:txBody>
+      </p:sp>
+      <p:sp>
+        <p:nvSpPr>
+          <p:cNvPr id="9" name="TextBox 8"/>
           <p:cNvSpPr txBox="1"/>
           <p:nvPr/>
         </p:nvSpPr>
         <p:spPr>
           <a:xfrm>
-            <a:off x="640080" y="2953512"/>
-            <a:ext cx="5440680" cy="1078992"/>
+            <a:off x="1645920" y="2496312"/>
+            <a:ext cx="9601200" cy="411480"/>
           </a:xfrm>
           <a:prstGeom prst="rect">
             <a:avLst/>
@@ -8599,53 +8968,170 @@
           <a:p>
             <a:pPr algn="l">
               <a:lnSpc>
-                <a:spcPct val="108000"/>
-              </a:lnSpc>
-              <a:spcAft>
-                <a:spcPts val="300"/>
-              </a:spcAft>
-            </a:pPr>
-            <a:r>
-              <a:rPr sz="1350" b="1" i="0">
-                <a:solidFill>
-                  <a:srgbClr val="5A1E1B"/>
+                <a:spcPct val="100000"/>
+              </a:lnSpc>
+              <a:spcAft>
+                <a:spcPts val="600"/>
+              </a:spcAft>
+            </a:pPr>
+            <a:r>
+              <a:rPr sz="1450" b="0" i="0">
+                <a:solidFill>
+                  <a:srgbClr val="2B2320"/>
+                </a:solidFill>
+                <a:latin typeface="Calibri"/>
+              </a:rPr>
+              <a:t>fixes the missed pieces (the #1 failure)</a:t>
+            </a:r>
+          </a:p>
+        </p:txBody>
+      </p:sp>
+      <p:sp>
+        <p:nvSpPr>
+          <p:cNvPr id="10" name="Rounded Rectangle 9"/>
+          <p:cNvSpPr/>
+          <p:nvPr/>
+        </p:nvSpPr>
+        <p:spPr>
+          <a:xfrm>
+            <a:off x="640080" y="3136391"/>
+            <a:ext cx="10881360" cy="1005840"/>
+          </a:xfrm>
+          <a:prstGeom prst="roundRect">
+            <a:avLst>
+              <a:gd name="adj" fmla="val 10000"/>
+            </a:avLst>
+          </a:prstGeom>
+          <a:solidFill>
+            <a:srgbClr val="F1E4D6"/>
+          </a:solidFill>
+          <a:ln>
+            <a:noFill/>
+          </a:ln>
+          <a:effectLst/>
+        </p:spPr>
+        <p:style>
+          <a:lnRef idx="1">
+            <a:schemeClr val="accent1"/>
+          </a:lnRef>
+          <a:fillRef idx="3">
+            <a:schemeClr val="accent1"/>
+          </a:fillRef>
+          <a:effectRef idx="2">
+            <a:schemeClr val="accent1"/>
+          </a:effectRef>
+          <a:fontRef idx="minor">
+            <a:schemeClr val="lt1"/>
+          </a:fontRef>
+        </p:style>
+        <p:txBody>
+          <a:bodyPr rtlCol="0" anchor="ctr"/>
+          <a:lstStyle/>
+          <a:p>
+            <a:pPr algn="ctr"/>
+            <a:endParaRPr/>
+          </a:p>
+        </p:txBody>
+      </p:sp>
+      <p:sp>
+        <p:nvSpPr>
+          <p:cNvPr id="11" name="Rounded Rectangle 10"/>
+          <p:cNvSpPr/>
+          <p:nvPr/>
+        </p:nvSpPr>
+        <p:spPr>
+          <a:xfrm>
+            <a:off x="822960" y="3337560"/>
+            <a:ext cx="603504" cy="603504"/>
+          </a:xfrm>
+          <a:prstGeom prst="roundRect">
+            <a:avLst>
+              <a:gd name="adj" fmla="val 50000"/>
+            </a:avLst>
+          </a:prstGeom>
+          <a:solidFill>
+            <a:srgbClr val="D2922B"/>
+          </a:solidFill>
+          <a:ln>
+            <a:noFill/>
+          </a:ln>
+          <a:effectLst/>
+        </p:spPr>
+        <p:style>
+          <a:lnRef idx="1">
+            <a:schemeClr val="accent1"/>
+          </a:lnRef>
+          <a:fillRef idx="3">
+            <a:schemeClr val="accent1"/>
+          </a:fillRef>
+          <a:effectRef idx="2">
+            <a:schemeClr val="accent1"/>
+          </a:effectRef>
+          <a:fontRef idx="minor">
+            <a:schemeClr val="lt1"/>
+          </a:fontRef>
+        </p:style>
+        <p:txBody>
+          <a:bodyPr rtlCol="0" anchor="ctr"/>
+          <a:lstStyle/>
+          <a:p>
+            <a:pPr algn="ctr"/>
+            <a:endParaRPr/>
+          </a:p>
+        </p:txBody>
+      </p:sp>
+      <p:sp>
+        <p:nvSpPr>
+          <p:cNvPr id="12" name="TextBox 11"/>
+          <p:cNvSpPr txBox="1"/>
+          <p:nvPr/>
+        </p:nvSpPr>
+        <p:spPr>
+          <a:xfrm>
+            <a:off x="822960" y="3355848"/>
+            <a:ext cx="603504" cy="566928"/>
+          </a:xfrm>
+          <a:prstGeom prst="rect">
+            <a:avLst/>
+          </a:prstGeom>
+          <a:noFill/>
+        </p:spPr>
+        <p:txBody>
+          <a:bodyPr wrap="square" anchor="ctr">
+            <a:spAutoFit/>
+          </a:bodyPr>
+          <a:lstStyle/>
+          <a:p>
+            <a:pPr algn="ctr">
+              <a:lnSpc>
+                <a:spcPct val="100000"/>
+              </a:lnSpc>
+              <a:spcAft>
+                <a:spcPts val="600"/>
+              </a:spcAft>
+            </a:pPr>
+            <a:r>
+              <a:rPr sz="2200" b="1" i="0">
+                <a:solidFill>
+                  <a:srgbClr val="FFFFFF"/>
                 </a:solidFill>
                 <a:latin typeface="Cambria"/>
               </a:rPr>
-              <a:t>Hardest class?</a:t>
-            </a:r>
-          </a:p>
-          <a:p>
-            <a:pPr algn="l">
-              <a:lnSpc>
-                <a:spcPct val="108000"/>
-              </a:lnSpc>
-              <a:spcAft>
-                <a:spcPts val="300"/>
-              </a:spcAft>
-            </a:pPr>
-            <a:r>
-              <a:rPr sz="1200" b="0" i="0">
-                <a:solidFill>
-                  <a:srgbClr val="2B2320"/>
-                </a:solidFill>
-                <a:latin typeface="Calibri"/>
-              </a:rPr>
-              <a:t>Kebab — varied shapes, often several pieces, resembles other grilled meat (mAP@50 0.70).</a:t>
-            </a:r>
-          </a:p>
-        </p:txBody>
-      </p:sp>
-      <p:sp>
-        <p:nvSpPr>
-          <p:cNvPr id="7" name="TextBox 6"/>
+              <a:t>2</a:t>
+            </a:r>
+          </a:p>
+        </p:txBody>
+      </p:sp>
+      <p:sp>
+        <p:nvSpPr>
+          <p:cNvPr id="13" name="TextBox 12"/>
           <p:cNvSpPr txBox="1"/>
           <p:nvPr/>
         </p:nvSpPr>
         <p:spPr>
           <a:xfrm>
-            <a:off x="640080" y="4123944"/>
-            <a:ext cx="5440680" cy="1078992"/>
+            <a:off x="1645920" y="3255263"/>
+            <a:ext cx="9601200" cy="457200"/>
           </a:xfrm>
           <a:prstGeom prst="rect">
             <a:avLst/>
@@ -8660,53 +9146,34 @@
           <a:p>
             <a:pPr algn="l">
               <a:lnSpc>
-                <a:spcPct val="108000"/>
-              </a:lnSpc>
-              <a:spcAft>
-                <a:spcPts val="300"/>
-              </a:spcAft>
-            </a:pPr>
-            <a:r>
-              <a:rPr sz="1350" b="1" i="0">
+                <a:spcPct val="100000"/>
+              </a:lnSpc>
+              <a:spcAft>
+                <a:spcPts val="600"/>
+              </a:spcAft>
+            </a:pPr>
+            <a:r>
+              <a:rPr sz="1800" b="1" i="0">
                 <a:solidFill>
                   <a:srgbClr val="5A1E1B"/>
                 </a:solidFill>
                 <a:latin typeface="Cambria"/>
               </a:rPr>
-              <a:t>Did more images always help?</a:t>
-            </a:r>
-          </a:p>
-          <a:p>
-            <a:pPr algn="l">
-              <a:lnSpc>
-                <a:spcPct val="108000"/>
-              </a:lnSpc>
-              <a:spcAft>
-                <a:spcPts val="300"/>
-              </a:spcAft>
-            </a:pPr>
-            <a:r>
-              <a:rPr sz="1200" b="0" i="0">
-                <a:solidFill>
-                  <a:srgbClr val="2B2320"/>
-                </a:solidFill>
-                <a:latin typeface="Calibri"/>
-              </a:rPr>
-              <a:t>To be measured in the v2 round — diverse data matters more than sheer count.</a:t>
-            </a:r>
-          </a:p>
-        </p:txBody>
-      </p:sp>
-      <p:sp>
-        <p:nvSpPr>
-          <p:cNvPr id="8" name="TextBox 7"/>
+              <a:t>More Nakhi &amp; Luqaimat</a:t>
+            </a:r>
+          </a:p>
+        </p:txBody>
+      </p:sp>
+      <p:sp>
+        <p:nvSpPr>
+          <p:cNvPr id="14" name="TextBox 13"/>
           <p:cNvSpPr txBox="1"/>
           <p:nvPr/>
         </p:nvSpPr>
         <p:spPr>
           <a:xfrm>
-            <a:off x="640080" y="5294376"/>
-            <a:ext cx="5440680" cy="1078992"/>
+            <a:off x="1645920" y="3666744"/>
+            <a:ext cx="9601200" cy="411480"/>
           </a:xfrm>
           <a:prstGeom prst="rect">
             <a:avLst/>
@@ -8721,53 +9188,170 @@
           <a:p>
             <a:pPr algn="l">
               <a:lnSpc>
-                <a:spcPct val="108000"/>
-              </a:lnSpc>
-              <a:spcAft>
-                <a:spcPts val="300"/>
-              </a:spcAft>
-            </a:pPr>
-            <a:r>
-              <a:rPr sz="1350" b="1" i="0">
-                <a:solidFill>
-                  <a:srgbClr val="5A1E1B"/>
+                <a:spcPct val="100000"/>
+              </a:lnSpc>
+              <a:spcAft>
+                <a:spcPts val="600"/>
+              </a:spcAft>
+            </a:pPr>
+            <a:r>
+              <a:rPr sz="1450" b="0" i="0">
+                <a:solidFill>
+                  <a:srgbClr val="2B2320"/>
+                </a:solidFill>
+                <a:latin typeface="Calibri"/>
+              </a:rPr>
+              <a:t>clearer, balanced examples to end the mix-ups</a:t>
+            </a:r>
+          </a:p>
+        </p:txBody>
+      </p:sp>
+      <p:sp>
+        <p:nvSpPr>
+          <p:cNvPr id="15" name="Rounded Rectangle 14"/>
+          <p:cNvSpPr/>
+          <p:nvPr/>
+        </p:nvSpPr>
+        <p:spPr>
+          <a:xfrm>
+            <a:off x="640080" y="4306824"/>
+            <a:ext cx="10881360" cy="1005840"/>
+          </a:xfrm>
+          <a:prstGeom prst="roundRect">
+            <a:avLst>
+              <a:gd name="adj" fmla="val 10000"/>
+            </a:avLst>
+          </a:prstGeom>
+          <a:solidFill>
+            <a:srgbClr val="F1E4D6"/>
+          </a:solidFill>
+          <a:ln>
+            <a:noFill/>
+          </a:ln>
+          <a:effectLst/>
+        </p:spPr>
+        <p:style>
+          <a:lnRef idx="1">
+            <a:schemeClr val="accent1"/>
+          </a:lnRef>
+          <a:fillRef idx="3">
+            <a:schemeClr val="accent1"/>
+          </a:fillRef>
+          <a:effectRef idx="2">
+            <a:schemeClr val="accent1"/>
+          </a:effectRef>
+          <a:fontRef idx="minor">
+            <a:schemeClr val="lt1"/>
+          </a:fontRef>
+        </p:style>
+        <p:txBody>
+          <a:bodyPr rtlCol="0" anchor="ctr"/>
+          <a:lstStyle/>
+          <a:p>
+            <a:pPr algn="ctr"/>
+            <a:endParaRPr/>
+          </a:p>
+        </p:txBody>
+      </p:sp>
+      <p:sp>
+        <p:nvSpPr>
+          <p:cNvPr id="16" name="Rounded Rectangle 15"/>
+          <p:cNvSpPr/>
+          <p:nvPr/>
+        </p:nvSpPr>
+        <p:spPr>
+          <a:xfrm>
+            <a:off x="822960" y="4507992"/>
+            <a:ext cx="603504" cy="603504"/>
+          </a:xfrm>
+          <a:prstGeom prst="roundRect">
+            <a:avLst>
+              <a:gd name="adj" fmla="val 50000"/>
+            </a:avLst>
+          </a:prstGeom>
+          <a:solidFill>
+            <a:srgbClr val="D2922B"/>
+          </a:solidFill>
+          <a:ln>
+            <a:noFill/>
+          </a:ln>
+          <a:effectLst/>
+        </p:spPr>
+        <p:style>
+          <a:lnRef idx="1">
+            <a:schemeClr val="accent1"/>
+          </a:lnRef>
+          <a:fillRef idx="3">
+            <a:schemeClr val="accent1"/>
+          </a:fillRef>
+          <a:effectRef idx="2">
+            <a:schemeClr val="accent1"/>
+          </a:effectRef>
+          <a:fontRef idx="minor">
+            <a:schemeClr val="lt1"/>
+          </a:fontRef>
+        </p:style>
+        <p:txBody>
+          <a:bodyPr rtlCol="0" anchor="ctr"/>
+          <a:lstStyle/>
+          <a:p>
+            <a:pPr algn="ctr"/>
+            <a:endParaRPr/>
+          </a:p>
+        </p:txBody>
+      </p:sp>
+      <p:sp>
+        <p:nvSpPr>
+          <p:cNvPr id="17" name="TextBox 16"/>
+          <p:cNvSpPr txBox="1"/>
+          <p:nvPr/>
+        </p:nvSpPr>
+        <p:spPr>
+          <a:xfrm>
+            <a:off x="822960" y="4526280"/>
+            <a:ext cx="603504" cy="566928"/>
+          </a:xfrm>
+          <a:prstGeom prst="rect">
+            <a:avLst/>
+          </a:prstGeom>
+          <a:noFill/>
+        </p:spPr>
+        <p:txBody>
+          <a:bodyPr wrap="square" anchor="ctr">
+            <a:spAutoFit/>
+          </a:bodyPr>
+          <a:lstStyle/>
+          <a:p>
+            <a:pPr algn="ctr">
+              <a:lnSpc>
+                <a:spcPct val="100000"/>
+              </a:lnSpc>
+              <a:spcAft>
+                <a:spcPts val="600"/>
+              </a:spcAft>
+            </a:pPr>
+            <a:r>
+              <a:rPr sz="2200" b="1" i="0">
+                <a:solidFill>
+                  <a:srgbClr val="FFFFFF"/>
                 </a:solidFill>
                 <a:latin typeface="Cambria"/>
               </a:rPr>
-              <a:t>Most useful variation?</a:t>
-            </a:r>
-          </a:p>
-          <a:p>
-            <a:pPr algn="l">
-              <a:lnSpc>
-                <a:spcPct val="108000"/>
-              </a:lnSpc>
-              <a:spcAft>
-                <a:spcPts val="300"/>
-              </a:spcAft>
-            </a:pPr>
-            <a:r>
-              <a:rPr sz="1200" b="0" i="0">
-                <a:solidFill>
-                  <a:srgbClr val="2B2320"/>
-                </a:solidFill>
-                <a:latin typeface="Calibri"/>
-              </a:rPr>
-              <a:t>Varied plates, angles &amp; lighting — the model reaches 0.91 recall on unseen photos.</a:t>
-            </a:r>
-          </a:p>
-        </p:txBody>
-      </p:sp>
-      <p:sp>
-        <p:nvSpPr>
-          <p:cNvPr id="9" name="TextBox 8"/>
+              <a:t>3</a:t>
+            </a:r>
+          </a:p>
+        </p:txBody>
+      </p:sp>
+      <p:sp>
+        <p:nvSpPr>
+          <p:cNvPr id="18" name="TextBox 17"/>
           <p:cNvSpPr txBox="1"/>
           <p:nvPr/>
         </p:nvSpPr>
         <p:spPr>
           <a:xfrm>
-            <a:off x="6172200" y="1783080"/>
-            <a:ext cx="5440680" cy="1078992"/>
+            <a:off x="1645920" y="4425696"/>
+            <a:ext cx="9601200" cy="457200"/>
           </a:xfrm>
           <a:prstGeom prst="rect">
             <a:avLst/>
@@ -8782,53 +9366,34 @@
           <a:p>
             <a:pPr algn="l">
               <a:lnSpc>
-                <a:spcPct val="108000"/>
-              </a:lnSpc>
-              <a:spcAft>
-                <a:spcPts val="300"/>
-              </a:spcAft>
-            </a:pPr>
-            <a:r>
-              <a:rPr sz="1350" b="1" i="0">
+                <a:spcPct val="100000"/>
+              </a:lnSpc>
+              <a:spcAft>
+                <a:spcPts val="600"/>
+              </a:spcAft>
+            </a:pPr>
+            <a:r>
+              <a:rPr sz="1800" b="1" i="0">
                 <a:solidFill>
                   <a:srgbClr val="5A1E1B"/>
                 </a:solidFill>
                 <a:latin typeface="Cambria"/>
               </a:rPr>
-              <a:t>Most common failure mode?</a:t>
-            </a:r>
-          </a:p>
-          <a:p>
-            <a:pPr algn="l">
-              <a:lnSpc>
-                <a:spcPct val="108000"/>
-              </a:lnSpc>
-              <a:spcAft>
-                <a:spcPts val="300"/>
-              </a:spcAft>
-            </a:pPr>
-            <a:r>
-              <a:rPr sz="1200" b="0" i="0">
-                <a:solidFill>
-                  <a:srgbClr val="2B2320"/>
-                </a:solidFill>
-                <a:latin typeface="Calibri"/>
-              </a:rPr>
-              <a:t>False negatives — missing extra pieces on crowded, multi-item plates.</a:t>
-            </a:r>
-          </a:p>
-        </p:txBody>
-      </p:sp>
-      <p:sp>
-        <p:nvSpPr>
-          <p:cNvPr id="10" name="TextBox 9"/>
+              <a:t>More Kebab variety</a:t>
+            </a:r>
+          </a:p>
+        </p:txBody>
+      </p:sp>
+      <p:sp>
+        <p:nvSpPr>
+          <p:cNvPr id="19" name="TextBox 18"/>
           <p:cNvSpPr txBox="1"/>
           <p:nvPr/>
         </p:nvSpPr>
         <p:spPr>
           <a:xfrm>
-            <a:off x="6172200" y="2953512"/>
-            <a:ext cx="5440680" cy="1078992"/>
+            <a:off x="1645920" y="4837176"/>
+            <a:ext cx="9601200" cy="411480"/>
           </a:xfrm>
           <a:prstGeom prst="rect">
             <a:avLst/>
@@ -8843,53 +9408,34 @@
           <a:p>
             <a:pPr algn="l">
               <a:lnSpc>
-                <a:spcPct val="108000"/>
-              </a:lnSpc>
-              <a:spcAft>
-                <a:spcPts val="300"/>
-              </a:spcAft>
-            </a:pPr>
-            <a:r>
-              <a:rPr sz="1350" b="1" i="0">
-                <a:solidFill>
-                  <a:srgbClr val="5A1E1B"/>
-                </a:solidFill>
-                <a:latin typeface="Cambria"/>
-              </a:rPr>
-              <a:t>Overfit to a plate / camera?</a:t>
-            </a:r>
-          </a:p>
-          <a:p>
-            <a:pPr algn="l">
-              <a:lnSpc>
-                <a:spcPct val="108000"/>
-              </a:lnSpc>
-              <a:spcAft>
-                <a:spcPts val="300"/>
-              </a:spcAft>
-            </a:pPr>
-            <a:r>
-              <a:rPr sz="1200" b="0" i="0">
+                <a:spcPct val="100000"/>
+              </a:lnSpc>
+              <a:spcAft>
+                <a:spcPts val="600"/>
+              </a:spcAft>
+            </a:pPr>
+            <a:r>
+              <a:rPr sz="1450" b="0" i="0">
                 <a:solidFill>
                   <a:srgbClr val="2B2320"/>
                 </a:solidFill>
                 <a:latin typeface="Calibri"/>
               </a:rPr>
-              <a:t>No severe overfit — strong unseen-test scores; watch classes from similar screenshots.</a:t>
-            </a:r>
-          </a:p>
-        </p:txBody>
-      </p:sp>
-      <p:sp>
-        <p:nvSpPr>
-          <p:cNvPr id="11" name="TextBox 10"/>
+              <a:t>different shapes &amp; servings to tighten its boxes</a:t>
+            </a:r>
+          </a:p>
+        </p:txBody>
+      </p:sp>
+      <p:sp>
+        <p:nvSpPr>
+          <p:cNvPr id="20" name="TextBox 19"/>
           <p:cNvSpPr txBox="1"/>
           <p:nvPr/>
         </p:nvSpPr>
         <p:spPr>
           <a:xfrm>
-            <a:off x="6172200" y="4123944"/>
-            <a:ext cx="5440680" cy="1078992"/>
+            <a:off x="640080" y="5806440"/>
+            <a:ext cx="10972800" cy="457200"/>
           </a:xfrm>
           <a:prstGeom prst="rect">
             <a:avLst/>
@@ -8904,53 +9450,34 @@
           <a:p>
             <a:pPr algn="l">
               <a:lnSpc>
-                <a:spcPct val="108000"/>
-              </a:lnSpc>
-              <a:spcAft>
-                <a:spcPts val="300"/>
-              </a:spcAft>
-            </a:pPr>
-            <a:r>
-              <a:rPr sz="1350" b="1" i="0">
-                <a:solidFill>
-                  <a:srgbClr val="5A1E1B"/>
-                </a:solidFill>
-                <a:latin typeface="Cambria"/>
-              </a:rPr>
-              <a:t>One more day of data?</a:t>
-            </a:r>
-          </a:p>
-          <a:p>
-            <a:pPr algn="l">
-              <a:lnSpc>
-                <a:spcPct val="108000"/>
-              </a:lnSpc>
-              <a:spcAft>
-                <a:spcPts val="300"/>
-              </a:spcAft>
-            </a:pPr>
-            <a:r>
-              <a:rPr sz="1200" b="0" i="0">
+                <a:spcPct val="100000"/>
+              </a:lnSpc>
+              <a:spcAft>
+                <a:spcPts val="600"/>
+              </a:spcAft>
+            </a:pPr>
+            <a:r>
+              <a:rPr sz="1500" b="1" i="0">
                 <a:solidFill>
                   <a:srgbClr val="2B2320"/>
                 </a:solidFill>
                 <a:latin typeface="Calibri"/>
               </a:rPr>
-              <a:t>Crowded plates, more Nakhi &amp; Luqaimat, and more Kebab variety.</a:t>
-            </a:r>
-          </a:p>
-        </p:txBody>
-      </p:sp>
-      <p:sp>
-        <p:nvSpPr>
-          <p:cNvPr id="12" name="TextBox 11"/>
+              <a:t>Then: re-label as Roboflow v2  →  retrain  →  compare v1 vs v2.</a:t>
+            </a:r>
+          </a:p>
+        </p:txBody>
+      </p:sp>
+      <p:sp>
+        <p:nvSpPr>
+          <p:cNvPr id="21" name="TextBox 20"/>
           <p:cNvSpPr txBox="1"/>
           <p:nvPr/>
         </p:nvSpPr>
         <p:spPr>
           <a:xfrm>
-            <a:off x="6172200" y="5294376"/>
-            <a:ext cx="5440680" cy="1078992"/>
+            <a:off x="640080" y="6199632"/>
+            <a:ext cx="10972800" cy="365760"/>
           </a:xfrm>
           <a:prstGeom prst="rect">
             <a:avLst/>
@@ -8965,39 +9492,20 @@
           <a:p>
             <a:pPr algn="l">
               <a:lnSpc>
-                <a:spcPct val="108000"/>
-              </a:lnSpc>
-              <a:spcAft>
-                <a:spcPts val="300"/>
-              </a:spcAft>
-            </a:pPr>
-            <a:r>
-              <a:rPr sz="1350" b="1" i="0">
-                <a:solidFill>
-                  <a:srgbClr val="5A1E1B"/>
-                </a:solidFill>
-                <a:latin typeface="Cambria"/>
-              </a:rPr>
-              <a:t>Before real deployment?</a:t>
-            </a:r>
-          </a:p>
-          <a:p>
-            <a:pPr algn="l">
-              <a:lnSpc>
-                <a:spcPct val="108000"/>
-              </a:lnSpc>
-              <a:spcAft>
-                <a:spcPts val="300"/>
-              </a:spcAft>
-            </a:pPr>
-            <a:r>
-              <a:rPr sz="1200" b="0" i="0">
-                <a:solidFill>
-                  <a:srgbClr val="2B2320"/>
+                <a:spcPct val="100000"/>
+              </a:lnSpc>
+              <a:spcAft>
+                <a:spcPts val="600"/>
+              </a:spcAft>
+            </a:pPr>
+            <a:r>
+              <a:rPr sz="1200" b="0" i="1">
+                <a:solidFill>
+                  <a:srgbClr val="8A7E76"/>
                 </a:solidFill>
                 <a:latin typeface="Calibri"/>
               </a:rPr>
-              <a:t>More real-world phones &amp; lighting, tune the confidence threshold, add a user-feedback loop.</a:t>
+              <a:t>v1 is complete; this targeted second collection is the next step.</a:t>
             </a:r>
           </a:p>
         </p:txBody>
@@ -9011,7 +9519,7 @@
 </file>
 
 <file path=ppt/slides/slide9.xml><?xml version="1.0" encoding="utf-8"?>
-<p:sld xmlns:a="http://schemas.openxmlformats.org/drawingml/2006/main" xmlns:p="http://schemas.openxmlformats.org/presentationml/2006/main" xmlns:r="http://schemas.openxmlformats.org/officeDocument/2006/relationships">
+<p:sld xmlns:a="http://schemas.openxmlformats.org/drawingml/2006/main" xmlns:r="http://schemas.openxmlformats.org/officeDocument/2006/relationships" xmlns:p="http://schemas.openxmlformats.org/presentationml/2006/main">
   <p:cSld>
     <p:spTree>
       <p:nvGrpSpPr>
@@ -9019,7 +9527,14 @@
         <p:cNvGrpSpPr/>
         <p:nvPr/>
       </p:nvGrpSpPr>
-      <p:grpSpPr/>
+      <p:grpSpPr>
+        <a:xfrm>
+          <a:off x="0" y="0"/>
+          <a:ext cx="0" cy="0"/>
+          <a:chOff x="0" y="0"/>
+          <a:chExt cx="0" cy="0"/>
+        </a:xfrm>
+      </p:grpSpPr>
       <p:sp>
         <p:nvSpPr>
           <p:cNvPr id="2" name="Rectangle 1"/>
@@ -9035,7 +9550,7 @@
             <a:avLst/>
           </a:prstGeom>
           <a:solidFill>
-            <a:srgbClr val="5A1E1B"/>
+            <a:srgbClr val="FBF6EF"/>
           </a:solidFill>
           <a:ln>
             <a:noFill/>
@@ -9061,6 +9576,7 @@
           <a:lstStyle/>
           <a:p>
             <a:pPr algn="ctr"/>
+            <a:endParaRPr/>
           </a:p>
         </p:txBody>
       </p:sp>
@@ -9072,8 +9588,8 @@
         </p:nvSpPr>
         <p:spPr>
           <a:xfrm>
-            <a:off x="822960" y="640080"/>
-            <a:ext cx="10515600" cy="822960"/>
+            <a:off x="640080" y="457200"/>
+            <a:ext cx="10972800" cy="365760"/>
           </a:xfrm>
           <a:prstGeom prst="rect">
             <a:avLst/>
@@ -9095,73 +9611,27 @@
               </a:spcAft>
             </a:pPr>
             <a:r>
-              <a:rPr sz="3800" b="1" i="0">
-                <a:solidFill>
-                  <a:srgbClr val="FBF6EF"/>
-                </a:solidFill>
-                <a:latin typeface="Cambria"/>
-              </a:rPr>
-              <a:t>Demo &amp; takeaways</a:t>
-            </a:r>
-          </a:p>
-        </p:txBody>
-      </p:sp>
-      <p:sp>
-        <p:nvSpPr>
-          <p:cNvPr id="4" name="Rounded Rectangle 3"/>
-          <p:cNvSpPr/>
-          <p:nvPr/>
-        </p:nvSpPr>
-        <p:spPr>
-          <a:xfrm>
-            <a:off x="868680" y="1554480"/>
-            <a:ext cx="3291840" cy="27432"/>
-          </a:xfrm>
-          <a:prstGeom prst="roundRect">
-            <a:avLst>
-              <a:gd name="adj" fmla="val 10000"/>
-            </a:avLst>
-          </a:prstGeom>
-          <a:solidFill>
-            <a:srgbClr val="D2922B"/>
-          </a:solidFill>
-          <a:ln>
-            <a:noFill/>
-          </a:ln>
-          <a:effectLst/>
-        </p:spPr>
-        <p:style>
-          <a:lnRef idx="1">
-            <a:schemeClr val="accent1"/>
-          </a:lnRef>
-          <a:fillRef idx="3">
-            <a:schemeClr val="accent1"/>
-          </a:fillRef>
-          <a:effectRef idx="2">
-            <a:schemeClr val="accent1"/>
-          </a:effectRef>
-          <a:fontRef idx="minor">
-            <a:schemeClr val="lt1"/>
-          </a:fontRef>
-        </p:style>
-        <p:txBody>
-          <a:bodyPr rtlCol="0" anchor="ctr"/>
-          <a:lstStyle/>
-          <a:p>
-            <a:pPr algn="ctr"/>
-          </a:p>
-        </p:txBody>
-      </p:sp>
-      <p:sp>
-        <p:nvSpPr>
-          <p:cNvPr id="5" name="TextBox 4"/>
+              <a:rPr sz="1300" b="1" i="0">
+                <a:solidFill>
+                  <a:srgbClr val="B4472E"/>
+                </a:solidFill>
+                <a:latin typeface="Calibri"/>
+              </a:rPr>
+              <a:t>REFLECTION</a:t>
+            </a:r>
+          </a:p>
+        </p:txBody>
+      </p:sp>
+      <p:sp>
+        <p:nvSpPr>
+          <p:cNvPr id="4" name="TextBox 3"/>
           <p:cNvSpPr txBox="1"/>
           <p:nvPr/>
         </p:nvSpPr>
         <p:spPr>
           <a:xfrm>
-            <a:off x="822960" y="1920240"/>
-            <a:ext cx="10515600" cy="1097280"/>
+            <a:off x="640080" y="777240"/>
+            <a:ext cx="10972800" cy="822960"/>
           </a:xfrm>
           <a:prstGeom prst="rect">
             <a:avLst/>
@@ -9176,99 +9646,34 @@
           <a:p>
             <a:pPr algn="l">
               <a:lnSpc>
-                <a:spcPct val="115000"/>
+                <a:spcPct val="100000"/>
               </a:lnSpc>
               <a:spcAft>
                 <a:spcPts val="600"/>
               </a:spcAft>
             </a:pPr>
             <a:r>
-              <a:rPr sz="1800" b="0" i="0">
-                <a:solidFill>
-                  <a:srgbClr val="E7D9C7"/>
-                </a:solidFill>
-                <a:latin typeface="Calibri"/>
-              </a:rPr>
-              <a:t>Live demo:  a Streamlit web app (upload a photo) and a webcam notebook that boxes</a:t>
-            </a:r>
-          </a:p>
-          <a:p>
-            <a:pPr algn="l">
-              <a:lnSpc>
-                <a:spcPct val="115000"/>
-              </a:lnSpc>
-              <a:spcAft>
-                <a:spcPts val="600"/>
-              </a:spcAft>
-            </a:pPr>
-            <a:r>
-              <a:rPr sz="1800" b="0" i="0">
-                <a:solidFill>
-                  <a:srgbClr val="E7D9C7"/>
-                </a:solidFill>
-                <a:latin typeface="Calibri"/>
-              </a:rPr>
-              <a:t>Bahraini dishes in real time.</a:t>
-            </a:r>
-          </a:p>
-        </p:txBody>
-      </p:sp>
-      <p:sp>
-        <p:nvSpPr>
-          <p:cNvPr id="6" name="Rounded Rectangle 5"/>
-          <p:cNvSpPr/>
-          <p:nvPr/>
-        </p:nvSpPr>
-        <p:spPr>
-          <a:xfrm>
-            <a:off x="868680" y="3383280"/>
-            <a:ext cx="329184" cy="329184"/>
-          </a:xfrm>
-          <a:prstGeom prst="roundRect">
-            <a:avLst>
-              <a:gd name="adj" fmla="val 50000"/>
-            </a:avLst>
-          </a:prstGeom>
-          <a:solidFill>
-            <a:srgbClr val="D2922B"/>
-          </a:solidFill>
-          <a:ln>
-            <a:noFill/>
-          </a:ln>
-          <a:effectLst/>
-        </p:spPr>
-        <p:style>
-          <a:lnRef idx="1">
-            <a:schemeClr val="accent1"/>
-          </a:lnRef>
-          <a:fillRef idx="3">
-            <a:schemeClr val="accent1"/>
-          </a:fillRef>
-          <a:effectRef idx="2">
-            <a:schemeClr val="accent1"/>
-          </a:effectRef>
-          <a:fontRef idx="minor">
-            <a:schemeClr val="lt1"/>
-          </a:fontRef>
-        </p:style>
-        <p:txBody>
-          <a:bodyPr rtlCol="0" anchor="ctr"/>
-          <a:lstStyle/>
-          <a:p>
-            <a:pPr algn="ctr"/>
-          </a:p>
-        </p:txBody>
-      </p:sp>
-      <p:sp>
-        <p:nvSpPr>
-          <p:cNvPr id="7" name="TextBox 6"/>
+              <a:rPr sz="3400" b="1" i="0">
+                <a:solidFill>
+                  <a:srgbClr val="5A1E1B"/>
+                </a:solidFill>
+                <a:latin typeface="Cambria"/>
+              </a:rPr>
+              <a:t>What we learned</a:t>
+            </a:r>
+          </a:p>
+        </p:txBody>
+      </p:sp>
+      <p:sp>
+        <p:nvSpPr>
+          <p:cNvPr id="5" name="TextBox 4"/>
           <p:cNvSpPr txBox="1"/>
           <p:nvPr/>
         </p:nvSpPr>
         <p:spPr>
           <a:xfrm>
-            <a:off x="1417320" y="3255264"/>
-            <a:ext cx="10058400" cy="457200"/>
+            <a:off x="640080" y="1783080"/>
+            <a:ext cx="5440680" cy="1078992"/>
           </a:xfrm>
           <a:prstGeom prst="rect">
             <a:avLst/>
@@ -9283,34 +9688,53 @@
           <a:p>
             <a:pPr algn="l">
               <a:lnSpc>
-                <a:spcPct val="100000"/>
-              </a:lnSpc>
-              <a:spcAft>
-                <a:spcPts val="600"/>
-              </a:spcAft>
-            </a:pPr>
-            <a:r>
-              <a:rPr sz="1800" b="1" i="0">
-                <a:solidFill>
-                  <a:srgbClr val="FBF6EF"/>
+                <a:spcPct val="108000"/>
+              </a:lnSpc>
+              <a:spcAft>
+                <a:spcPts val="300"/>
+              </a:spcAft>
+            </a:pPr>
+            <a:r>
+              <a:rPr sz="1350" b="1" i="0">
+                <a:solidFill>
+                  <a:srgbClr val="5A1E1B"/>
                 </a:solidFill>
                 <a:latin typeface="Cambria"/>
               </a:rPr>
-              <a:t>Built the full CV pipeline</a:t>
-            </a:r>
-          </a:p>
-        </p:txBody>
-      </p:sp>
-      <p:sp>
-        <p:nvSpPr>
-          <p:cNvPr id="8" name="TextBox 7"/>
+              <a:t>Easiest class?</a:t>
+            </a:r>
+          </a:p>
+          <a:p>
+            <a:pPr algn="l">
+              <a:lnSpc>
+                <a:spcPct val="108000"/>
+              </a:lnSpc>
+              <a:spcAft>
+                <a:spcPts val="300"/>
+              </a:spcAft>
+            </a:pPr>
+            <a:r>
+              <a:rPr sz="1200" b="0" i="0">
+                <a:solidFill>
+                  <a:srgbClr val="2B2320"/>
+                </a:solidFill>
+                <a:latin typeface="Calibri"/>
+              </a:rPr>
+              <a:t>Harees / Halwa / Machboos — bold colour, single clear portion (mAP@50-95 ≈ 0.99).</a:t>
+            </a:r>
+          </a:p>
+        </p:txBody>
+      </p:sp>
+      <p:sp>
+        <p:nvSpPr>
+          <p:cNvPr id="6" name="TextBox 5"/>
           <p:cNvSpPr txBox="1"/>
           <p:nvPr/>
         </p:nvSpPr>
         <p:spPr>
           <a:xfrm>
-            <a:off x="1417320" y="3657600"/>
-            <a:ext cx="10058400" cy="411480"/>
+            <a:off x="640080" y="2953512"/>
+            <a:ext cx="5440680" cy="1078992"/>
           </a:xfrm>
           <a:prstGeom prst="rect">
             <a:avLst/>
@@ -9325,80 +9749,53 @@
           <a:p>
             <a:pPr algn="l">
               <a:lnSpc>
-                <a:spcPct val="100000"/>
-              </a:lnSpc>
-              <a:spcAft>
-                <a:spcPts val="600"/>
-              </a:spcAft>
-            </a:pPr>
-            <a:r>
-              <a:rPr sz="1450" b="0" i="0">
-                <a:solidFill>
-                  <a:srgbClr val="C9A99A"/>
+                <a:spcPct val="108000"/>
+              </a:lnSpc>
+              <a:spcAft>
+                <a:spcPts val="300"/>
+              </a:spcAft>
+            </a:pPr>
+            <a:r>
+              <a:rPr sz="1350" b="1" i="0">
+                <a:solidFill>
+                  <a:srgbClr val="5A1E1B"/>
+                </a:solidFill>
+                <a:latin typeface="Cambria"/>
+              </a:rPr>
+              <a:t>Hardest class?</a:t>
+            </a:r>
+          </a:p>
+          <a:p>
+            <a:pPr algn="l">
+              <a:lnSpc>
+                <a:spcPct val="108000"/>
+              </a:lnSpc>
+              <a:spcAft>
+                <a:spcPts val="300"/>
+              </a:spcAft>
+            </a:pPr>
+            <a:r>
+              <a:rPr sz="1200" b="0" i="0">
+                <a:solidFill>
+                  <a:srgbClr val="2B2320"/>
                 </a:solidFill>
                 <a:latin typeface="Calibri"/>
               </a:rPr>
-              <a:t>collect → label → fine-tune → evaluate → improve</a:t>
-            </a:r>
-          </a:p>
-        </p:txBody>
-      </p:sp>
-      <p:sp>
-        <p:nvSpPr>
-          <p:cNvPr id="9" name="Rounded Rectangle 8"/>
-          <p:cNvSpPr/>
-          <p:nvPr/>
-        </p:nvSpPr>
-        <p:spPr>
-          <a:xfrm>
-            <a:off x="868680" y="4297680"/>
-            <a:ext cx="329184" cy="329184"/>
-          </a:xfrm>
-          <a:prstGeom prst="roundRect">
-            <a:avLst>
-              <a:gd name="adj" fmla="val 50000"/>
-            </a:avLst>
-          </a:prstGeom>
-          <a:solidFill>
-            <a:srgbClr val="D2922B"/>
-          </a:solidFill>
-          <a:ln>
-            <a:noFill/>
-          </a:ln>
-          <a:effectLst/>
-        </p:spPr>
-        <p:style>
-          <a:lnRef idx="1">
-            <a:schemeClr val="accent1"/>
-          </a:lnRef>
-          <a:fillRef idx="3">
-            <a:schemeClr val="accent1"/>
-          </a:fillRef>
-          <a:effectRef idx="2">
-            <a:schemeClr val="accent1"/>
-          </a:effectRef>
-          <a:fontRef idx="minor">
-            <a:schemeClr val="lt1"/>
-          </a:fontRef>
-        </p:style>
-        <p:txBody>
-          <a:bodyPr rtlCol="0" anchor="ctr"/>
-          <a:lstStyle/>
-          <a:p>
-            <a:pPr algn="ctr"/>
-          </a:p>
-        </p:txBody>
-      </p:sp>
-      <p:sp>
-        <p:nvSpPr>
-          <p:cNvPr id="10" name="TextBox 9"/>
+              <a:t>Kebab — varied shapes, often several pieces, resembles other grilled meat (mAP@50 0.70).</a:t>
+            </a:r>
+          </a:p>
+        </p:txBody>
+      </p:sp>
+      <p:sp>
+        <p:nvSpPr>
+          <p:cNvPr id="7" name="TextBox 6"/>
           <p:cNvSpPr txBox="1"/>
           <p:nvPr/>
         </p:nvSpPr>
         <p:spPr>
           <a:xfrm>
-            <a:off x="1417320" y="4169664"/>
-            <a:ext cx="10058400" cy="457200"/>
+            <a:off x="640080" y="4123944"/>
+            <a:ext cx="5440680" cy="1078992"/>
           </a:xfrm>
           <a:prstGeom prst="rect">
             <a:avLst/>
@@ -9413,34 +9810,53 @@
           <a:p>
             <a:pPr algn="l">
               <a:lnSpc>
-                <a:spcPct val="100000"/>
-              </a:lnSpc>
-              <a:spcAft>
-                <a:spcPts val="600"/>
-              </a:spcAft>
-            </a:pPr>
-            <a:r>
-              <a:rPr sz="1800" b="1" i="0">
-                <a:solidFill>
-                  <a:srgbClr val="FBF6EF"/>
+                <a:spcPct val="108000"/>
+              </a:lnSpc>
+              <a:spcAft>
+                <a:spcPts val="300"/>
+              </a:spcAft>
+            </a:pPr>
+            <a:r>
+              <a:rPr sz="1350" b="1" i="0">
+                <a:solidFill>
+                  <a:srgbClr val="5A1E1B"/>
                 </a:solidFill>
                 <a:latin typeface="Cambria"/>
               </a:rPr>
-              <a:t>Strong v1 model</a:t>
-            </a:r>
-          </a:p>
-        </p:txBody>
-      </p:sp>
-      <p:sp>
-        <p:nvSpPr>
-          <p:cNvPr id="11" name="TextBox 10"/>
+              <a:t>Did more images always help?</a:t>
+            </a:r>
+          </a:p>
+          <a:p>
+            <a:pPr algn="l">
+              <a:lnSpc>
+                <a:spcPct val="108000"/>
+              </a:lnSpc>
+              <a:spcAft>
+                <a:spcPts val="300"/>
+              </a:spcAft>
+            </a:pPr>
+            <a:r>
+              <a:rPr sz="1200" b="0" i="0">
+                <a:solidFill>
+                  <a:srgbClr val="2B2320"/>
+                </a:solidFill>
+                <a:latin typeface="Calibri"/>
+              </a:rPr>
+              <a:t>To be measured in the v2 round — diverse data matters more than sheer count.</a:t>
+            </a:r>
+          </a:p>
+        </p:txBody>
+      </p:sp>
+      <p:sp>
+        <p:nvSpPr>
+          <p:cNvPr id="8" name="TextBox 7"/>
           <p:cNvSpPr txBox="1"/>
           <p:nvPr/>
         </p:nvSpPr>
         <p:spPr>
           <a:xfrm>
-            <a:off x="1417320" y="4572000"/>
-            <a:ext cx="10058400" cy="411480"/>
+            <a:off x="640080" y="5294376"/>
+            <a:ext cx="5440680" cy="1078992"/>
           </a:xfrm>
           <a:prstGeom prst="rect">
             <a:avLst/>
@@ -9455,80 +9871,53 @@
           <a:p>
             <a:pPr algn="l">
               <a:lnSpc>
-                <a:spcPct val="100000"/>
-              </a:lnSpc>
-              <a:spcAft>
-                <a:spcPts val="600"/>
-              </a:spcAft>
-            </a:pPr>
-            <a:r>
-              <a:rPr sz="1450" b="0" i="0">
-                <a:solidFill>
-                  <a:srgbClr val="C9A99A"/>
+                <a:spcPct val="108000"/>
+              </a:lnSpc>
+              <a:spcAft>
+                <a:spcPts val="300"/>
+              </a:spcAft>
+            </a:pPr>
+            <a:r>
+              <a:rPr sz="1350" b="1" i="0">
+                <a:solidFill>
+                  <a:srgbClr val="5A1E1B"/>
+                </a:solidFill>
+                <a:latin typeface="Cambria"/>
+              </a:rPr>
+              <a:t>Most useful variation?</a:t>
+            </a:r>
+          </a:p>
+          <a:p>
+            <a:pPr algn="l">
+              <a:lnSpc>
+                <a:spcPct val="108000"/>
+              </a:lnSpc>
+              <a:spcAft>
+                <a:spcPts val="300"/>
+              </a:spcAft>
+            </a:pPr>
+            <a:r>
+              <a:rPr sz="1200" b="0" i="0">
+                <a:solidFill>
+                  <a:srgbClr val="2B2320"/>
                 </a:solidFill>
                 <a:latin typeface="Calibri"/>
               </a:rPr>
-              <a:t>mAP@50 0.93, recall 0.91 on unseen Bahraini food</a:t>
-            </a:r>
-          </a:p>
-        </p:txBody>
-      </p:sp>
-      <p:sp>
-        <p:nvSpPr>
-          <p:cNvPr id="12" name="Rounded Rectangle 11"/>
-          <p:cNvSpPr/>
-          <p:nvPr/>
-        </p:nvSpPr>
-        <p:spPr>
-          <a:xfrm>
-            <a:off x="868680" y="5212080"/>
-            <a:ext cx="329184" cy="329184"/>
-          </a:xfrm>
-          <a:prstGeom prst="roundRect">
-            <a:avLst>
-              <a:gd name="adj" fmla="val 50000"/>
-            </a:avLst>
-          </a:prstGeom>
-          <a:solidFill>
-            <a:srgbClr val="D2922B"/>
-          </a:solidFill>
-          <a:ln>
-            <a:noFill/>
-          </a:ln>
-          <a:effectLst/>
-        </p:spPr>
-        <p:style>
-          <a:lnRef idx="1">
-            <a:schemeClr val="accent1"/>
-          </a:lnRef>
-          <a:fillRef idx="3">
-            <a:schemeClr val="accent1"/>
-          </a:fillRef>
-          <a:effectRef idx="2">
-            <a:schemeClr val="accent1"/>
-          </a:effectRef>
-          <a:fontRef idx="minor">
-            <a:schemeClr val="lt1"/>
-          </a:fontRef>
-        </p:style>
-        <p:txBody>
-          <a:bodyPr rtlCol="0" anchor="ctr"/>
-          <a:lstStyle/>
-          <a:p>
-            <a:pPr algn="ctr"/>
-          </a:p>
-        </p:txBody>
-      </p:sp>
-      <p:sp>
-        <p:nvSpPr>
-          <p:cNvPr id="13" name="TextBox 12"/>
+              <a:t>Varied plates, angles &amp; lighting — the model reaches 0.91 recall on unseen photos.</a:t>
+            </a:r>
+          </a:p>
+        </p:txBody>
+      </p:sp>
+      <p:sp>
+        <p:nvSpPr>
+          <p:cNvPr id="9" name="TextBox 8"/>
           <p:cNvSpPr txBox="1"/>
           <p:nvPr/>
         </p:nvSpPr>
         <p:spPr>
           <a:xfrm>
-            <a:off x="1417320" y="5084064"/>
-            <a:ext cx="10058400" cy="457200"/>
+            <a:off x="6172200" y="1783080"/>
+            <a:ext cx="5440680" cy="1078992"/>
           </a:xfrm>
           <a:prstGeom prst="rect">
             <a:avLst/>
@@ -9543,34 +9932,53 @@
           <a:p>
             <a:pPr algn="l">
               <a:lnSpc>
-                <a:spcPct val="100000"/>
-              </a:lnSpc>
-              <a:spcAft>
-                <a:spcPts val="600"/>
-              </a:spcAft>
-            </a:pPr>
-            <a:r>
-              <a:rPr sz="1800" b="1" i="0">
-                <a:solidFill>
-                  <a:srgbClr val="FBF6EF"/>
+                <a:spcPct val="108000"/>
+              </a:lnSpc>
+              <a:spcAft>
+                <a:spcPts val="300"/>
+              </a:spcAft>
+            </a:pPr>
+            <a:r>
+              <a:rPr sz="1350" b="1" i="0">
+                <a:solidFill>
+                  <a:srgbClr val="5A1E1B"/>
                 </a:solidFill>
                 <a:latin typeface="Cambria"/>
               </a:rPr>
-              <a:t>Failures point the way</a:t>
-            </a:r>
-          </a:p>
-        </p:txBody>
-      </p:sp>
-      <p:sp>
-        <p:nvSpPr>
-          <p:cNvPr id="14" name="TextBox 13"/>
+              <a:t>Most common failure mode?</a:t>
+            </a:r>
+          </a:p>
+          <a:p>
+            <a:pPr algn="l">
+              <a:lnSpc>
+                <a:spcPct val="108000"/>
+              </a:lnSpc>
+              <a:spcAft>
+                <a:spcPts val="300"/>
+              </a:spcAft>
+            </a:pPr>
+            <a:r>
+              <a:rPr sz="1200" b="0" i="0">
+                <a:solidFill>
+                  <a:srgbClr val="2B2320"/>
+                </a:solidFill>
+                <a:latin typeface="Calibri"/>
+              </a:rPr>
+              <a:t>False negatives — missing extra pieces on crowded, multi-item plates.</a:t>
+            </a:r>
+          </a:p>
+        </p:txBody>
+      </p:sp>
+      <p:sp>
+        <p:nvSpPr>
+          <p:cNvPr id="10" name="TextBox 9"/>
           <p:cNvSpPr txBox="1"/>
           <p:nvPr/>
         </p:nvSpPr>
         <p:spPr>
           <a:xfrm>
-            <a:off x="1417320" y="5486400"/>
-            <a:ext cx="10058400" cy="411480"/>
+            <a:off x="6172200" y="2953512"/>
+            <a:ext cx="5440680" cy="1078992"/>
           </a:xfrm>
           <a:prstGeom prst="rect">
             <a:avLst/>
@@ -9585,34 +9993,53 @@
           <a:p>
             <a:pPr algn="l">
               <a:lnSpc>
-                <a:spcPct val="100000"/>
-              </a:lnSpc>
-              <a:spcAft>
-                <a:spcPts val="600"/>
-              </a:spcAft>
-            </a:pPr>
-            <a:r>
-              <a:rPr sz="1450" b="0" i="0">
-                <a:solidFill>
-                  <a:srgbClr val="C9A99A"/>
+                <a:spcPct val="108000"/>
+              </a:lnSpc>
+              <a:spcAft>
+                <a:spcPts val="300"/>
+              </a:spcAft>
+            </a:pPr>
+            <a:r>
+              <a:rPr sz="1350" b="1" i="0">
+                <a:solidFill>
+                  <a:srgbClr val="5A1E1B"/>
+                </a:solidFill>
+                <a:latin typeface="Cambria"/>
+              </a:rPr>
+              <a:t>Overfit to a plate / camera?</a:t>
+            </a:r>
+          </a:p>
+          <a:p>
+            <a:pPr algn="l">
+              <a:lnSpc>
+                <a:spcPct val="108000"/>
+              </a:lnSpc>
+              <a:spcAft>
+                <a:spcPts val="300"/>
+              </a:spcAft>
+            </a:pPr>
+            <a:r>
+              <a:rPr sz="1200" b="0" i="0">
+                <a:solidFill>
+                  <a:srgbClr val="2B2320"/>
                 </a:solidFill>
                 <a:latin typeface="Calibri"/>
               </a:rPr>
-              <a:t>misses on crowded plates → clear plan for v2</a:t>
-            </a:r>
-          </a:p>
-        </p:txBody>
-      </p:sp>
-      <p:sp>
-        <p:nvSpPr>
-          <p:cNvPr id="15" name="TextBox 14"/>
+              <a:t>No severe overfit — strong unseen-test scores; watch classes from similar screenshots.</a:t>
+            </a:r>
+          </a:p>
+        </p:txBody>
+      </p:sp>
+      <p:sp>
+        <p:nvSpPr>
+          <p:cNvPr id="11" name="TextBox 10"/>
           <p:cNvSpPr txBox="1"/>
           <p:nvPr/>
         </p:nvSpPr>
         <p:spPr>
           <a:xfrm>
-            <a:off x="822960" y="6355080"/>
-            <a:ext cx="10515600" cy="365760"/>
+            <a:off x="6172200" y="4123944"/>
+            <a:ext cx="5440680" cy="1078992"/>
           </a:xfrm>
           <a:prstGeom prst="rect">
             <a:avLst/>
@@ -9627,20 +10054,100 @@
           <a:p>
             <a:pPr algn="l">
               <a:lnSpc>
-                <a:spcPct val="100000"/>
-              </a:lnSpc>
-              <a:spcAft>
-                <a:spcPts val="600"/>
-              </a:spcAft>
-            </a:pPr>
-            <a:r>
-              <a:rPr sz="1250" b="0" i="1">
-                <a:solidFill>
-                  <a:srgbClr val="C9A99A"/>
+                <a:spcPct val="108000"/>
+              </a:lnSpc>
+              <a:spcAft>
+                <a:spcPts val="300"/>
+              </a:spcAft>
+            </a:pPr>
+            <a:r>
+              <a:rPr sz="1350" b="1" i="0">
+                <a:solidFill>
+                  <a:srgbClr val="5A1E1B"/>
+                </a:solidFill>
+                <a:latin typeface="Cambria"/>
+              </a:rPr>
+              <a:t>One more day of data?</a:t>
+            </a:r>
+          </a:p>
+          <a:p>
+            <a:pPr algn="l">
+              <a:lnSpc>
+                <a:spcPct val="108000"/>
+              </a:lnSpc>
+              <a:spcAft>
+                <a:spcPts val="300"/>
+              </a:spcAft>
+            </a:pPr>
+            <a:r>
+              <a:rPr sz="1200" b="0" i="0">
+                <a:solidFill>
+                  <a:srgbClr val="2B2320"/>
                 </a:solidFill>
                 <a:latin typeface="Calibri"/>
               </a:rPr>
-              <a:t>github.com/hymoo2002/Bahrain-Food-Detector</a:t>
+              <a:t>Crowded plates, more Nakhi &amp; Luqaimat, and more Kebab variety.</a:t>
+            </a:r>
+          </a:p>
+        </p:txBody>
+      </p:sp>
+      <p:sp>
+        <p:nvSpPr>
+          <p:cNvPr id="12" name="TextBox 11"/>
+          <p:cNvSpPr txBox="1"/>
+          <p:nvPr/>
+        </p:nvSpPr>
+        <p:spPr>
+          <a:xfrm>
+            <a:off x="6172200" y="5294376"/>
+            <a:ext cx="5440680" cy="1078992"/>
+          </a:xfrm>
+          <a:prstGeom prst="rect">
+            <a:avLst/>
+          </a:prstGeom>
+          <a:noFill/>
+        </p:spPr>
+        <p:txBody>
+          <a:bodyPr wrap="square" anchor="t">
+            <a:spAutoFit/>
+          </a:bodyPr>
+          <a:lstStyle/>
+          <a:p>
+            <a:pPr algn="l">
+              <a:lnSpc>
+                <a:spcPct val="108000"/>
+              </a:lnSpc>
+              <a:spcAft>
+                <a:spcPts val="300"/>
+              </a:spcAft>
+            </a:pPr>
+            <a:r>
+              <a:rPr sz="1350" b="1" i="0">
+                <a:solidFill>
+                  <a:srgbClr val="5A1E1B"/>
+                </a:solidFill>
+                <a:latin typeface="Cambria"/>
+              </a:rPr>
+              <a:t>Before real deployment?</a:t>
+            </a:r>
+          </a:p>
+          <a:p>
+            <a:pPr algn="l">
+              <a:lnSpc>
+                <a:spcPct val="108000"/>
+              </a:lnSpc>
+              <a:spcAft>
+                <a:spcPts val="300"/>
+              </a:spcAft>
+            </a:pPr>
+            <a:r>
+              <a:rPr sz="1200" b="0" i="0">
+                <a:solidFill>
+                  <a:srgbClr val="2B2320"/>
+                </a:solidFill>
+                <a:latin typeface="Calibri"/>
+              </a:rPr>
+              <a:t>More real-world phones &amp; lighting, tune the confidence threshold, add a user-feedback loop.</a:t>
             </a:r>
           </a:p>
         </p:txBody>

--- a/Bahraini_Food_Detector_Results.pptx
+++ b/Bahraini_Food_Detector_Results.pptx
@@ -13,8 +13,6 @@
     <p:sldId id="261" r:id="rId7"/>
     <p:sldId id="262" r:id="rId8"/>
     <p:sldId id="263" r:id="rId9"/>
-    <p:sldId id="264" r:id="rId10"/>
-    <p:sldId id="265" r:id="rId11"/>
   </p:sldIdLst>
   <p:sldSz cx="12192000" cy="6858000"/>
   <p:notesSz cx="6858000" cy="9144000"/>
@@ -3367,661 +3365,6 @@
 </p:sld>
 </file>
 
-<file path=ppt/slides/slide10.xml><?xml version="1.0" encoding="utf-8"?>
-<p:sld xmlns:a="http://schemas.openxmlformats.org/drawingml/2006/main" xmlns:r="http://schemas.openxmlformats.org/officeDocument/2006/relationships" xmlns:p="http://schemas.openxmlformats.org/presentationml/2006/main">
-  <p:cSld>
-    <p:spTree>
-      <p:nvGrpSpPr>
-        <p:cNvPr id="1" name=""/>
-        <p:cNvGrpSpPr/>
-        <p:nvPr/>
-      </p:nvGrpSpPr>
-      <p:grpSpPr>
-        <a:xfrm>
-          <a:off x="0" y="0"/>
-          <a:ext cx="0" cy="0"/>
-          <a:chOff x="0" y="0"/>
-          <a:chExt cx="0" cy="0"/>
-        </a:xfrm>
-      </p:grpSpPr>
-      <p:sp>
-        <p:nvSpPr>
-          <p:cNvPr id="2" name="Rectangle 1"/>
-          <p:cNvSpPr/>
-          <p:nvPr/>
-        </p:nvSpPr>
-        <p:spPr>
-          <a:xfrm>
-            <a:off x="0" y="0"/>
-            <a:ext cx="12191695" cy="6858000"/>
-          </a:xfrm>
-          <a:prstGeom prst="rect">
-            <a:avLst/>
-          </a:prstGeom>
-          <a:solidFill>
-            <a:srgbClr val="5A1E1B"/>
-          </a:solidFill>
-          <a:ln>
-            <a:noFill/>
-          </a:ln>
-          <a:effectLst/>
-        </p:spPr>
-        <p:style>
-          <a:lnRef idx="1">
-            <a:schemeClr val="accent1"/>
-          </a:lnRef>
-          <a:fillRef idx="3">
-            <a:schemeClr val="accent1"/>
-          </a:fillRef>
-          <a:effectRef idx="2">
-            <a:schemeClr val="accent1"/>
-          </a:effectRef>
-          <a:fontRef idx="minor">
-            <a:schemeClr val="lt1"/>
-          </a:fontRef>
-        </p:style>
-        <p:txBody>
-          <a:bodyPr rtlCol="0" anchor="ctr"/>
-          <a:lstStyle/>
-          <a:p>
-            <a:pPr algn="ctr"/>
-            <a:endParaRPr/>
-          </a:p>
-        </p:txBody>
-      </p:sp>
-      <p:sp>
-        <p:nvSpPr>
-          <p:cNvPr id="3" name="TextBox 2"/>
-          <p:cNvSpPr txBox="1"/>
-          <p:nvPr/>
-        </p:nvSpPr>
-        <p:spPr>
-          <a:xfrm>
-            <a:off x="822960" y="640080"/>
-            <a:ext cx="10515600" cy="822960"/>
-          </a:xfrm>
-          <a:prstGeom prst="rect">
-            <a:avLst/>
-          </a:prstGeom>
-          <a:noFill/>
-        </p:spPr>
-        <p:txBody>
-          <a:bodyPr wrap="square" anchor="t">
-            <a:spAutoFit/>
-          </a:bodyPr>
-          <a:lstStyle/>
-          <a:p>
-            <a:pPr algn="l">
-              <a:lnSpc>
-                <a:spcPct val="100000"/>
-              </a:lnSpc>
-              <a:spcAft>
-                <a:spcPts val="600"/>
-              </a:spcAft>
-            </a:pPr>
-            <a:r>
-              <a:rPr sz="3800" b="1" i="0">
-                <a:solidFill>
-                  <a:srgbClr val="FBF6EF"/>
-                </a:solidFill>
-                <a:latin typeface="Cambria"/>
-              </a:rPr>
-              <a:t>Demo &amp; takeaways</a:t>
-            </a:r>
-          </a:p>
-        </p:txBody>
-      </p:sp>
-      <p:sp>
-        <p:nvSpPr>
-          <p:cNvPr id="4" name="Rounded Rectangle 3"/>
-          <p:cNvSpPr/>
-          <p:nvPr/>
-        </p:nvSpPr>
-        <p:spPr>
-          <a:xfrm>
-            <a:off x="868680" y="1554480"/>
-            <a:ext cx="3291840" cy="27432"/>
-          </a:xfrm>
-          <a:prstGeom prst="roundRect">
-            <a:avLst>
-              <a:gd name="adj" fmla="val 10000"/>
-            </a:avLst>
-          </a:prstGeom>
-          <a:solidFill>
-            <a:srgbClr val="D2922B"/>
-          </a:solidFill>
-          <a:ln>
-            <a:noFill/>
-          </a:ln>
-          <a:effectLst/>
-        </p:spPr>
-        <p:style>
-          <a:lnRef idx="1">
-            <a:schemeClr val="accent1"/>
-          </a:lnRef>
-          <a:fillRef idx="3">
-            <a:schemeClr val="accent1"/>
-          </a:fillRef>
-          <a:effectRef idx="2">
-            <a:schemeClr val="accent1"/>
-          </a:effectRef>
-          <a:fontRef idx="minor">
-            <a:schemeClr val="lt1"/>
-          </a:fontRef>
-        </p:style>
-        <p:txBody>
-          <a:bodyPr rtlCol="0" anchor="ctr"/>
-          <a:lstStyle/>
-          <a:p>
-            <a:pPr algn="ctr"/>
-            <a:endParaRPr/>
-          </a:p>
-        </p:txBody>
-      </p:sp>
-      <p:sp>
-        <p:nvSpPr>
-          <p:cNvPr id="5" name="TextBox 4"/>
-          <p:cNvSpPr txBox="1"/>
-          <p:nvPr/>
-        </p:nvSpPr>
-        <p:spPr>
-          <a:xfrm>
-            <a:off x="822960" y="1920240"/>
-            <a:ext cx="10515600" cy="1097280"/>
-          </a:xfrm>
-          <a:prstGeom prst="rect">
-            <a:avLst/>
-          </a:prstGeom>
-          <a:noFill/>
-        </p:spPr>
-        <p:txBody>
-          <a:bodyPr wrap="square" anchor="t">
-            <a:spAutoFit/>
-          </a:bodyPr>
-          <a:lstStyle/>
-          <a:p>
-            <a:pPr algn="l">
-              <a:lnSpc>
-                <a:spcPct val="115000"/>
-              </a:lnSpc>
-              <a:spcAft>
-                <a:spcPts val="600"/>
-              </a:spcAft>
-            </a:pPr>
-            <a:r>
-              <a:rPr sz="1800" b="0" i="0">
-                <a:solidFill>
-                  <a:srgbClr val="E7D9C7"/>
-                </a:solidFill>
-                <a:latin typeface="Calibri"/>
-              </a:rPr>
-              <a:t>Live demo:  a Streamlit web app (upload a photo) and a webcam notebook that boxes</a:t>
-            </a:r>
-          </a:p>
-          <a:p>
-            <a:pPr algn="l">
-              <a:lnSpc>
-                <a:spcPct val="115000"/>
-              </a:lnSpc>
-              <a:spcAft>
-                <a:spcPts val="600"/>
-              </a:spcAft>
-            </a:pPr>
-            <a:r>
-              <a:rPr sz="1800" b="0" i="0">
-                <a:solidFill>
-                  <a:srgbClr val="E7D9C7"/>
-                </a:solidFill>
-                <a:latin typeface="Calibri"/>
-              </a:rPr>
-              <a:t>Bahraini dishes in real time.</a:t>
-            </a:r>
-          </a:p>
-        </p:txBody>
-      </p:sp>
-      <p:sp>
-        <p:nvSpPr>
-          <p:cNvPr id="6" name="Rounded Rectangle 5"/>
-          <p:cNvSpPr/>
-          <p:nvPr/>
-        </p:nvSpPr>
-        <p:spPr>
-          <a:xfrm>
-            <a:off x="868680" y="3383280"/>
-            <a:ext cx="329184" cy="329184"/>
-          </a:xfrm>
-          <a:prstGeom prst="roundRect">
-            <a:avLst>
-              <a:gd name="adj" fmla="val 50000"/>
-            </a:avLst>
-          </a:prstGeom>
-          <a:solidFill>
-            <a:srgbClr val="D2922B"/>
-          </a:solidFill>
-          <a:ln>
-            <a:noFill/>
-          </a:ln>
-          <a:effectLst/>
-        </p:spPr>
-        <p:style>
-          <a:lnRef idx="1">
-            <a:schemeClr val="accent1"/>
-          </a:lnRef>
-          <a:fillRef idx="3">
-            <a:schemeClr val="accent1"/>
-          </a:fillRef>
-          <a:effectRef idx="2">
-            <a:schemeClr val="accent1"/>
-          </a:effectRef>
-          <a:fontRef idx="minor">
-            <a:schemeClr val="lt1"/>
-          </a:fontRef>
-        </p:style>
-        <p:txBody>
-          <a:bodyPr rtlCol="0" anchor="ctr"/>
-          <a:lstStyle/>
-          <a:p>
-            <a:pPr algn="ctr"/>
-            <a:endParaRPr/>
-          </a:p>
-        </p:txBody>
-      </p:sp>
-      <p:sp>
-        <p:nvSpPr>
-          <p:cNvPr id="7" name="TextBox 6"/>
-          <p:cNvSpPr txBox="1"/>
-          <p:nvPr/>
-        </p:nvSpPr>
-        <p:spPr>
-          <a:xfrm>
-            <a:off x="1417320" y="3255264"/>
-            <a:ext cx="10058400" cy="457200"/>
-          </a:xfrm>
-          <a:prstGeom prst="rect">
-            <a:avLst/>
-          </a:prstGeom>
-          <a:noFill/>
-        </p:spPr>
-        <p:txBody>
-          <a:bodyPr wrap="square" anchor="t">
-            <a:spAutoFit/>
-          </a:bodyPr>
-          <a:lstStyle/>
-          <a:p>
-            <a:pPr algn="l">
-              <a:lnSpc>
-                <a:spcPct val="100000"/>
-              </a:lnSpc>
-              <a:spcAft>
-                <a:spcPts val="600"/>
-              </a:spcAft>
-            </a:pPr>
-            <a:r>
-              <a:rPr sz="1800" b="1" i="0">
-                <a:solidFill>
-                  <a:srgbClr val="FBF6EF"/>
-                </a:solidFill>
-                <a:latin typeface="Cambria"/>
-              </a:rPr>
-              <a:t>Built the full CV pipeline</a:t>
-            </a:r>
-          </a:p>
-        </p:txBody>
-      </p:sp>
-      <p:sp>
-        <p:nvSpPr>
-          <p:cNvPr id="8" name="TextBox 7"/>
-          <p:cNvSpPr txBox="1"/>
-          <p:nvPr/>
-        </p:nvSpPr>
-        <p:spPr>
-          <a:xfrm>
-            <a:off x="1417320" y="3657600"/>
-            <a:ext cx="10058400" cy="411480"/>
-          </a:xfrm>
-          <a:prstGeom prst="rect">
-            <a:avLst/>
-          </a:prstGeom>
-          <a:noFill/>
-        </p:spPr>
-        <p:txBody>
-          <a:bodyPr wrap="square" anchor="t">
-            <a:spAutoFit/>
-          </a:bodyPr>
-          <a:lstStyle/>
-          <a:p>
-            <a:pPr algn="l">
-              <a:lnSpc>
-                <a:spcPct val="100000"/>
-              </a:lnSpc>
-              <a:spcAft>
-                <a:spcPts val="600"/>
-              </a:spcAft>
-            </a:pPr>
-            <a:r>
-              <a:rPr sz="1450" b="0" i="0">
-                <a:solidFill>
-                  <a:srgbClr val="C9A99A"/>
-                </a:solidFill>
-                <a:latin typeface="Calibri"/>
-              </a:rPr>
-              <a:t>collect → label → fine-tune → evaluate → improve</a:t>
-            </a:r>
-          </a:p>
-        </p:txBody>
-      </p:sp>
-      <p:sp>
-        <p:nvSpPr>
-          <p:cNvPr id="9" name="Rounded Rectangle 8"/>
-          <p:cNvSpPr/>
-          <p:nvPr/>
-        </p:nvSpPr>
-        <p:spPr>
-          <a:xfrm>
-            <a:off x="868680" y="4297680"/>
-            <a:ext cx="329184" cy="329184"/>
-          </a:xfrm>
-          <a:prstGeom prst="roundRect">
-            <a:avLst>
-              <a:gd name="adj" fmla="val 50000"/>
-            </a:avLst>
-          </a:prstGeom>
-          <a:solidFill>
-            <a:srgbClr val="D2922B"/>
-          </a:solidFill>
-          <a:ln>
-            <a:noFill/>
-          </a:ln>
-          <a:effectLst/>
-        </p:spPr>
-        <p:style>
-          <a:lnRef idx="1">
-            <a:schemeClr val="accent1"/>
-          </a:lnRef>
-          <a:fillRef idx="3">
-            <a:schemeClr val="accent1"/>
-          </a:fillRef>
-          <a:effectRef idx="2">
-            <a:schemeClr val="accent1"/>
-          </a:effectRef>
-          <a:fontRef idx="minor">
-            <a:schemeClr val="lt1"/>
-          </a:fontRef>
-        </p:style>
-        <p:txBody>
-          <a:bodyPr rtlCol="0" anchor="ctr"/>
-          <a:lstStyle/>
-          <a:p>
-            <a:pPr algn="ctr"/>
-            <a:endParaRPr/>
-          </a:p>
-        </p:txBody>
-      </p:sp>
-      <p:sp>
-        <p:nvSpPr>
-          <p:cNvPr id="10" name="TextBox 9"/>
-          <p:cNvSpPr txBox="1"/>
-          <p:nvPr/>
-        </p:nvSpPr>
-        <p:spPr>
-          <a:xfrm>
-            <a:off x="1417320" y="4169664"/>
-            <a:ext cx="10058400" cy="457200"/>
-          </a:xfrm>
-          <a:prstGeom prst="rect">
-            <a:avLst/>
-          </a:prstGeom>
-          <a:noFill/>
-        </p:spPr>
-        <p:txBody>
-          <a:bodyPr wrap="square" anchor="t">
-            <a:spAutoFit/>
-          </a:bodyPr>
-          <a:lstStyle/>
-          <a:p>
-            <a:pPr algn="l">
-              <a:lnSpc>
-                <a:spcPct val="100000"/>
-              </a:lnSpc>
-              <a:spcAft>
-                <a:spcPts val="600"/>
-              </a:spcAft>
-            </a:pPr>
-            <a:r>
-              <a:rPr sz="1800" b="1" i="0">
-                <a:solidFill>
-                  <a:srgbClr val="FBF6EF"/>
-                </a:solidFill>
-                <a:latin typeface="Cambria"/>
-              </a:rPr>
-              <a:t>Strong v1 model</a:t>
-            </a:r>
-          </a:p>
-        </p:txBody>
-      </p:sp>
-      <p:sp>
-        <p:nvSpPr>
-          <p:cNvPr id="11" name="TextBox 10"/>
-          <p:cNvSpPr txBox="1"/>
-          <p:nvPr/>
-        </p:nvSpPr>
-        <p:spPr>
-          <a:xfrm>
-            <a:off x="1417320" y="4572000"/>
-            <a:ext cx="10058400" cy="411480"/>
-          </a:xfrm>
-          <a:prstGeom prst="rect">
-            <a:avLst/>
-          </a:prstGeom>
-          <a:noFill/>
-        </p:spPr>
-        <p:txBody>
-          <a:bodyPr wrap="square" anchor="t">
-            <a:spAutoFit/>
-          </a:bodyPr>
-          <a:lstStyle/>
-          <a:p>
-            <a:pPr algn="l">
-              <a:lnSpc>
-                <a:spcPct val="100000"/>
-              </a:lnSpc>
-              <a:spcAft>
-                <a:spcPts val="600"/>
-              </a:spcAft>
-            </a:pPr>
-            <a:r>
-              <a:rPr sz="1450" b="0" i="0">
-                <a:solidFill>
-                  <a:srgbClr val="C9A99A"/>
-                </a:solidFill>
-                <a:latin typeface="Calibri"/>
-              </a:rPr>
-              <a:t>mAP@50 0.93, recall 0.91 on unseen Bahraini food</a:t>
-            </a:r>
-          </a:p>
-        </p:txBody>
-      </p:sp>
-      <p:sp>
-        <p:nvSpPr>
-          <p:cNvPr id="12" name="Rounded Rectangle 11"/>
-          <p:cNvSpPr/>
-          <p:nvPr/>
-        </p:nvSpPr>
-        <p:spPr>
-          <a:xfrm>
-            <a:off x="868680" y="5212080"/>
-            <a:ext cx="329184" cy="329184"/>
-          </a:xfrm>
-          <a:prstGeom prst="roundRect">
-            <a:avLst>
-              <a:gd name="adj" fmla="val 50000"/>
-            </a:avLst>
-          </a:prstGeom>
-          <a:solidFill>
-            <a:srgbClr val="D2922B"/>
-          </a:solidFill>
-          <a:ln>
-            <a:noFill/>
-          </a:ln>
-          <a:effectLst/>
-        </p:spPr>
-        <p:style>
-          <a:lnRef idx="1">
-            <a:schemeClr val="accent1"/>
-          </a:lnRef>
-          <a:fillRef idx="3">
-            <a:schemeClr val="accent1"/>
-          </a:fillRef>
-          <a:effectRef idx="2">
-            <a:schemeClr val="accent1"/>
-          </a:effectRef>
-          <a:fontRef idx="minor">
-            <a:schemeClr val="lt1"/>
-          </a:fontRef>
-        </p:style>
-        <p:txBody>
-          <a:bodyPr rtlCol="0" anchor="ctr"/>
-          <a:lstStyle/>
-          <a:p>
-            <a:pPr algn="ctr"/>
-            <a:endParaRPr/>
-          </a:p>
-        </p:txBody>
-      </p:sp>
-      <p:sp>
-        <p:nvSpPr>
-          <p:cNvPr id="13" name="TextBox 12"/>
-          <p:cNvSpPr txBox="1"/>
-          <p:nvPr/>
-        </p:nvSpPr>
-        <p:spPr>
-          <a:xfrm>
-            <a:off x="1417320" y="5084064"/>
-            <a:ext cx="10058400" cy="457200"/>
-          </a:xfrm>
-          <a:prstGeom prst="rect">
-            <a:avLst/>
-          </a:prstGeom>
-          <a:noFill/>
-        </p:spPr>
-        <p:txBody>
-          <a:bodyPr wrap="square" anchor="t">
-            <a:spAutoFit/>
-          </a:bodyPr>
-          <a:lstStyle/>
-          <a:p>
-            <a:pPr algn="l">
-              <a:lnSpc>
-                <a:spcPct val="100000"/>
-              </a:lnSpc>
-              <a:spcAft>
-                <a:spcPts val="600"/>
-              </a:spcAft>
-            </a:pPr>
-            <a:r>
-              <a:rPr sz="1800" b="1" i="0">
-                <a:solidFill>
-                  <a:srgbClr val="FBF6EF"/>
-                </a:solidFill>
-                <a:latin typeface="Cambria"/>
-              </a:rPr>
-              <a:t>Failures point the way</a:t>
-            </a:r>
-          </a:p>
-        </p:txBody>
-      </p:sp>
-      <p:sp>
-        <p:nvSpPr>
-          <p:cNvPr id="14" name="TextBox 13"/>
-          <p:cNvSpPr txBox="1"/>
-          <p:nvPr/>
-        </p:nvSpPr>
-        <p:spPr>
-          <a:xfrm>
-            <a:off x="1417320" y="5486400"/>
-            <a:ext cx="10058400" cy="411480"/>
-          </a:xfrm>
-          <a:prstGeom prst="rect">
-            <a:avLst/>
-          </a:prstGeom>
-          <a:noFill/>
-        </p:spPr>
-        <p:txBody>
-          <a:bodyPr wrap="square" anchor="t">
-            <a:spAutoFit/>
-          </a:bodyPr>
-          <a:lstStyle/>
-          <a:p>
-            <a:pPr algn="l">
-              <a:lnSpc>
-                <a:spcPct val="100000"/>
-              </a:lnSpc>
-              <a:spcAft>
-                <a:spcPts val="600"/>
-              </a:spcAft>
-            </a:pPr>
-            <a:r>
-              <a:rPr sz="1450" b="0" i="0">
-                <a:solidFill>
-                  <a:srgbClr val="C9A99A"/>
-                </a:solidFill>
-                <a:latin typeface="Calibri"/>
-              </a:rPr>
-              <a:t>misses on crowded plates → clear plan for v2</a:t>
-            </a:r>
-          </a:p>
-        </p:txBody>
-      </p:sp>
-      <p:sp>
-        <p:nvSpPr>
-          <p:cNvPr id="15" name="TextBox 14"/>
-          <p:cNvSpPr txBox="1"/>
-          <p:nvPr/>
-        </p:nvSpPr>
-        <p:spPr>
-          <a:xfrm>
-            <a:off x="822960" y="6355080"/>
-            <a:ext cx="10515600" cy="365760"/>
-          </a:xfrm>
-          <a:prstGeom prst="rect">
-            <a:avLst/>
-          </a:prstGeom>
-          <a:noFill/>
-        </p:spPr>
-        <p:txBody>
-          <a:bodyPr wrap="square" anchor="t">
-            <a:spAutoFit/>
-          </a:bodyPr>
-          <a:lstStyle/>
-          <a:p>
-            <a:pPr algn="l">
-              <a:lnSpc>
-                <a:spcPct val="100000"/>
-              </a:lnSpc>
-              <a:spcAft>
-                <a:spcPts val="600"/>
-              </a:spcAft>
-            </a:pPr>
-            <a:r>
-              <a:rPr sz="1250" b="0" i="1">
-                <a:solidFill>
-                  <a:srgbClr val="C9A99A"/>
-                </a:solidFill>
-                <a:latin typeface="Calibri"/>
-              </a:rPr>
-              <a:t>github.com/hymoo2002/Bahrain-Food-Detector</a:t>
-            </a:r>
-          </a:p>
-        </p:txBody>
-      </p:sp>
-    </p:spTree>
-  </p:cSld>
-  <p:clrMapOvr>
-    <a:masterClrMapping/>
-  </p:clrMapOvr>
-</p:sld>
-</file>
-
 <file path=ppt/slides/slide2.xml><?xml version="1.0" encoding="utf-8"?>
 <p:sld xmlns:a="http://schemas.openxmlformats.org/drawingml/2006/main" xmlns:r="http://schemas.openxmlformats.org/officeDocument/2006/relationships" xmlns:p="http://schemas.openxmlformats.org/presentationml/2006/main">
   <p:cSld>
@@ -5795,7 +5138,7 @@
         <p:spPr>
           <a:xfrm>
             <a:off x="640080" y="3840480"/>
-            <a:ext cx="10972800" cy="2377440"/>
+            <a:ext cx="10972800" cy="2023503"/>
           </a:xfrm>
           <a:prstGeom prst="rect">
             <a:avLst/>
@@ -5817,7 +5160,7 @@
               </a:spcAft>
             </a:pPr>
             <a:r>
-              <a:rPr sz="1800" b="1" i="0">
+              <a:rPr sz="1800" b="1" i="0" dirty="0">
                 <a:solidFill>
                   <a:srgbClr val="5A1E1B"/>
                 </a:solidFill>
@@ -5836,13 +5179,85 @@
               </a:spcAft>
             </a:pPr>
             <a:r>
-              <a:rPr sz="1550" b="0" i="0">
+              <a:rPr sz="1550" b="0" i="0" dirty="0">
                 <a:solidFill>
                   <a:srgbClr val="2B2320"/>
                 </a:solidFill>
                 <a:latin typeface="Calibri"/>
               </a:rPr>
-              <a:t>Photos gathered across plates, angles and lighting, then bounding-boxed in Roboflow.</a:t>
+              <a:t>Photos gathered </a:t>
+            </a:r>
+            <a:r>
+              <a:rPr lang="en-US" sz="1550" dirty="0">
+                <a:solidFill>
+                  <a:srgbClr val="2B2320"/>
+                </a:solidFill>
+                <a:latin typeface="Calibri"/>
+              </a:rPr>
+              <a:t>from around the web</a:t>
+            </a:r>
+            <a:r>
+              <a:rPr sz="1550" b="0" i="0" dirty="0">
+                <a:solidFill>
+                  <a:srgbClr val="2B2320"/>
+                </a:solidFill>
+                <a:latin typeface="Calibri"/>
+              </a:rPr>
+              <a:t>,</a:t>
+            </a:r>
+            <a:r>
+              <a:rPr lang="en-US" sz="1550" b="0" i="0" dirty="0">
+                <a:solidFill>
+                  <a:srgbClr val="2B2320"/>
+                </a:solidFill>
+                <a:latin typeface="Calibri"/>
+              </a:rPr>
+              <a:t> with</a:t>
+            </a:r>
+            <a:r>
+              <a:rPr sz="1550" b="0" i="0" dirty="0">
+                <a:solidFill>
+                  <a:srgbClr val="2B2320"/>
+                </a:solidFill>
+                <a:latin typeface="Calibri"/>
+              </a:rPr>
+              <a:t> angles and lighting</a:t>
+            </a:r>
+            <a:r>
+              <a:rPr lang="en-US" sz="1550" b="0" i="0" dirty="0">
+                <a:solidFill>
+                  <a:srgbClr val="2B2320"/>
+                </a:solidFill>
+                <a:latin typeface="Calibri"/>
+              </a:rPr>
+              <a:t> variation</a:t>
+            </a:r>
+            <a:r>
+              <a:rPr sz="1550" b="0" i="0" dirty="0">
+                <a:solidFill>
+                  <a:srgbClr val="2B2320"/>
+                </a:solidFill>
+                <a:latin typeface="Calibri"/>
+              </a:rPr>
+              <a:t>, then bounding-boxed in </a:t>
+            </a:r>
+            <a:r>
+              <a:rPr sz="1550" b="0" i="0" dirty="0" err="1">
+                <a:solidFill>
+                  <a:srgbClr val="2B2320"/>
+                </a:solidFill>
+                <a:latin typeface="Calibri"/>
+              </a:rPr>
+              <a:t>Roboflow</a:t>
+            </a:r>
+            <a:r>
+              <a:rPr sz="1550" b="0" i="0" dirty="0">
+                <a:solidFill>
+                  <a:srgbClr val="2B2320"/>
+                </a:solidFill>
+                <a:latin typeface="Calibri"/>
+              </a:rPr>
+              <a:t>.</a:t>
             </a:r>
           </a:p>
           <a:p>
@@ -5854,7 +5269,7 @@
                 <a:spcPts val="400"/>
               </a:spcAft>
             </a:pPr>
-            <a:endParaRPr sz="1550" b="0" i="0">
+            <a:endParaRPr sz="1550" b="0" i="0" dirty="0">
               <a:solidFill>
                 <a:srgbClr val="2B2320"/>
               </a:solidFill>
@@ -5871,7 +5286,7 @@
               </a:spcAft>
             </a:pPr>
             <a:r>
-              <a:rPr sz="1800" b="1" i="0">
+              <a:rPr sz="1800" b="1" i="0" dirty="0">
                 <a:solidFill>
                   <a:srgbClr val="5A1E1B"/>
                 </a:solidFill>
@@ -5890,13 +5305,31 @@
               </a:spcAft>
             </a:pPr>
             <a:r>
-              <a:rPr sz="1550" b="0" i="0">
+              <a:rPr sz="1550" b="0" i="0" dirty="0">
                 <a:solidFill>
                   <a:srgbClr val="2B2320"/>
                 </a:solidFill>
                 <a:latin typeface="Calibri"/>
               </a:rPr>
-              <a:t>YOLO26 fine-tuned on our own labelled dataset — augmentation on the training set only,</a:t>
+              <a:t>YOLO26 fine-tuned on our own labelled dataset </a:t>
+            </a:r>
+            <a:r>
+              <a:rPr lang="en-US" sz="1550" b="0" i="0" dirty="0">
+                <a:solidFill>
+                  <a:srgbClr val="2B2320"/>
+                </a:solidFill>
+                <a:latin typeface="Calibri"/>
+              </a:rPr>
+              <a:t>- </a:t>
+            </a:r>
+            <a:r>
+              <a:rPr sz="1550" b="0" i="0" dirty="0">
+                <a:solidFill>
+                  <a:srgbClr val="2B2320"/>
+                </a:solidFill>
+                <a:latin typeface="Calibri"/>
+              </a:rPr>
+              <a:t>the training set only,</a:t>
             </a:r>
           </a:p>
           <a:p>
@@ -5909,7 +5342,7 @@
               </a:spcAft>
             </a:pPr>
             <a:r>
-              <a:rPr sz="1550" b="0" i="0">
+              <a:rPr sz="1550" b="0" i="0" dirty="0">
                 <a:solidFill>
                   <a:srgbClr val="2B2320"/>
                 </a:solidFill>
@@ -7188,7 +6621,7 @@
         <p:spPr>
           <a:xfrm>
             <a:off x="7589520" y="2606040"/>
-            <a:ext cx="3749039" cy="3291840"/>
+            <a:ext cx="3749039" cy="2377382"/>
           </a:xfrm>
           <a:prstGeom prst="rect">
             <a:avLst/>
@@ -7210,14 +6643,29 @@
               </a:spcAft>
             </a:pPr>
             <a:r>
-              <a:rPr sz="1550" b="1" i="0">
+              <a:rPr sz="1550" b="1" i="0" dirty="0">
                 <a:solidFill>
                   <a:srgbClr val="5A1E1B"/>
                 </a:solidFill>
                 <a:latin typeface="Calibri"/>
               </a:rPr>
-              <a:t>Easiest – Harees, Halwa, Machboos</a:t>
-            </a:r>
+              <a:t>Easiest – Harees, Halwa, </a:t>
+            </a:r>
+            <a:r>
+              <a:rPr sz="1550" b="1" i="0" dirty="0" err="1">
+                <a:solidFill>
+                  <a:srgbClr val="5A1E1B"/>
+                </a:solidFill>
+                <a:latin typeface="Calibri"/>
+              </a:rPr>
+              <a:t>Machboos</a:t>
+            </a:r>
+            <a:endParaRPr sz="1550" b="1" i="0" dirty="0">
+              <a:solidFill>
+                <a:srgbClr val="5A1E1B"/>
+              </a:solidFill>
+              <a:latin typeface="Calibri"/>
+            </a:endParaRPr>
           </a:p>
           <a:p>
             <a:pPr algn="l">
@@ -7229,13 +6677,31 @@
               </a:spcAft>
             </a:pPr>
             <a:r>
-              <a:rPr sz="1400" b="0" i="0">
+              <a:rPr sz="1400" b="0" i="0" dirty="0">
                 <a:solidFill>
                   <a:srgbClr val="2B2320"/>
                 </a:solidFill>
                 <a:latin typeface="Calibri"/>
               </a:rPr>
-              <a:t>distinct colour &amp; texture, near-perfect boxes.</a:t>
+              <a:t>distinct </a:t>
+            </a:r>
+            <a:r>
+              <a:rPr sz="1400" b="0" i="0" dirty="0" err="1">
+                <a:solidFill>
+                  <a:srgbClr val="2B2320"/>
+                </a:solidFill>
+                <a:latin typeface="Calibri"/>
+              </a:rPr>
+              <a:t>colour</a:t>
+            </a:r>
+            <a:r>
+              <a:rPr sz="1400" b="0" i="0" dirty="0">
+                <a:solidFill>
+                  <a:srgbClr val="2B2320"/>
+                </a:solidFill>
+                <a:latin typeface="Calibri"/>
+              </a:rPr>
+              <a:t> &amp; texture, near-perfect boxes.</a:t>
             </a:r>
           </a:p>
           <a:p>
@@ -7247,7 +6713,7 @@
                 <a:spcPts val="400"/>
               </a:spcAft>
             </a:pPr>
-            <a:endParaRPr sz="1400" b="0" i="0">
+            <a:endParaRPr sz="1400" b="0" i="0" dirty="0">
               <a:solidFill>
                 <a:srgbClr val="2B2320"/>
               </a:solidFill>
@@ -7264,14 +6730,29 @@
               </a:spcAft>
             </a:pPr>
             <a:r>
-              <a:rPr sz="1550" b="1" i="0">
+              <a:rPr sz="1550" b="1" i="0" dirty="0">
                 <a:solidFill>
                   <a:srgbClr val="5A1E1B"/>
                 </a:solidFill>
                 <a:latin typeface="Calibri"/>
               </a:rPr>
-              <a:t>Hardest – Kebab</a:t>
-            </a:r>
+              <a:t>Hardest – </a:t>
+            </a:r>
+            <a:r>
+              <a:rPr lang="en-US" sz="1550" b="1" i="0" dirty="0" err="1">
+                <a:solidFill>
+                  <a:srgbClr val="5A1E1B"/>
+                </a:solidFill>
+                <a:latin typeface="Calibri"/>
+              </a:rPr>
+              <a:t>Luqaimat</a:t>
+            </a:r>
+            <a:endParaRPr sz="1550" b="1" i="0" dirty="0">
+              <a:solidFill>
+                <a:srgbClr val="5A1E1B"/>
+              </a:solidFill>
+              <a:latin typeface="Calibri"/>
+            </a:endParaRPr>
           </a:p>
           <a:p>
             <a:pPr algn="l">
@@ -7283,25 +6764,15 @@
               </a:spcAft>
             </a:pPr>
             <a:r>
-              <a:rPr sz="1400" b="0" i="0">
+              <a:rPr lang="en-US" sz="1400" b="0" i="0" dirty="0">
                 <a:solidFill>
                   <a:srgbClr val="2B2320"/>
                 </a:solidFill>
                 <a:latin typeface="Calibri"/>
               </a:rPr>
-              <a:t>varied shapes and often several pieces, so boxes are looser (lowest mAP@50, 0.70).</a:t>
-            </a:r>
-          </a:p>
-          <a:p>
-            <a:pPr algn="l">
-              <a:lnSpc>
-                <a:spcPct val="112000"/>
-              </a:lnSpc>
-              <a:spcAft>
-                <a:spcPts val="400"/>
-              </a:spcAft>
-            </a:pPr>
-            <a:endParaRPr sz="1400" b="0" i="0">
+              <a:t>Because it is very similar to a different class which is Nakhi. </a:t>
+            </a:r>
+            <a:endParaRPr sz="1400" b="0" i="0" dirty="0">
               <a:solidFill>
                 <a:srgbClr val="2B2320"/>
               </a:solidFill>
@@ -7317,8 +6788,24 @@
                 <a:spcPts val="400"/>
               </a:spcAft>
             </a:pPr>
-            <a:r>
-              <a:rPr sz="1450" b="1" i="0">
+            <a:endParaRPr sz="1400" b="0" i="0" dirty="0">
+              <a:solidFill>
+                <a:srgbClr val="2B2320"/>
+              </a:solidFill>
+              <a:latin typeface="Calibri"/>
+            </a:endParaRPr>
+          </a:p>
+          <a:p>
+            <a:pPr algn="l">
+              <a:lnSpc>
+                <a:spcPct val="112000"/>
+              </a:lnSpc>
+              <a:spcAft>
+                <a:spcPts val="400"/>
+              </a:spcAft>
+            </a:pPr>
+            <a:r>
+              <a:rPr sz="1450" b="1" i="0" dirty="0">
                 <a:solidFill>
                   <a:srgbClr val="6E8B5A"/>
                 </a:solidFill>
@@ -7362,7 +6849,7 @@
         </p:nvSpPr>
         <p:spPr>
           <a:xfrm>
-            <a:off x="0" y="0"/>
+            <a:off x="0" y="20782"/>
             <a:ext cx="12191695" cy="6858000"/>
           </a:xfrm>
           <a:prstGeom prst="rect">
@@ -7605,7 +7092,7 @@
         <p:spPr>
           <a:xfrm>
             <a:off x="7132320" y="2487168"/>
-            <a:ext cx="4297680" cy="3474720"/>
+            <a:ext cx="4297680" cy="2623475"/>
           </a:xfrm>
           <a:prstGeom prst="rect">
             <a:avLst/>
@@ -7627,13 +7114,40 @@
               </a:spcAft>
             </a:pPr>
             <a:r>
-              <a:rPr sz="1350" b="0" i="0">
+              <a:rPr lang="en-US" sz="1350" b="0" i="0" dirty="0">
                 <a:solidFill>
                   <a:srgbClr val="2B2320"/>
                 </a:solidFill>
                 <a:latin typeface="Calibri"/>
               </a:rPr>
-              <a:t>Columns = the true dish  ·  rows = what the model predicted.</a:t>
+              <a:t>X</a:t>
+            </a:r>
+            <a:r>
+              <a:rPr sz="1350" b="0" i="0" dirty="0">
+                <a:solidFill>
+                  <a:srgbClr val="2B2320"/>
+                </a:solidFill>
+                <a:latin typeface="Calibri"/>
+              </a:rPr>
+              <a:t> = the true dish  ·  </a:t>
+            </a:r>
+            <a:r>
+              <a:rPr lang="en-US" sz="1350" b="0" i="0" dirty="0">
+                <a:solidFill>
+                  <a:srgbClr val="2B2320"/>
+                </a:solidFill>
+                <a:latin typeface="Calibri"/>
+              </a:rPr>
+              <a:t>Y</a:t>
+            </a:r>
+            <a:r>
+              <a:rPr sz="1350" b="0" i="0" dirty="0">
+                <a:solidFill>
+                  <a:srgbClr val="2B2320"/>
+                </a:solidFill>
+                <a:latin typeface="Calibri"/>
+              </a:rPr>
+              <a:t> = what the model predicted.</a:t>
             </a:r>
           </a:p>
           <a:p>
@@ -7645,7 +7159,7 @@
                 <a:spcPts val="300"/>
               </a:spcAft>
             </a:pPr>
-            <a:endParaRPr sz="1350" b="0" i="0">
+            <a:endParaRPr sz="1350" b="0" i="0" dirty="0">
               <a:solidFill>
                 <a:srgbClr val="2B2320"/>
               </a:solidFill>
@@ -7662,7 +7176,7 @@
               </a:spcAft>
             </a:pPr>
             <a:r>
-              <a:rPr sz="1350" b="0" i="0">
+              <a:rPr sz="1350" b="0" i="0" dirty="0">
                 <a:solidFill>
                   <a:srgbClr val="2B2320"/>
                 </a:solidFill>
@@ -7680,7 +7194,7 @@
                 <a:spcPts val="300"/>
               </a:spcAft>
             </a:pPr>
-            <a:endParaRPr sz="1350" b="0" i="0">
+            <a:endParaRPr sz="1350" b="0" i="0" dirty="0">
               <a:solidFill>
                 <a:srgbClr val="2B2320"/>
               </a:solidFill>
@@ -7697,7 +7211,7 @@
               </a:spcAft>
             </a:pPr>
             <a:r>
-              <a:rPr sz="1350" b="1" i="0">
+              <a:rPr sz="1350" b="1" i="0" dirty="0">
                 <a:solidFill>
                   <a:srgbClr val="5A1E1B"/>
                 </a:solidFill>
@@ -7716,7 +7230,7 @@
               </a:spcAft>
             </a:pPr>
             <a:r>
-              <a:rPr sz="1300" b="0" i="0">
+              <a:rPr sz="1300" b="0" i="0" dirty="0">
                 <a:solidFill>
                   <a:srgbClr val="2B2320"/>
                 </a:solidFill>
@@ -7735,7 +7249,7 @@
               </a:spcAft>
             </a:pPr>
             <a:r>
-              <a:rPr sz="1300" b="0" i="0">
+              <a:rPr sz="1300" b="0" i="0" dirty="0">
                 <a:solidFill>
                   <a:srgbClr val="2B2320"/>
                 </a:solidFill>
@@ -9506,648 +9020,6 @@
                 <a:latin typeface="Calibri"/>
               </a:rPr>
               <a:t>v1 is complete; this targeted second collection is the next step.</a:t>
-            </a:r>
-          </a:p>
-        </p:txBody>
-      </p:sp>
-    </p:spTree>
-  </p:cSld>
-  <p:clrMapOvr>
-    <a:masterClrMapping/>
-  </p:clrMapOvr>
-</p:sld>
-</file>
-
-<file path=ppt/slides/slide9.xml><?xml version="1.0" encoding="utf-8"?>
-<p:sld xmlns:a="http://schemas.openxmlformats.org/drawingml/2006/main" xmlns:r="http://schemas.openxmlformats.org/officeDocument/2006/relationships" xmlns:p="http://schemas.openxmlformats.org/presentationml/2006/main">
-  <p:cSld>
-    <p:spTree>
-      <p:nvGrpSpPr>
-        <p:cNvPr id="1" name=""/>
-        <p:cNvGrpSpPr/>
-        <p:nvPr/>
-      </p:nvGrpSpPr>
-      <p:grpSpPr>
-        <a:xfrm>
-          <a:off x="0" y="0"/>
-          <a:ext cx="0" cy="0"/>
-          <a:chOff x="0" y="0"/>
-          <a:chExt cx="0" cy="0"/>
-        </a:xfrm>
-      </p:grpSpPr>
-      <p:sp>
-        <p:nvSpPr>
-          <p:cNvPr id="2" name="Rectangle 1"/>
-          <p:cNvSpPr/>
-          <p:nvPr/>
-        </p:nvSpPr>
-        <p:spPr>
-          <a:xfrm>
-            <a:off x="0" y="0"/>
-            <a:ext cx="12191695" cy="6858000"/>
-          </a:xfrm>
-          <a:prstGeom prst="rect">
-            <a:avLst/>
-          </a:prstGeom>
-          <a:solidFill>
-            <a:srgbClr val="FBF6EF"/>
-          </a:solidFill>
-          <a:ln>
-            <a:noFill/>
-          </a:ln>
-          <a:effectLst/>
-        </p:spPr>
-        <p:style>
-          <a:lnRef idx="1">
-            <a:schemeClr val="accent1"/>
-          </a:lnRef>
-          <a:fillRef idx="3">
-            <a:schemeClr val="accent1"/>
-          </a:fillRef>
-          <a:effectRef idx="2">
-            <a:schemeClr val="accent1"/>
-          </a:effectRef>
-          <a:fontRef idx="minor">
-            <a:schemeClr val="lt1"/>
-          </a:fontRef>
-        </p:style>
-        <p:txBody>
-          <a:bodyPr rtlCol="0" anchor="ctr"/>
-          <a:lstStyle/>
-          <a:p>
-            <a:pPr algn="ctr"/>
-            <a:endParaRPr/>
-          </a:p>
-        </p:txBody>
-      </p:sp>
-      <p:sp>
-        <p:nvSpPr>
-          <p:cNvPr id="3" name="TextBox 2"/>
-          <p:cNvSpPr txBox="1"/>
-          <p:nvPr/>
-        </p:nvSpPr>
-        <p:spPr>
-          <a:xfrm>
-            <a:off x="640080" y="457200"/>
-            <a:ext cx="10972800" cy="365760"/>
-          </a:xfrm>
-          <a:prstGeom prst="rect">
-            <a:avLst/>
-          </a:prstGeom>
-          <a:noFill/>
-        </p:spPr>
-        <p:txBody>
-          <a:bodyPr wrap="square" anchor="t">
-            <a:spAutoFit/>
-          </a:bodyPr>
-          <a:lstStyle/>
-          <a:p>
-            <a:pPr algn="l">
-              <a:lnSpc>
-                <a:spcPct val="100000"/>
-              </a:lnSpc>
-              <a:spcAft>
-                <a:spcPts val="600"/>
-              </a:spcAft>
-            </a:pPr>
-            <a:r>
-              <a:rPr sz="1300" b="1" i="0">
-                <a:solidFill>
-                  <a:srgbClr val="B4472E"/>
-                </a:solidFill>
-                <a:latin typeface="Calibri"/>
-              </a:rPr>
-              <a:t>REFLECTION</a:t>
-            </a:r>
-          </a:p>
-        </p:txBody>
-      </p:sp>
-      <p:sp>
-        <p:nvSpPr>
-          <p:cNvPr id="4" name="TextBox 3"/>
-          <p:cNvSpPr txBox="1"/>
-          <p:nvPr/>
-        </p:nvSpPr>
-        <p:spPr>
-          <a:xfrm>
-            <a:off x="640080" y="777240"/>
-            <a:ext cx="10972800" cy="822960"/>
-          </a:xfrm>
-          <a:prstGeom prst="rect">
-            <a:avLst/>
-          </a:prstGeom>
-          <a:noFill/>
-        </p:spPr>
-        <p:txBody>
-          <a:bodyPr wrap="square" anchor="t">
-            <a:spAutoFit/>
-          </a:bodyPr>
-          <a:lstStyle/>
-          <a:p>
-            <a:pPr algn="l">
-              <a:lnSpc>
-                <a:spcPct val="100000"/>
-              </a:lnSpc>
-              <a:spcAft>
-                <a:spcPts val="600"/>
-              </a:spcAft>
-            </a:pPr>
-            <a:r>
-              <a:rPr sz="3400" b="1" i="0">
-                <a:solidFill>
-                  <a:srgbClr val="5A1E1B"/>
-                </a:solidFill>
-                <a:latin typeface="Cambria"/>
-              </a:rPr>
-              <a:t>What we learned</a:t>
-            </a:r>
-          </a:p>
-        </p:txBody>
-      </p:sp>
-      <p:sp>
-        <p:nvSpPr>
-          <p:cNvPr id="5" name="TextBox 4"/>
-          <p:cNvSpPr txBox="1"/>
-          <p:nvPr/>
-        </p:nvSpPr>
-        <p:spPr>
-          <a:xfrm>
-            <a:off x="640080" y="1783080"/>
-            <a:ext cx="5440680" cy="1078992"/>
-          </a:xfrm>
-          <a:prstGeom prst="rect">
-            <a:avLst/>
-          </a:prstGeom>
-          <a:noFill/>
-        </p:spPr>
-        <p:txBody>
-          <a:bodyPr wrap="square" anchor="t">
-            <a:spAutoFit/>
-          </a:bodyPr>
-          <a:lstStyle/>
-          <a:p>
-            <a:pPr algn="l">
-              <a:lnSpc>
-                <a:spcPct val="108000"/>
-              </a:lnSpc>
-              <a:spcAft>
-                <a:spcPts val="300"/>
-              </a:spcAft>
-            </a:pPr>
-            <a:r>
-              <a:rPr sz="1350" b="1" i="0">
-                <a:solidFill>
-                  <a:srgbClr val="5A1E1B"/>
-                </a:solidFill>
-                <a:latin typeface="Cambria"/>
-              </a:rPr>
-              <a:t>Easiest class?</a:t>
-            </a:r>
-          </a:p>
-          <a:p>
-            <a:pPr algn="l">
-              <a:lnSpc>
-                <a:spcPct val="108000"/>
-              </a:lnSpc>
-              <a:spcAft>
-                <a:spcPts val="300"/>
-              </a:spcAft>
-            </a:pPr>
-            <a:r>
-              <a:rPr sz="1200" b="0" i="0">
-                <a:solidFill>
-                  <a:srgbClr val="2B2320"/>
-                </a:solidFill>
-                <a:latin typeface="Calibri"/>
-              </a:rPr>
-              <a:t>Harees / Halwa / Machboos — bold colour, single clear portion (mAP@50-95 ≈ 0.99).</a:t>
-            </a:r>
-          </a:p>
-        </p:txBody>
-      </p:sp>
-      <p:sp>
-        <p:nvSpPr>
-          <p:cNvPr id="6" name="TextBox 5"/>
-          <p:cNvSpPr txBox="1"/>
-          <p:nvPr/>
-        </p:nvSpPr>
-        <p:spPr>
-          <a:xfrm>
-            <a:off x="640080" y="2953512"/>
-            <a:ext cx="5440680" cy="1078992"/>
-          </a:xfrm>
-          <a:prstGeom prst="rect">
-            <a:avLst/>
-          </a:prstGeom>
-          <a:noFill/>
-        </p:spPr>
-        <p:txBody>
-          <a:bodyPr wrap="square" anchor="t">
-            <a:spAutoFit/>
-          </a:bodyPr>
-          <a:lstStyle/>
-          <a:p>
-            <a:pPr algn="l">
-              <a:lnSpc>
-                <a:spcPct val="108000"/>
-              </a:lnSpc>
-              <a:spcAft>
-                <a:spcPts val="300"/>
-              </a:spcAft>
-            </a:pPr>
-            <a:r>
-              <a:rPr sz="1350" b="1" i="0">
-                <a:solidFill>
-                  <a:srgbClr val="5A1E1B"/>
-                </a:solidFill>
-                <a:latin typeface="Cambria"/>
-              </a:rPr>
-              <a:t>Hardest class?</a:t>
-            </a:r>
-          </a:p>
-          <a:p>
-            <a:pPr algn="l">
-              <a:lnSpc>
-                <a:spcPct val="108000"/>
-              </a:lnSpc>
-              <a:spcAft>
-                <a:spcPts val="300"/>
-              </a:spcAft>
-            </a:pPr>
-            <a:r>
-              <a:rPr sz="1200" b="0" i="0">
-                <a:solidFill>
-                  <a:srgbClr val="2B2320"/>
-                </a:solidFill>
-                <a:latin typeface="Calibri"/>
-              </a:rPr>
-              <a:t>Kebab — varied shapes, often several pieces, resembles other grilled meat (mAP@50 0.70).</a:t>
-            </a:r>
-          </a:p>
-        </p:txBody>
-      </p:sp>
-      <p:sp>
-        <p:nvSpPr>
-          <p:cNvPr id="7" name="TextBox 6"/>
-          <p:cNvSpPr txBox="1"/>
-          <p:nvPr/>
-        </p:nvSpPr>
-        <p:spPr>
-          <a:xfrm>
-            <a:off x="640080" y="4123944"/>
-            <a:ext cx="5440680" cy="1078992"/>
-          </a:xfrm>
-          <a:prstGeom prst="rect">
-            <a:avLst/>
-          </a:prstGeom>
-          <a:noFill/>
-        </p:spPr>
-        <p:txBody>
-          <a:bodyPr wrap="square" anchor="t">
-            <a:spAutoFit/>
-          </a:bodyPr>
-          <a:lstStyle/>
-          <a:p>
-            <a:pPr algn="l">
-              <a:lnSpc>
-                <a:spcPct val="108000"/>
-              </a:lnSpc>
-              <a:spcAft>
-                <a:spcPts val="300"/>
-              </a:spcAft>
-            </a:pPr>
-            <a:r>
-              <a:rPr sz="1350" b="1" i="0">
-                <a:solidFill>
-                  <a:srgbClr val="5A1E1B"/>
-                </a:solidFill>
-                <a:latin typeface="Cambria"/>
-              </a:rPr>
-              <a:t>Did more images always help?</a:t>
-            </a:r>
-          </a:p>
-          <a:p>
-            <a:pPr algn="l">
-              <a:lnSpc>
-                <a:spcPct val="108000"/>
-              </a:lnSpc>
-              <a:spcAft>
-                <a:spcPts val="300"/>
-              </a:spcAft>
-            </a:pPr>
-            <a:r>
-              <a:rPr sz="1200" b="0" i="0">
-                <a:solidFill>
-                  <a:srgbClr val="2B2320"/>
-                </a:solidFill>
-                <a:latin typeface="Calibri"/>
-              </a:rPr>
-              <a:t>To be measured in the v2 round — diverse data matters more than sheer count.</a:t>
-            </a:r>
-          </a:p>
-        </p:txBody>
-      </p:sp>
-      <p:sp>
-        <p:nvSpPr>
-          <p:cNvPr id="8" name="TextBox 7"/>
-          <p:cNvSpPr txBox="1"/>
-          <p:nvPr/>
-        </p:nvSpPr>
-        <p:spPr>
-          <a:xfrm>
-            <a:off x="640080" y="5294376"/>
-            <a:ext cx="5440680" cy="1078992"/>
-          </a:xfrm>
-          <a:prstGeom prst="rect">
-            <a:avLst/>
-          </a:prstGeom>
-          <a:noFill/>
-        </p:spPr>
-        <p:txBody>
-          <a:bodyPr wrap="square" anchor="t">
-            <a:spAutoFit/>
-          </a:bodyPr>
-          <a:lstStyle/>
-          <a:p>
-            <a:pPr algn="l">
-              <a:lnSpc>
-                <a:spcPct val="108000"/>
-              </a:lnSpc>
-              <a:spcAft>
-                <a:spcPts val="300"/>
-              </a:spcAft>
-            </a:pPr>
-            <a:r>
-              <a:rPr sz="1350" b="1" i="0">
-                <a:solidFill>
-                  <a:srgbClr val="5A1E1B"/>
-                </a:solidFill>
-                <a:latin typeface="Cambria"/>
-              </a:rPr>
-              <a:t>Most useful variation?</a:t>
-            </a:r>
-          </a:p>
-          <a:p>
-            <a:pPr algn="l">
-              <a:lnSpc>
-                <a:spcPct val="108000"/>
-              </a:lnSpc>
-              <a:spcAft>
-                <a:spcPts val="300"/>
-              </a:spcAft>
-            </a:pPr>
-            <a:r>
-              <a:rPr sz="1200" b="0" i="0">
-                <a:solidFill>
-                  <a:srgbClr val="2B2320"/>
-                </a:solidFill>
-                <a:latin typeface="Calibri"/>
-              </a:rPr>
-              <a:t>Varied plates, angles &amp; lighting — the model reaches 0.91 recall on unseen photos.</a:t>
-            </a:r>
-          </a:p>
-        </p:txBody>
-      </p:sp>
-      <p:sp>
-        <p:nvSpPr>
-          <p:cNvPr id="9" name="TextBox 8"/>
-          <p:cNvSpPr txBox="1"/>
-          <p:nvPr/>
-        </p:nvSpPr>
-        <p:spPr>
-          <a:xfrm>
-            <a:off x="6172200" y="1783080"/>
-            <a:ext cx="5440680" cy="1078992"/>
-          </a:xfrm>
-          <a:prstGeom prst="rect">
-            <a:avLst/>
-          </a:prstGeom>
-          <a:noFill/>
-        </p:spPr>
-        <p:txBody>
-          <a:bodyPr wrap="square" anchor="t">
-            <a:spAutoFit/>
-          </a:bodyPr>
-          <a:lstStyle/>
-          <a:p>
-            <a:pPr algn="l">
-              <a:lnSpc>
-                <a:spcPct val="108000"/>
-              </a:lnSpc>
-              <a:spcAft>
-                <a:spcPts val="300"/>
-              </a:spcAft>
-            </a:pPr>
-            <a:r>
-              <a:rPr sz="1350" b="1" i="0">
-                <a:solidFill>
-                  <a:srgbClr val="5A1E1B"/>
-                </a:solidFill>
-                <a:latin typeface="Cambria"/>
-              </a:rPr>
-              <a:t>Most common failure mode?</a:t>
-            </a:r>
-          </a:p>
-          <a:p>
-            <a:pPr algn="l">
-              <a:lnSpc>
-                <a:spcPct val="108000"/>
-              </a:lnSpc>
-              <a:spcAft>
-                <a:spcPts val="300"/>
-              </a:spcAft>
-            </a:pPr>
-            <a:r>
-              <a:rPr sz="1200" b="0" i="0">
-                <a:solidFill>
-                  <a:srgbClr val="2B2320"/>
-                </a:solidFill>
-                <a:latin typeface="Calibri"/>
-              </a:rPr>
-              <a:t>False negatives — missing extra pieces on crowded, multi-item plates.</a:t>
-            </a:r>
-          </a:p>
-        </p:txBody>
-      </p:sp>
-      <p:sp>
-        <p:nvSpPr>
-          <p:cNvPr id="10" name="TextBox 9"/>
-          <p:cNvSpPr txBox="1"/>
-          <p:nvPr/>
-        </p:nvSpPr>
-        <p:spPr>
-          <a:xfrm>
-            <a:off x="6172200" y="2953512"/>
-            <a:ext cx="5440680" cy="1078992"/>
-          </a:xfrm>
-          <a:prstGeom prst="rect">
-            <a:avLst/>
-          </a:prstGeom>
-          <a:noFill/>
-        </p:spPr>
-        <p:txBody>
-          <a:bodyPr wrap="square" anchor="t">
-            <a:spAutoFit/>
-          </a:bodyPr>
-          <a:lstStyle/>
-          <a:p>
-            <a:pPr algn="l">
-              <a:lnSpc>
-                <a:spcPct val="108000"/>
-              </a:lnSpc>
-              <a:spcAft>
-                <a:spcPts val="300"/>
-              </a:spcAft>
-            </a:pPr>
-            <a:r>
-              <a:rPr sz="1350" b="1" i="0">
-                <a:solidFill>
-                  <a:srgbClr val="5A1E1B"/>
-                </a:solidFill>
-                <a:latin typeface="Cambria"/>
-              </a:rPr>
-              <a:t>Overfit to a plate / camera?</a:t>
-            </a:r>
-          </a:p>
-          <a:p>
-            <a:pPr algn="l">
-              <a:lnSpc>
-                <a:spcPct val="108000"/>
-              </a:lnSpc>
-              <a:spcAft>
-                <a:spcPts val="300"/>
-              </a:spcAft>
-            </a:pPr>
-            <a:r>
-              <a:rPr sz="1200" b="0" i="0">
-                <a:solidFill>
-                  <a:srgbClr val="2B2320"/>
-                </a:solidFill>
-                <a:latin typeface="Calibri"/>
-              </a:rPr>
-              <a:t>No severe overfit — strong unseen-test scores; watch classes from similar screenshots.</a:t>
-            </a:r>
-          </a:p>
-        </p:txBody>
-      </p:sp>
-      <p:sp>
-        <p:nvSpPr>
-          <p:cNvPr id="11" name="TextBox 10"/>
-          <p:cNvSpPr txBox="1"/>
-          <p:nvPr/>
-        </p:nvSpPr>
-        <p:spPr>
-          <a:xfrm>
-            <a:off x="6172200" y="4123944"/>
-            <a:ext cx="5440680" cy="1078992"/>
-          </a:xfrm>
-          <a:prstGeom prst="rect">
-            <a:avLst/>
-          </a:prstGeom>
-          <a:noFill/>
-        </p:spPr>
-        <p:txBody>
-          <a:bodyPr wrap="square" anchor="t">
-            <a:spAutoFit/>
-          </a:bodyPr>
-          <a:lstStyle/>
-          <a:p>
-            <a:pPr algn="l">
-              <a:lnSpc>
-                <a:spcPct val="108000"/>
-              </a:lnSpc>
-              <a:spcAft>
-                <a:spcPts val="300"/>
-              </a:spcAft>
-            </a:pPr>
-            <a:r>
-              <a:rPr sz="1350" b="1" i="0">
-                <a:solidFill>
-                  <a:srgbClr val="5A1E1B"/>
-                </a:solidFill>
-                <a:latin typeface="Cambria"/>
-              </a:rPr>
-              <a:t>One more day of data?</a:t>
-            </a:r>
-          </a:p>
-          <a:p>
-            <a:pPr algn="l">
-              <a:lnSpc>
-                <a:spcPct val="108000"/>
-              </a:lnSpc>
-              <a:spcAft>
-                <a:spcPts val="300"/>
-              </a:spcAft>
-            </a:pPr>
-            <a:r>
-              <a:rPr sz="1200" b="0" i="0">
-                <a:solidFill>
-                  <a:srgbClr val="2B2320"/>
-                </a:solidFill>
-                <a:latin typeface="Calibri"/>
-              </a:rPr>
-              <a:t>Crowded plates, more Nakhi &amp; Luqaimat, and more Kebab variety.</a:t>
-            </a:r>
-          </a:p>
-        </p:txBody>
-      </p:sp>
-      <p:sp>
-        <p:nvSpPr>
-          <p:cNvPr id="12" name="TextBox 11"/>
-          <p:cNvSpPr txBox="1"/>
-          <p:nvPr/>
-        </p:nvSpPr>
-        <p:spPr>
-          <a:xfrm>
-            <a:off x="6172200" y="5294376"/>
-            <a:ext cx="5440680" cy="1078992"/>
-          </a:xfrm>
-          <a:prstGeom prst="rect">
-            <a:avLst/>
-          </a:prstGeom>
-          <a:noFill/>
-        </p:spPr>
-        <p:txBody>
-          <a:bodyPr wrap="square" anchor="t">
-            <a:spAutoFit/>
-          </a:bodyPr>
-          <a:lstStyle/>
-          <a:p>
-            <a:pPr algn="l">
-              <a:lnSpc>
-                <a:spcPct val="108000"/>
-              </a:lnSpc>
-              <a:spcAft>
-                <a:spcPts val="300"/>
-              </a:spcAft>
-            </a:pPr>
-            <a:r>
-              <a:rPr sz="1350" b="1" i="0">
-                <a:solidFill>
-                  <a:srgbClr val="5A1E1B"/>
-                </a:solidFill>
-                <a:latin typeface="Cambria"/>
-              </a:rPr>
-              <a:t>Before real deployment?</a:t>
-            </a:r>
-          </a:p>
-          <a:p>
-            <a:pPr algn="l">
-              <a:lnSpc>
-                <a:spcPct val="108000"/>
-              </a:lnSpc>
-              <a:spcAft>
-                <a:spcPts val="300"/>
-              </a:spcAft>
-            </a:pPr>
-            <a:r>
-              <a:rPr sz="1200" b="0" i="0">
-                <a:solidFill>
-                  <a:srgbClr val="2B2320"/>
-                </a:solidFill>
-                <a:latin typeface="Calibri"/>
-              </a:rPr>
-              <a:t>More real-world phones &amp; lighting, tune the confidence threshold, add a user-feedback loop.</a:t>
             </a:r>
           </a:p>
         </p:txBody>
